--- a/EduScript_Final_Project_Review_3.pptx
+++ b/EduScript_Final_Project_Review_3.pptx
@@ -4,25 +4,28 @@
   <p:sldMasterIdLst>
     <p:sldMasterId id="2147483648" r:id="rId1"/>
   </p:sldMasterIdLst>
+  <p:notesMasterIdLst>
+    <p:notesMasterId r:id="rId18"/>
+  </p:notesMasterIdLst>
   <p:sldIdLst>
-    <p:sldId id="256" r:id="rId7"/>
-    <p:sldId id="257" r:id="rId8"/>
-    <p:sldId id="258" r:id="rId9"/>
-    <p:sldId id="259" r:id="rId10"/>
-    <p:sldId id="260" r:id="rId11"/>
-    <p:sldId id="261" r:id="rId12"/>
-    <p:sldId id="262" r:id="rId13"/>
-    <p:sldId id="263" r:id="rId14"/>
-    <p:sldId id="264" r:id="rId15"/>
-    <p:sldId id="265" r:id="rId16"/>
-    <p:sldId id="266" r:id="rId17"/>
-    <p:sldId id="267" r:id="rId18"/>
-    <p:sldId id="268" r:id="rId19"/>
-    <p:sldId id="269" r:id="rId20"/>
-    <p:sldId id="270" r:id="rId21"/>
-    <p:sldId id="271" r:id="rId22"/>
+    <p:sldId id="256" r:id="rId2"/>
+    <p:sldId id="257" r:id="rId3"/>
+    <p:sldId id="258" r:id="rId4"/>
+    <p:sldId id="259" r:id="rId5"/>
+    <p:sldId id="260" r:id="rId6"/>
+    <p:sldId id="261" r:id="rId7"/>
+    <p:sldId id="262" r:id="rId8"/>
+    <p:sldId id="263" r:id="rId9"/>
+    <p:sldId id="264" r:id="rId10"/>
+    <p:sldId id="265" r:id="rId11"/>
+    <p:sldId id="266" r:id="rId12"/>
+    <p:sldId id="267" r:id="rId13"/>
+    <p:sldId id="268" r:id="rId14"/>
+    <p:sldId id="269" r:id="rId15"/>
+    <p:sldId id="270" r:id="rId16"/>
+    <p:sldId id="271" r:id="rId17"/>
   </p:sldIdLst>
-  <p:sldSz cx="12191695" cy="6858000" type="screen4x3"/>
+  <p:sldSz cx="12192000" cy="6858000"/>
   <p:notesSz cx="6858000" cy="9144000"/>
   <p:defaultTextStyle>
     <a:defPPr>
@@ -122,6 +125,440 @@
 </p:presentation>
 </file>
 
+<file path=ppt/notesMasters/notesMaster1.xml><?xml version="1.0" encoding="utf-8"?>
+<p:notesMaster xmlns:a="http://schemas.openxmlformats.org/drawingml/2006/main" xmlns:r="http://schemas.openxmlformats.org/officeDocument/2006/relationships" xmlns:p="http://schemas.openxmlformats.org/presentationml/2006/main">
+  <p:cSld>
+    <p:bg>
+      <p:bgRef idx="1001">
+        <a:schemeClr val="bg1"/>
+      </p:bgRef>
+    </p:bg>
+    <p:spTree>
+      <p:nvGrpSpPr>
+        <p:cNvPr id="1" name=""/>
+        <p:cNvGrpSpPr/>
+        <p:nvPr/>
+      </p:nvGrpSpPr>
+      <p:grpSpPr>
+        <a:xfrm>
+          <a:off x="0" y="0"/>
+          <a:ext cx="0" cy="0"/>
+          <a:chOff x="0" y="0"/>
+          <a:chExt cx="0" cy="0"/>
+        </a:xfrm>
+      </p:grpSpPr>
+      <p:sp>
+        <p:nvSpPr>
+          <p:cNvPr id="2" name="Header Placeholder 1"/>
+          <p:cNvSpPr>
+            <a:spLocks noGrp="1"/>
+          </p:cNvSpPr>
+          <p:nvPr>
+            <p:ph type="hdr" sz="quarter"/>
+          </p:nvPr>
+        </p:nvSpPr>
+        <p:spPr>
+          <a:xfrm>
+            <a:off x="0" y="0"/>
+            <a:ext cx="2971800" cy="457200"/>
+          </a:xfrm>
+          <a:prstGeom prst="rect">
+            <a:avLst/>
+          </a:prstGeom>
+        </p:spPr>
+        <p:txBody>
+          <a:bodyPr vert="horz" lIns="91440" tIns="45720" rIns="91440" bIns="45720" rtlCol="0"/>
+          <a:lstStyle>
+            <a:lvl1pPr algn="l">
+              <a:defRPr sz="1200"/>
+            </a:lvl1pPr>
+          </a:lstStyle>
+          <a:p>
+            <a:endParaRPr lang="en-IN"/>
+          </a:p>
+        </p:txBody>
+      </p:sp>
+      <p:sp>
+        <p:nvSpPr>
+          <p:cNvPr id="3" name="Date Placeholder 2"/>
+          <p:cNvSpPr>
+            <a:spLocks noGrp="1"/>
+          </p:cNvSpPr>
+          <p:nvPr>
+            <p:ph type="dt" idx="1"/>
+          </p:nvPr>
+        </p:nvSpPr>
+        <p:spPr>
+          <a:xfrm>
+            <a:off x="3884613" y="0"/>
+            <a:ext cx="2971800" cy="457200"/>
+          </a:xfrm>
+          <a:prstGeom prst="rect">
+            <a:avLst/>
+          </a:prstGeom>
+        </p:spPr>
+        <p:txBody>
+          <a:bodyPr vert="horz" lIns="91440" tIns="45720" rIns="91440" bIns="45720" rtlCol="0"/>
+          <a:lstStyle>
+            <a:lvl1pPr algn="r">
+              <a:defRPr sz="1200"/>
+            </a:lvl1pPr>
+          </a:lstStyle>
+          <a:p>
+            <a:fld id="{2CA2B99B-88B3-4DC7-AB4F-78EFBD36AD97}" type="datetimeFigureOut">
+              <a:rPr lang="en-IN" smtClean="0"/>
+              <a:t>09-10-2026</a:t>
+            </a:fld>
+            <a:endParaRPr lang="en-IN"/>
+          </a:p>
+        </p:txBody>
+      </p:sp>
+      <p:sp>
+        <p:nvSpPr>
+          <p:cNvPr id="4" name="Slide Image Placeholder 3"/>
+          <p:cNvSpPr>
+            <a:spLocks noGrp="1" noRot="1" noChangeAspect="1"/>
+          </p:cNvSpPr>
+          <p:nvPr>
+            <p:ph type="sldImg" idx="2"/>
+          </p:nvPr>
+        </p:nvSpPr>
+        <p:spPr>
+          <a:xfrm>
+            <a:off x="381000" y="685800"/>
+            <a:ext cx="6096000" cy="3429000"/>
+          </a:xfrm>
+          <a:prstGeom prst="rect">
+            <a:avLst/>
+          </a:prstGeom>
+          <a:noFill/>
+          <a:ln w="12700">
+            <a:solidFill>
+              <a:prstClr val="black"/>
+            </a:solidFill>
+          </a:ln>
+        </p:spPr>
+        <p:txBody>
+          <a:bodyPr vert="horz" lIns="91440" tIns="45720" rIns="91440" bIns="45720" rtlCol="0" anchor="ctr"/>
+          <a:lstStyle/>
+          <a:p>
+            <a:endParaRPr lang="en-IN"/>
+          </a:p>
+        </p:txBody>
+      </p:sp>
+      <p:sp>
+        <p:nvSpPr>
+          <p:cNvPr id="5" name="Notes Placeholder 4"/>
+          <p:cNvSpPr>
+            <a:spLocks noGrp="1"/>
+          </p:cNvSpPr>
+          <p:nvPr>
+            <p:ph type="body" sz="quarter" idx="3"/>
+          </p:nvPr>
+        </p:nvSpPr>
+        <p:spPr>
+          <a:xfrm>
+            <a:off x="685800" y="4343400"/>
+            <a:ext cx="5486400" cy="4114800"/>
+          </a:xfrm>
+          <a:prstGeom prst="rect">
+            <a:avLst/>
+          </a:prstGeom>
+        </p:spPr>
+        <p:txBody>
+          <a:bodyPr vert="horz" lIns="91440" tIns="45720" rIns="91440" bIns="45720" rtlCol="0"/>
+          <a:lstStyle/>
+          <a:p>
+            <a:pPr lvl="0"/>
+            <a:r>
+              <a:rPr lang="en-US" smtClean="0"/>
+              <a:t>Click to edit Master text styles</a:t>
+            </a:r>
+          </a:p>
+          <a:p>
+            <a:pPr lvl="1"/>
+            <a:r>
+              <a:rPr lang="en-US" smtClean="0"/>
+              <a:t>Second level</a:t>
+            </a:r>
+          </a:p>
+          <a:p>
+            <a:pPr lvl="2"/>
+            <a:r>
+              <a:rPr lang="en-US" smtClean="0"/>
+              <a:t>Third level</a:t>
+            </a:r>
+          </a:p>
+          <a:p>
+            <a:pPr lvl="3"/>
+            <a:r>
+              <a:rPr lang="en-US" smtClean="0"/>
+              <a:t>Fourth level</a:t>
+            </a:r>
+          </a:p>
+          <a:p>
+            <a:pPr lvl="4"/>
+            <a:r>
+              <a:rPr lang="en-US" smtClean="0"/>
+              <a:t>Fifth level</a:t>
+            </a:r>
+            <a:endParaRPr lang="en-IN"/>
+          </a:p>
+        </p:txBody>
+      </p:sp>
+      <p:sp>
+        <p:nvSpPr>
+          <p:cNvPr id="6" name="Footer Placeholder 5"/>
+          <p:cNvSpPr>
+            <a:spLocks noGrp="1"/>
+          </p:cNvSpPr>
+          <p:nvPr>
+            <p:ph type="ftr" sz="quarter" idx="4"/>
+          </p:nvPr>
+        </p:nvSpPr>
+        <p:spPr>
+          <a:xfrm>
+            <a:off x="0" y="8685213"/>
+            <a:ext cx="2971800" cy="457200"/>
+          </a:xfrm>
+          <a:prstGeom prst="rect">
+            <a:avLst/>
+          </a:prstGeom>
+        </p:spPr>
+        <p:txBody>
+          <a:bodyPr vert="horz" lIns="91440" tIns="45720" rIns="91440" bIns="45720" rtlCol="0" anchor="b"/>
+          <a:lstStyle>
+            <a:lvl1pPr algn="l">
+              <a:defRPr sz="1200"/>
+            </a:lvl1pPr>
+          </a:lstStyle>
+          <a:p>
+            <a:endParaRPr lang="en-IN"/>
+          </a:p>
+        </p:txBody>
+      </p:sp>
+      <p:sp>
+        <p:nvSpPr>
+          <p:cNvPr id="7" name="Slide Number Placeholder 6"/>
+          <p:cNvSpPr>
+            <a:spLocks noGrp="1"/>
+          </p:cNvSpPr>
+          <p:nvPr>
+            <p:ph type="sldNum" sz="quarter" idx="5"/>
+          </p:nvPr>
+        </p:nvSpPr>
+        <p:spPr>
+          <a:xfrm>
+            <a:off x="3884613" y="8685213"/>
+            <a:ext cx="2971800" cy="457200"/>
+          </a:xfrm>
+          <a:prstGeom prst="rect">
+            <a:avLst/>
+          </a:prstGeom>
+        </p:spPr>
+        <p:txBody>
+          <a:bodyPr vert="horz" lIns="91440" tIns="45720" rIns="91440" bIns="45720" rtlCol="0" anchor="b"/>
+          <a:lstStyle>
+            <a:lvl1pPr algn="r">
+              <a:defRPr sz="1200"/>
+            </a:lvl1pPr>
+          </a:lstStyle>
+          <a:p>
+            <a:fld id="{DD9BD553-DF3C-42D2-9716-5AEC36F8927D}" type="slidenum">
+              <a:rPr lang="en-IN" smtClean="0"/>
+              <a:t>‹#›</a:t>
+            </a:fld>
+            <a:endParaRPr lang="en-IN"/>
+          </a:p>
+        </p:txBody>
+      </p:sp>
+    </p:spTree>
+    <p:extLst>
+      <p:ext uri="{BB962C8B-B14F-4D97-AF65-F5344CB8AC3E}">
+        <p14:creationId xmlns:p14="http://schemas.microsoft.com/office/powerpoint/2010/main" val="3248374177"/>
+      </p:ext>
+    </p:extLst>
+  </p:cSld>
+  <p:clrMap bg1="lt1" tx1="dk1" bg2="lt2" tx2="dk2" accent1="accent1" accent2="accent2" accent3="accent3" accent4="accent4" accent5="accent5" accent6="accent6" hlink="hlink" folHlink="folHlink"/>
+  <p:notesStyle>
+    <a:lvl1pPr marL="0" algn="l" defTabSz="914400" rtl="0" eaLnBrk="1" latinLnBrk="0" hangingPunct="1">
+      <a:defRPr sz="1200" kern="1200">
+        <a:solidFill>
+          <a:schemeClr val="tx1"/>
+        </a:solidFill>
+        <a:latin typeface="+mn-lt"/>
+        <a:ea typeface="+mn-ea"/>
+        <a:cs typeface="+mn-cs"/>
+      </a:defRPr>
+    </a:lvl1pPr>
+    <a:lvl2pPr marL="457200" algn="l" defTabSz="914400" rtl="0" eaLnBrk="1" latinLnBrk="0" hangingPunct="1">
+      <a:defRPr sz="1200" kern="1200">
+        <a:solidFill>
+          <a:schemeClr val="tx1"/>
+        </a:solidFill>
+        <a:latin typeface="+mn-lt"/>
+        <a:ea typeface="+mn-ea"/>
+        <a:cs typeface="+mn-cs"/>
+      </a:defRPr>
+    </a:lvl2pPr>
+    <a:lvl3pPr marL="914400" algn="l" defTabSz="914400" rtl="0" eaLnBrk="1" latinLnBrk="0" hangingPunct="1">
+      <a:defRPr sz="1200" kern="1200">
+        <a:solidFill>
+          <a:schemeClr val="tx1"/>
+        </a:solidFill>
+        <a:latin typeface="+mn-lt"/>
+        <a:ea typeface="+mn-ea"/>
+        <a:cs typeface="+mn-cs"/>
+      </a:defRPr>
+    </a:lvl3pPr>
+    <a:lvl4pPr marL="1371600" algn="l" defTabSz="914400" rtl="0" eaLnBrk="1" latinLnBrk="0" hangingPunct="1">
+      <a:defRPr sz="1200" kern="1200">
+        <a:solidFill>
+          <a:schemeClr val="tx1"/>
+        </a:solidFill>
+        <a:latin typeface="+mn-lt"/>
+        <a:ea typeface="+mn-ea"/>
+        <a:cs typeface="+mn-cs"/>
+      </a:defRPr>
+    </a:lvl4pPr>
+    <a:lvl5pPr marL="1828800" algn="l" defTabSz="914400" rtl="0" eaLnBrk="1" latinLnBrk="0" hangingPunct="1">
+      <a:defRPr sz="1200" kern="1200">
+        <a:solidFill>
+          <a:schemeClr val="tx1"/>
+        </a:solidFill>
+        <a:latin typeface="+mn-lt"/>
+        <a:ea typeface="+mn-ea"/>
+        <a:cs typeface="+mn-cs"/>
+      </a:defRPr>
+    </a:lvl5pPr>
+    <a:lvl6pPr marL="2286000" algn="l" defTabSz="914400" rtl="0" eaLnBrk="1" latinLnBrk="0" hangingPunct="1">
+      <a:defRPr sz="1200" kern="1200">
+        <a:solidFill>
+          <a:schemeClr val="tx1"/>
+        </a:solidFill>
+        <a:latin typeface="+mn-lt"/>
+        <a:ea typeface="+mn-ea"/>
+        <a:cs typeface="+mn-cs"/>
+      </a:defRPr>
+    </a:lvl6pPr>
+    <a:lvl7pPr marL="2743200" algn="l" defTabSz="914400" rtl="0" eaLnBrk="1" latinLnBrk="0" hangingPunct="1">
+      <a:defRPr sz="1200" kern="1200">
+        <a:solidFill>
+          <a:schemeClr val="tx1"/>
+        </a:solidFill>
+        <a:latin typeface="+mn-lt"/>
+        <a:ea typeface="+mn-ea"/>
+        <a:cs typeface="+mn-cs"/>
+      </a:defRPr>
+    </a:lvl7pPr>
+    <a:lvl8pPr marL="3200400" algn="l" defTabSz="914400" rtl="0" eaLnBrk="1" latinLnBrk="0" hangingPunct="1">
+      <a:defRPr sz="1200" kern="1200">
+        <a:solidFill>
+          <a:schemeClr val="tx1"/>
+        </a:solidFill>
+        <a:latin typeface="+mn-lt"/>
+        <a:ea typeface="+mn-ea"/>
+        <a:cs typeface="+mn-cs"/>
+      </a:defRPr>
+    </a:lvl8pPr>
+    <a:lvl9pPr marL="3657600" algn="l" defTabSz="914400" rtl="0" eaLnBrk="1" latinLnBrk="0" hangingPunct="1">
+      <a:defRPr sz="1200" kern="1200">
+        <a:solidFill>
+          <a:schemeClr val="tx1"/>
+        </a:solidFill>
+        <a:latin typeface="+mn-lt"/>
+        <a:ea typeface="+mn-ea"/>
+        <a:cs typeface="+mn-cs"/>
+      </a:defRPr>
+    </a:lvl9pPr>
+  </p:notesStyle>
+</p:notesMaster>
+</file>
+
+<file path=ppt/notesSlides/notesSlide1.xml><?xml version="1.0" encoding="utf-8"?>
+<p:notes xmlns:a="http://schemas.openxmlformats.org/drawingml/2006/main" xmlns:r="http://schemas.openxmlformats.org/officeDocument/2006/relationships" xmlns:p="http://schemas.openxmlformats.org/presentationml/2006/main">
+  <p:cSld>
+    <p:spTree>
+      <p:nvGrpSpPr>
+        <p:cNvPr id="1" name=""/>
+        <p:cNvGrpSpPr/>
+        <p:nvPr/>
+      </p:nvGrpSpPr>
+      <p:grpSpPr>
+        <a:xfrm>
+          <a:off x="0" y="0"/>
+          <a:ext cx="0" cy="0"/>
+          <a:chOff x="0" y="0"/>
+          <a:chExt cx="0" cy="0"/>
+        </a:xfrm>
+      </p:grpSpPr>
+      <p:sp>
+        <p:nvSpPr>
+          <p:cNvPr id="2" name="Slide Image Placeholder 1"/>
+          <p:cNvSpPr>
+            <a:spLocks noGrp="1" noRot="1" noChangeAspect="1"/>
+          </p:cNvSpPr>
+          <p:nvPr>
+            <p:ph type="sldImg"/>
+          </p:nvPr>
+        </p:nvSpPr>
+        <p:spPr/>
+      </p:sp>
+      <p:sp>
+        <p:nvSpPr>
+          <p:cNvPr id="3" name="Notes Placeholder 2"/>
+          <p:cNvSpPr>
+            <a:spLocks noGrp="1"/>
+          </p:cNvSpPr>
+          <p:nvPr>
+            <p:ph type="body" idx="1"/>
+          </p:nvPr>
+        </p:nvSpPr>
+        <p:spPr/>
+        <p:txBody>
+          <a:bodyPr/>
+          <a:lstStyle/>
+          <a:p>
+            <a:endParaRPr lang="en-IN" dirty="0"/>
+          </a:p>
+        </p:txBody>
+      </p:sp>
+      <p:sp>
+        <p:nvSpPr>
+          <p:cNvPr id="4" name="Slide Number Placeholder 3"/>
+          <p:cNvSpPr>
+            <a:spLocks noGrp="1"/>
+          </p:cNvSpPr>
+          <p:nvPr>
+            <p:ph type="sldNum" sz="quarter" idx="10"/>
+          </p:nvPr>
+        </p:nvSpPr>
+        <p:spPr/>
+        <p:txBody>
+          <a:bodyPr/>
+          <a:lstStyle/>
+          <a:p>
+            <a:fld id="{DD9BD553-DF3C-42D2-9716-5AEC36F8927D}" type="slidenum">
+              <a:rPr lang="en-IN" smtClean="0"/>
+              <a:t>16</a:t>
+            </a:fld>
+            <a:endParaRPr lang="en-IN"/>
+          </a:p>
+        </p:txBody>
+      </p:sp>
+    </p:spTree>
+    <p:extLst>
+      <p:ext uri="{BB962C8B-B14F-4D97-AF65-F5344CB8AC3E}">
+        <p14:creationId xmlns:p14="http://schemas.microsoft.com/office/powerpoint/2010/main" val="456636811"/>
+      </p:ext>
+    </p:extLst>
+  </p:cSld>
+  <p:clrMapOvr>
+    <a:masterClrMapping/>
+  </p:clrMapOvr>
+</p:notes>
+</file>
+
 <file path=ppt/slideLayouts/slideLayout1.xml><?xml version="1.0" encoding="utf-8"?>
 <p:sldLayout xmlns:a="http://schemas.openxmlformats.org/drawingml/2006/main" xmlns:r="http://schemas.openxmlformats.org/officeDocument/2006/relationships" xmlns:p="http://schemas.openxmlformats.org/presentationml/2006/main" type="title" preserve="1">
   <p:cSld name="Title Slide">
@@ -303,7 +740,7 @@
           <a:p>
             <a:fld id="{5BCAD085-E8A6-8845-BD4E-CB4CCA059FC4}" type="datetimeFigureOut">
               <a:rPr lang="en-US" smtClean="0"/>
-              <a:t>1/27/13</a:t>
+              <a:t>10/9/2026</a:t>
             </a:fld>
             <a:endParaRPr lang="en-US"/>
           </a:p>
@@ -473,7 +910,7 @@
           <a:p>
             <a:fld id="{5BCAD085-E8A6-8845-BD4E-CB4CCA059FC4}" type="datetimeFigureOut">
               <a:rPr lang="en-US" smtClean="0"/>
-              <a:t>1/27/13</a:t>
+              <a:t>10/9/2026</a:t>
             </a:fld>
             <a:endParaRPr lang="en-US"/>
           </a:p>
@@ -653,7 +1090,7 @@
           <a:p>
             <a:fld id="{5BCAD085-E8A6-8845-BD4E-CB4CCA059FC4}" type="datetimeFigureOut">
               <a:rPr lang="en-US" smtClean="0"/>
-              <a:t>1/27/13</a:t>
+              <a:t>10/9/2026</a:t>
             </a:fld>
             <a:endParaRPr lang="en-US"/>
           </a:p>
@@ -823,7 +1260,7 @@
           <a:p>
             <a:fld id="{5BCAD085-E8A6-8845-BD4E-CB4CCA059FC4}" type="datetimeFigureOut">
               <a:rPr lang="en-US" smtClean="0"/>
-              <a:t>1/27/13</a:t>
+              <a:t>10/9/2026</a:t>
             </a:fld>
             <a:endParaRPr lang="en-US"/>
           </a:p>
@@ -1069,7 +1506,7 @@
           <a:p>
             <a:fld id="{5BCAD085-E8A6-8845-BD4E-CB4CCA059FC4}" type="datetimeFigureOut">
               <a:rPr lang="en-US" smtClean="0"/>
-              <a:t>1/27/13</a:t>
+              <a:t>10/9/2026</a:t>
             </a:fld>
             <a:endParaRPr lang="en-US"/>
           </a:p>
@@ -1357,7 +1794,7 @@
           <a:p>
             <a:fld id="{5BCAD085-E8A6-8845-BD4E-CB4CCA059FC4}" type="datetimeFigureOut">
               <a:rPr lang="en-US" smtClean="0"/>
-              <a:t>1/27/13</a:t>
+              <a:t>10/9/2026</a:t>
             </a:fld>
             <a:endParaRPr lang="en-US"/>
           </a:p>
@@ -1779,7 +2216,7 @@
           <a:p>
             <a:fld id="{5BCAD085-E8A6-8845-BD4E-CB4CCA059FC4}" type="datetimeFigureOut">
               <a:rPr lang="en-US" smtClean="0"/>
-              <a:t>1/27/13</a:t>
+              <a:t>10/9/2026</a:t>
             </a:fld>
             <a:endParaRPr lang="en-US"/>
           </a:p>
@@ -1897,7 +2334,7 @@
           <a:p>
             <a:fld id="{5BCAD085-E8A6-8845-BD4E-CB4CCA059FC4}" type="datetimeFigureOut">
               <a:rPr lang="en-US" smtClean="0"/>
-              <a:t>1/27/13</a:t>
+              <a:t>10/9/2026</a:t>
             </a:fld>
             <a:endParaRPr lang="en-US"/>
           </a:p>
@@ -1992,7 +2429,7 @@
           <a:p>
             <a:fld id="{5BCAD085-E8A6-8845-BD4E-CB4CCA059FC4}" type="datetimeFigureOut">
               <a:rPr lang="en-US" smtClean="0"/>
-              <a:t>1/27/13</a:t>
+              <a:t>10/9/2026</a:t>
             </a:fld>
             <a:endParaRPr lang="en-US"/>
           </a:p>
@@ -2269,7 +2706,7 @@
           <a:p>
             <a:fld id="{5BCAD085-E8A6-8845-BD4E-CB4CCA059FC4}" type="datetimeFigureOut">
               <a:rPr lang="en-US" smtClean="0"/>
-              <a:t>1/27/13</a:t>
+              <a:t>10/9/2026</a:t>
             </a:fld>
             <a:endParaRPr lang="en-US"/>
           </a:p>
@@ -2522,7 +2959,7 @@
           <a:p>
             <a:fld id="{5BCAD085-E8A6-8845-BD4E-CB4CCA059FC4}" type="datetimeFigureOut">
               <a:rPr lang="en-US" smtClean="0"/>
-              <a:t>1/27/13</a:t>
+              <a:t>10/9/2026</a:t>
             </a:fld>
             <a:endParaRPr lang="en-US"/>
           </a:p>
@@ -2735,7 +3172,7 @@
           <a:p>
             <a:fld id="{5BCAD085-E8A6-8845-BD4E-CB4CCA059FC4}" type="datetimeFigureOut">
               <a:rPr lang="en-US" smtClean="0"/>
-              <a:t>1/27/13</a:t>
+              <a:t>10/9/2026</a:t>
             </a:fld>
             <a:endParaRPr lang="en-US"/>
           </a:p>
@@ -3094,7 +3531,7 @@
 </file>
 
 <file path=ppt/slides/slide1.xml><?xml version="1.0" encoding="utf-8"?>
-<p:sld xmlns:a="http://schemas.openxmlformats.org/drawingml/2006/main" xmlns:p="http://schemas.openxmlformats.org/presentationml/2006/main" xmlns:r="http://schemas.openxmlformats.org/officeDocument/2006/relationships">
+<p:sld xmlns:a="http://schemas.openxmlformats.org/drawingml/2006/main" xmlns:r="http://schemas.openxmlformats.org/officeDocument/2006/relationships" xmlns:p="http://schemas.openxmlformats.org/presentationml/2006/main">
   <p:cSld>
     <p:spTree>
       <p:nvGrpSpPr>
@@ -3102,7 +3539,14 @@
         <p:cNvGrpSpPr/>
         <p:nvPr/>
       </p:nvGrpSpPr>
-      <p:grpSpPr/>
+      <p:grpSpPr>
+        <a:xfrm>
+          <a:off x="0" y="0"/>
+          <a:ext cx="0" cy="0"/>
+          <a:chOff x="0" y="0"/>
+          <a:chExt cx="0" cy="0"/>
+        </a:xfrm>
+      </p:grpSpPr>
       <p:sp>
         <p:nvSpPr>
           <p:cNvPr id="2" name="Rectangle 1"/>
@@ -3118,7 +3562,7 @@
             <a:avLst/>
           </a:prstGeom>
           <a:solidFill>
-            <a:srgbClr val="0F172A"/>
+            <a:schemeClr val="tx1"/>
           </a:solidFill>
           <a:ln>
             <a:noFill/>
@@ -3143,6 +3587,7 @@
           <a:lstStyle/>
           <a:p>
             <a:pPr algn="ctr"/>
+            <a:endParaRPr/>
           </a:p>
         </p:txBody>
       </p:sp>
@@ -3186,6 +3631,7 @@
           <a:lstStyle/>
           <a:p>
             <a:pPr algn="ctr"/>
+            <a:endParaRPr/>
           </a:p>
         </p:txBody>
       </p:sp>
@@ -3204,7 +3650,9 @@
             <a:avLst/>
           </a:prstGeom>
           <a:solidFill>
-            <a:srgbClr val="1E3A8A"/>
+            <a:schemeClr val="bg1">
+              <a:lumMod val="50000"/>
+            </a:schemeClr>
           </a:solidFill>
           <a:ln>
             <a:solidFill>
@@ -3238,7 +3686,44 @@
               </a:defRPr>
             </a:pPr>
             <a:r>
-              <a:t>COMPILER DESIGN LABORATORY • REVIEW 3</a:t>
+              <a:rPr dirty="0">
+                <a:solidFill>
+                  <a:schemeClr val="tx1"/>
+                </a:solidFill>
+              </a:rPr>
+              <a:t>COMPILER DESIGN </a:t>
+            </a:r>
+            <a:r>
+              <a:rPr dirty="0" smtClean="0">
+                <a:solidFill>
+                  <a:schemeClr val="tx1"/>
+                </a:solidFill>
+              </a:rPr>
+              <a:t>LAB </a:t>
+            </a:r>
+            <a:r>
+              <a:rPr lang="en-IN" dirty="0" smtClean="0">
+                <a:solidFill>
+                  <a:schemeClr val="tx1"/>
+                </a:solidFill>
+              </a:rPr>
+              <a:t>-</a:t>
+            </a:r>
+            <a:r>
+              <a:rPr dirty="0" smtClean="0">
+                <a:solidFill>
+                  <a:schemeClr val="tx1"/>
+                </a:solidFill>
+              </a:rPr>
+              <a:t> </a:t>
+            </a:r>
+            <a:r>
+              <a:rPr dirty="0">
+                <a:solidFill>
+                  <a:schemeClr val="tx1"/>
+                </a:solidFill>
+              </a:rPr>
+              <a:t>REVIEW 3</a:t>
             </a:r>
           </a:p>
         </p:txBody>
@@ -3273,10 +3758,18 @@
               </a:defRPr>
             </a:pPr>
             <a:r>
-              <a:t>EduScript: A Customizable Lightweight</a:t>
-            </a:r>
-            <a:br/>
-            <a:r>
+              <a:rPr dirty="0" err="1"/>
+              <a:t>EduScript</a:t>
+            </a:r>
+            <a:r>
+              <a:rPr dirty="0"/>
+              <a:t>: A Customizable Lightweight</a:t>
+            </a:r>
+            <a:br>
+              <a:rPr dirty="0"/>
+            </a:br>
+            <a:r>
+              <a:rPr dirty="0"/>
               <a:t>Compiler and Interpreter</a:t>
             </a:r>
           </a:p>
@@ -3291,7 +3784,7 @@
         <p:spPr>
           <a:xfrm>
             <a:off x="914400" y="3566160"/>
-            <a:ext cx="10362895" cy="731520"/>
+            <a:ext cx="10362895" cy="523220"/>
           </a:xfrm>
           <a:prstGeom prst="rect">
             <a:avLst/>
@@ -3312,6 +3805,13 @@
               </a:defRPr>
             </a:pPr>
             <a:r>
+              <a:rPr dirty="0">
+                <a:solidFill>
+                  <a:schemeClr val="bg1">
+                    <a:lumMod val="75000"/>
+                  </a:schemeClr>
+                </a:solidFill>
+              </a:rPr>
               <a:t>End-to-End Compiler Pipeline: Lexical Analysis → Recursive Descent Parser → AST → Scoped Symbol Table → Semantic Analyzer → Three-Address Code (TAC) → Virtual Machine Interpreter</a:t>
             </a:r>
           </a:p>
@@ -3355,7 +3855,7 @@
           </a:fontRef>
         </p:style>
         <p:txBody>
-          <a:bodyPr rtlCol="0" anchor="ctr" wrap="square"/>
+          <a:bodyPr wrap="square" rtlCol="0" anchor="ctr"/>
           <a:lstStyle/>
           <a:p>
             <a:pPr algn="ctr">
@@ -3369,6 +3869,7 @@
               </a:defRPr>
             </a:pPr>
             <a:r>
+              <a:rPr dirty="0"/>
               <a:t>STUDENT NAME</a:t>
             </a:r>
           </a:p>
@@ -3384,51 +3885,18 @@
               </a:defRPr>
             </a:pPr>
             <a:r>
-              <a:t>Udbhav Tiwari</a:t>
-            </a:r>
-          </a:p>
-        </p:txBody>
-      </p:sp>
-      <p:sp>
-        <p:nvSpPr>
-          <p:cNvPr id="8" name="Rectangle 7"/>
-          <p:cNvSpPr/>
-          <p:nvPr/>
-        </p:nvSpPr>
-        <p:spPr>
-          <a:xfrm>
-            <a:off x="914400" y="4663440"/>
-            <a:ext cx="2423160" cy="54864"/>
-          </a:xfrm>
-          <a:prstGeom prst="rect">
-            <a:avLst/>
-          </a:prstGeom>
-          <a:solidFill>
-            <a:srgbClr val="2563EB"/>
-          </a:solidFill>
-          <a:ln>
-            <a:noFill/>
-          </a:ln>
-        </p:spPr>
-        <p:style>
-          <a:lnRef idx="1">
-            <a:schemeClr val="accent1"/>
-          </a:lnRef>
-          <a:fillRef idx="3">
-            <a:schemeClr val="accent1"/>
-          </a:fillRef>
-          <a:effectRef idx="2">
-            <a:schemeClr val="accent1"/>
-          </a:effectRef>
-          <a:fontRef idx="minor">
-            <a:schemeClr val="lt1"/>
-          </a:fontRef>
-        </p:style>
-        <p:txBody>
-          <a:bodyPr rtlCol="0" anchor="ctr"/>
-          <a:lstStyle/>
-          <a:p>
-            <a:pPr algn="ctr"/>
+              <a:rPr dirty="0" err="1"/>
+              <a:t>Udbhav</a:t>
+            </a:r>
+            <a:r>
+              <a:rPr dirty="0"/>
+              <a:t> </a:t>
+            </a:r>
+            <a:r>
+              <a:rPr dirty="0" err="1"/>
+              <a:t>Tiwari</a:t>
+            </a:r>
+            <a:endParaRPr dirty="0"/>
           </a:p>
         </p:txBody>
       </p:sp>
@@ -3470,7 +3938,7 @@
           </a:fontRef>
         </p:style>
         <p:txBody>
-          <a:bodyPr rtlCol="0" anchor="ctr" wrap="square"/>
+          <a:bodyPr wrap="square" rtlCol="0" anchor="ctr"/>
           <a:lstStyle/>
           <a:p>
             <a:pPr algn="ctr">
@@ -3501,49 +3969,6 @@
             <a:r>
               <a:t>24BCT0328</a:t>
             </a:r>
-          </a:p>
-        </p:txBody>
-      </p:sp>
-      <p:sp>
-        <p:nvSpPr>
-          <p:cNvPr id="10" name="Rectangle 9"/>
-          <p:cNvSpPr/>
-          <p:nvPr/>
-        </p:nvSpPr>
-        <p:spPr>
-          <a:xfrm>
-            <a:off x="3566160" y="4663440"/>
-            <a:ext cx="2423160" cy="54864"/>
-          </a:xfrm>
-          <a:prstGeom prst="rect">
-            <a:avLst/>
-          </a:prstGeom>
-          <a:solidFill>
-            <a:srgbClr val="7C3AED"/>
-          </a:solidFill>
-          <a:ln>
-            <a:noFill/>
-          </a:ln>
-        </p:spPr>
-        <p:style>
-          <a:lnRef idx="1">
-            <a:schemeClr val="accent1"/>
-          </a:lnRef>
-          <a:fillRef idx="3">
-            <a:schemeClr val="accent1"/>
-          </a:fillRef>
-          <a:effectRef idx="2">
-            <a:schemeClr val="accent1"/>
-          </a:effectRef>
-          <a:fontRef idx="minor">
-            <a:schemeClr val="lt1"/>
-          </a:fontRef>
-        </p:style>
-        <p:txBody>
-          <a:bodyPr rtlCol="0" anchor="ctr"/>
-          <a:lstStyle/>
-          <a:p>
-            <a:pPr algn="ctr"/>
           </a:p>
         </p:txBody>
       </p:sp>
@@ -3585,7 +4010,7 @@
           </a:fontRef>
         </p:style>
         <p:txBody>
-          <a:bodyPr rtlCol="0" anchor="ctr" wrap="square"/>
+          <a:bodyPr wrap="square" rtlCol="0" anchor="ctr"/>
           <a:lstStyle/>
           <a:p>
             <a:pPr algn="ctr">
@@ -3599,6 +4024,7 @@
               </a:defRPr>
             </a:pPr>
             <a:r>
+              <a:rPr dirty="0"/>
               <a:t>COURSE &amp; REVIEW</a:t>
             </a:r>
           </a:p>
@@ -3614,51 +4040,9 @@
               </a:defRPr>
             </a:pPr>
             <a:r>
+              <a:rPr dirty="0"/>
               <a:t>CD Lab • Review 3 (Final)</a:t>
             </a:r>
-          </a:p>
-        </p:txBody>
-      </p:sp>
-      <p:sp>
-        <p:nvSpPr>
-          <p:cNvPr id="12" name="Rectangle 11"/>
-          <p:cNvSpPr/>
-          <p:nvPr/>
-        </p:nvSpPr>
-        <p:spPr>
-          <a:xfrm>
-            <a:off x="6217920" y="4663440"/>
-            <a:ext cx="2423160" cy="54864"/>
-          </a:xfrm>
-          <a:prstGeom prst="rect">
-            <a:avLst/>
-          </a:prstGeom>
-          <a:solidFill>
-            <a:srgbClr val="10B981"/>
-          </a:solidFill>
-          <a:ln>
-            <a:noFill/>
-          </a:ln>
-        </p:spPr>
-        <p:style>
-          <a:lnRef idx="1">
-            <a:schemeClr val="accent1"/>
-          </a:lnRef>
-          <a:fillRef idx="3">
-            <a:schemeClr val="accent1"/>
-          </a:fillRef>
-          <a:effectRef idx="2">
-            <a:schemeClr val="accent1"/>
-          </a:effectRef>
-          <a:fontRef idx="minor">
-            <a:schemeClr val="lt1"/>
-          </a:fontRef>
-        </p:style>
-        <p:txBody>
-          <a:bodyPr rtlCol="0" anchor="ctr"/>
-          <a:lstStyle/>
-          <a:p>
-            <a:pPr algn="ctr"/>
           </a:p>
         </p:txBody>
       </p:sp>
@@ -3700,7 +4084,7 @@
           </a:fontRef>
         </p:style>
         <p:txBody>
-          <a:bodyPr rtlCol="0" anchor="ctr" wrap="square"/>
+          <a:bodyPr wrap="square" rtlCol="0" anchor="ctr"/>
           <a:lstStyle/>
           <a:p>
             <a:pPr algn="ctr">
@@ -3731,49 +4115,6 @@
             <a:r>
               <a:t>Individual Project</a:t>
             </a:r>
-          </a:p>
-        </p:txBody>
-      </p:sp>
-      <p:sp>
-        <p:nvSpPr>
-          <p:cNvPr id="14" name="Rectangle 13"/>
-          <p:cNvSpPr/>
-          <p:nvPr/>
-        </p:nvSpPr>
-        <p:spPr>
-          <a:xfrm>
-            <a:off x="8869680" y="4663440"/>
-            <a:ext cx="2423160" cy="54864"/>
-          </a:xfrm>
-          <a:prstGeom prst="rect">
-            <a:avLst/>
-          </a:prstGeom>
-          <a:solidFill>
-            <a:srgbClr val="EA580C"/>
-          </a:solidFill>
-          <a:ln>
-            <a:noFill/>
-          </a:ln>
-        </p:spPr>
-        <p:style>
-          <a:lnRef idx="1">
-            <a:schemeClr val="accent1"/>
-          </a:lnRef>
-          <a:fillRef idx="3">
-            <a:schemeClr val="accent1"/>
-          </a:fillRef>
-          <a:effectRef idx="2">
-            <a:schemeClr val="accent1"/>
-          </a:effectRef>
-          <a:fontRef idx="minor">
-            <a:schemeClr val="lt1"/>
-          </a:fontRef>
-        </p:style>
-        <p:txBody>
-          <a:bodyPr rtlCol="0" anchor="ctr"/>
-          <a:lstStyle/>
-          <a:p>
-            <a:pPr algn="ctr"/>
           </a:p>
         </p:txBody>
       </p:sp>
@@ -3786,7 +4127,7 @@
 </file>
 
 <file path=ppt/slides/slide10.xml><?xml version="1.0" encoding="utf-8"?>
-<p:sld xmlns:a="http://schemas.openxmlformats.org/drawingml/2006/main" xmlns:p="http://schemas.openxmlformats.org/presentationml/2006/main" xmlns:r="http://schemas.openxmlformats.org/officeDocument/2006/relationships">
+<p:sld xmlns:a="http://schemas.openxmlformats.org/drawingml/2006/main" xmlns:r="http://schemas.openxmlformats.org/officeDocument/2006/relationships" xmlns:p="http://schemas.openxmlformats.org/presentationml/2006/main">
   <p:cSld>
     <p:spTree>
       <p:nvGrpSpPr>
@@ -3794,7 +4135,14 @@
         <p:cNvGrpSpPr/>
         <p:nvPr/>
       </p:nvGrpSpPr>
-      <p:grpSpPr/>
+      <p:grpSpPr>
+        <a:xfrm>
+          <a:off x="0" y="0"/>
+          <a:ext cx="0" cy="0"/>
+          <a:chOff x="0" y="0"/>
+          <a:chExt cx="0" cy="0"/>
+        </a:xfrm>
+      </p:grpSpPr>
       <p:sp>
         <p:nvSpPr>
           <p:cNvPr id="2" name="Rectangle 1"/>
@@ -3837,19 +4185,20 @@
           <a:lstStyle/>
           <a:p>
             <a:pPr algn="ctr"/>
-          </a:p>
-        </p:txBody>
-      </p:sp>
-      <p:sp>
-        <p:nvSpPr>
-          <p:cNvPr id="3" name="TextBox 2"/>
+            <a:endParaRPr/>
+          </a:p>
+        </p:txBody>
+      </p:sp>
+      <p:sp>
+        <p:nvSpPr>
+          <p:cNvPr id="5" name="TextBox 4"/>
           <p:cNvSpPr txBox="1"/>
           <p:nvPr/>
         </p:nvSpPr>
         <p:spPr>
           <a:xfrm>
-            <a:off x="731520" y="457200"/>
-            <a:ext cx="7315200" cy="274320"/>
+            <a:off x="731520" y="713232"/>
+            <a:ext cx="10728655" cy="594360"/>
           </a:xfrm>
           <a:prstGeom prst="rect">
             <a:avLst/>
@@ -3863,102 +4212,14 @@
           <a:lstStyle/>
           <a:p>
             <a:pPr>
-              <a:defRPr sz="1000" b="1">
-                <a:solidFill>
-                  <a:srgbClr val="2563EB"/>
+              <a:defRPr sz="2200" b="1">
+                <a:solidFill>
+                  <a:srgbClr val="0F172A"/>
                 </a:solidFill>
               </a:defRPr>
             </a:pPr>
             <a:r>
-              <a:t>EDUSCRIPT COMPILER DESIGN • REVIEW 3</a:t>
-            </a:r>
-          </a:p>
-        </p:txBody>
-      </p:sp>
-      <p:sp>
-        <p:nvSpPr>
-          <p:cNvPr id="4" name="Rounded Rectangle 3"/>
-          <p:cNvSpPr/>
-          <p:nvPr/>
-        </p:nvSpPr>
-        <p:spPr>
-          <a:xfrm>
-            <a:off x="9326880" y="457200"/>
-            <a:ext cx="2133295" cy="320040"/>
-          </a:xfrm>
-          <a:prstGeom prst="roundRect">
-            <a:avLst/>
-          </a:prstGeom>
-          <a:solidFill>
-            <a:srgbClr val="ECFDF5"/>
-          </a:solidFill>
-          <a:ln>
-            <a:solidFill>
-              <a:srgbClr val="10B981"/>
-            </a:solidFill>
-          </a:ln>
-        </p:spPr>
-        <p:style>
-          <a:lnRef idx="1">
-            <a:schemeClr val="accent1"/>
-          </a:lnRef>
-          <a:fillRef idx="3">
-            <a:schemeClr val="accent1"/>
-          </a:fillRef>
-          <a:effectRef idx="2">
-            <a:schemeClr val="accent1"/>
-          </a:effectRef>
-          <a:fontRef idx="minor">
-            <a:schemeClr val="lt1"/>
-          </a:fontRef>
-        </p:style>
-        <p:txBody>
-          <a:bodyPr rtlCol="0" anchor="ctr"/>
-          <a:lstStyle/>
-          <a:p>
-            <a:pPr algn="ctr">
-              <a:defRPr sz="1000" b="1">
-                <a:solidFill>
-                  <a:srgbClr val="10B981"/>
-                </a:solidFill>
-              </a:defRPr>
-            </a:pPr>
-            <a:r>
-              <a:t>✓ 100% IMPLEMENTED</a:t>
-            </a:r>
-          </a:p>
-        </p:txBody>
-      </p:sp>
-      <p:sp>
-        <p:nvSpPr>
-          <p:cNvPr id="5" name="TextBox 4"/>
-          <p:cNvSpPr txBox="1"/>
-          <p:nvPr/>
-        </p:nvSpPr>
-        <p:spPr>
-          <a:xfrm>
-            <a:off x="731520" y="713232"/>
-            <a:ext cx="10728655" cy="594360"/>
-          </a:xfrm>
-          <a:prstGeom prst="rect">
-            <a:avLst/>
-          </a:prstGeom>
-          <a:noFill/>
-        </p:spPr>
-        <p:txBody>
-          <a:bodyPr wrap="square">
-            <a:spAutoFit/>
-          </a:bodyPr>
-          <a:lstStyle/>
-          <a:p>
-            <a:pPr>
-              <a:defRPr sz="2200" b="1">
-                <a:solidFill>
-                  <a:srgbClr val="0F172A"/>
-                </a:solidFill>
-              </a:defRPr>
-            </a:pPr>
-            <a:r>
+              <a:rPr dirty="0"/>
               <a:t>Robust Multi-Phase Error Diagnostic Architecture</a:t>
             </a:r>
           </a:p>
@@ -4006,6 +4267,7 @@
           <a:lstStyle/>
           <a:p>
             <a:pPr algn="ctr"/>
+            <a:endParaRPr/>
           </a:p>
         </p:txBody>
       </p:sp>
@@ -4056,30 +4318,6 @@
           </a:p>
         </p:txBody>
       </p:sp>
-      <p:pic>
-        <p:nvPicPr>
-          <p:cNvPr id="8" name="Picture 7" descr="12_error_lexical.png"/>
-          <p:cNvPicPr>
-            <a:picLocks noChangeAspect="1"/>
-          </p:cNvPicPr>
-          <p:nvPr/>
-        </p:nvPicPr>
-        <p:blipFill>
-          <a:blip r:embed="rId2"/>
-          <a:stretch>
-            <a:fillRect/>
-          </a:stretch>
-        </p:blipFill>
-        <p:spPr>
-          <a:xfrm>
-            <a:off x="868680" y="2148840"/>
-            <a:ext cx="4967935" cy="2566218"/>
-          </a:xfrm>
-          <a:prstGeom prst="rect">
-            <a:avLst/>
-          </a:prstGeom>
-        </p:spPr>
-      </p:pic>
       <p:sp>
         <p:nvSpPr>
           <p:cNvPr id="9" name="Rounded Rectangle 8"/>
@@ -4122,6 +4360,7 @@
           <a:lstStyle/>
           <a:p>
             <a:pPr algn="ctr"/>
+            <a:endParaRPr/>
           </a:p>
         </p:txBody>
       </p:sp>
@@ -4172,30 +4411,6 @@
           </a:p>
         </p:txBody>
       </p:sp>
-      <p:pic>
-        <p:nvPicPr>
-          <p:cNvPr id="11" name="Picture 10" descr="11_error_syntax.png"/>
-          <p:cNvPicPr>
-            <a:picLocks noChangeAspect="1"/>
-          </p:cNvPicPr>
-          <p:nvPr/>
-        </p:nvPicPr>
-        <p:blipFill>
-          <a:blip r:embed="rId3"/>
-          <a:stretch>
-            <a:fillRect/>
-          </a:stretch>
-        </p:blipFill>
-        <p:spPr>
-          <a:xfrm>
-            <a:off x="6355080" y="2148840"/>
-            <a:ext cx="4967935" cy="2405412"/>
-          </a:xfrm>
-          <a:prstGeom prst="rect">
-            <a:avLst/>
-          </a:prstGeom>
-        </p:spPr>
-      </p:pic>
       <p:sp>
         <p:nvSpPr>
           <p:cNvPr id="12" name="Rounded Rectangle 11"/>
@@ -4238,6 +4453,7 @@
           <a:lstStyle/>
           <a:p>
             <a:pPr algn="ctr"/>
+            <a:endParaRPr/>
           </a:p>
         </p:txBody>
       </p:sp>
@@ -4288,30 +4504,6 @@
           </a:p>
         </p:txBody>
       </p:sp>
-      <p:pic>
-        <p:nvPicPr>
-          <p:cNvPr id="14" name="Picture 13" descr="09_error_type_mismatch.png"/>
-          <p:cNvPicPr>
-            <a:picLocks noChangeAspect="1"/>
-          </p:cNvPicPr>
-          <p:nvPr/>
-        </p:nvPicPr>
-        <p:blipFill>
-          <a:blip r:embed="rId4"/>
-          <a:stretch>
-            <a:fillRect/>
-          </a:stretch>
-        </p:blipFill>
-        <p:spPr>
-          <a:xfrm>
-            <a:off x="868680" y="4617720"/>
-            <a:ext cx="4967935" cy="1616214"/>
-          </a:xfrm>
-          <a:prstGeom prst="rect">
-            <a:avLst/>
-          </a:prstGeom>
-        </p:spPr>
-      </p:pic>
       <p:sp>
         <p:nvSpPr>
           <p:cNvPr id="15" name="Rounded Rectangle 14"/>
@@ -4354,6 +4546,7 @@
           <a:lstStyle/>
           <a:p>
             <a:pPr algn="ctr"/>
+            <a:endParaRPr/>
           </a:p>
         </p:txBody>
       </p:sp>
@@ -4406,26 +4599,258 @@
       </p:sp>
       <p:pic>
         <p:nvPicPr>
-          <p:cNvPr id="17" name="Picture 16" descr="13_error_division_by_zero.png"/>
+          <p:cNvPr id="3074" name="Picture 2"/>
           <p:cNvPicPr>
-            <a:picLocks noChangeAspect="1"/>
+            <a:picLocks noChangeAspect="1" noChangeArrowheads="1"/>
           </p:cNvPicPr>
           <p:nvPr/>
         </p:nvPicPr>
         <p:blipFill>
-          <a:blip r:embed="rId5"/>
+          <a:blip r:embed="rId2">
+            <a:extLst>
+              <a:ext uri="{28A0092B-C50C-407E-A947-70E740481C1C}">
+                <a14:useLocalDpi xmlns:a14="http://schemas.microsoft.com/office/drawing/2010/main" val="0"/>
+              </a:ext>
+            </a:extLst>
+          </a:blip>
+          <a:srcRect/>
           <a:stretch>
             <a:fillRect/>
           </a:stretch>
         </p:blipFill>
-        <p:spPr>
-          <a:xfrm>
-            <a:off x="6355080" y="4617720"/>
-            <a:ext cx="4967935" cy="2697819"/>
+        <p:spPr bwMode="auto">
+          <a:xfrm>
+            <a:off x="868680" y="1951671"/>
+            <a:ext cx="4477446" cy="2060089"/>
           </a:xfrm>
           <a:prstGeom prst="rect">
             <a:avLst/>
           </a:prstGeom>
+          <a:noFill/>
+          <a:ln>
+            <a:noFill/>
+          </a:ln>
+          <a:effectLst/>
+          <a:extLst>
+            <a:ext uri="{909E8E84-426E-40DD-AFC4-6F175D3DCCD1}">
+              <a14:hiddenFill xmlns:a14="http://schemas.microsoft.com/office/drawing/2010/main">
+                <a:solidFill>
+                  <a:schemeClr val="accent1"/>
+                </a:solidFill>
+              </a14:hiddenFill>
+            </a:ext>
+            <a:ext uri="{91240B29-F687-4F45-9708-019B960494DF}">
+              <a14:hiddenLine xmlns:a14="http://schemas.microsoft.com/office/drawing/2010/main" w="9525">
+                <a:solidFill>
+                  <a:schemeClr val="tx1"/>
+                </a:solidFill>
+                <a:miter lim="800000"/>
+                <a:headEnd/>
+                <a:tailEnd/>
+              </a14:hiddenLine>
+            </a:ext>
+            <a:ext uri="{AF507438-7753-43E0-B8FC-AC1667EBCBE1}">
+              <a14:hiddenEffects xmlns:a14="http://schemas.microsoft.com/office/drawing/2010/main">
+                <a:effectLst>
+                  <a:outerShdw dist="35921" dir="2700000" algn="ctr" rotWithShape="0">
+                    <a:schemeClr val="bg2"/>
+                  </a:outerShdw>
+                </a:effectLst>
+              </a14:hiddenEffects>
+            </a:ext>
+          </a:extLst>
+        </p:spPr>
+      </p:pic>
+      <p:pic>
+        <p:nvPicPr>
+          <p:cNvPr id="3075" name="Picture 3"/>
+          <p:cNvPicPr>
+            <a:picLocks noChangeAspect="1" noChangeArrowheads="1"/>
+          </p:cNvPicPr>
+          <p:nvPr/>
+        </p:nvPicPr>
+        <p:blipFill>
+          <a:blip r:embed="rId3">
+            <a:extLst>
+              <a:ext uri="{28A0092B-C50C-407E-A947-70E740481C1C}">
+                <a14:useLocalDpi xmlns:a14="http://schemas.microsoft.com/office/drawing/2010/main" val="0"/>
+              </a:ext>
+            </a:extLst>
+          </a:blip>
+          <a:srcRect/>
+          <a:stretch>
+            <a:fillRect/>
+          </a:stretch>
+        </p:blipFill>
+        <p:spPr bwMode="auto">
+          <a:xfrm>
+            <a:off x="6413157" y="1951672"/>
+            <a:ext cx="4254843" cy="1832964"/>
+          </a:xfrm>
+          <a:prstGeom prst="rect">
+            <a:avLst/>
+          </a:prstGeom>
+          <a:noFill/>
+          <a:ln>
+            <a:noFill/>
+          </a:ln>
+          <a:effectLst/>
+          <a:extLst>
+            <a:ext uri="{909E8E84-426E-40DD-AFC4-6F175D3DCCD1}">
+              <a14:hiddenFill xmlns:a14="http://schemas.microsoft.com/office/drawing/2010/main">
+                <a:solidFill>
+                  <a:schemeClr val="accent1"/>
+                </a:solidFill>
+              </a14:hiddenFill>
+            </a:ext>
+            <a:ext uri="{91240B29-F687-4F45-9708-019B960494DF}">
+              <a14:hiddenLine xmlns:a14="http://schemas.microsoft.com/office/drawing/2010/main" w="9525">
+                <a:solidFill>
+                  <a:schemeClr val="tx1"/>
+                </a:solidFill>
+                <a:miter lim="800000"/>
+                <a:headEnd/>
+                <a:tailEnd/>
+              </a14:hiddenLine>
+            </a:ext>
+            <a:ext uri="{AF507438-7753-43E0-B8FC-AC1667EBCBE1}">
+              <a14:hiddenEffects xmlns:a14="http://schemas.microsoft.com/office/drawing/2010/main">
+                <a:effectLst>
+                  <a:outerShdw dist="35921" dir="2700000" algn="ctr" rotWithShape="0">
+                    <a:schemeClr val="bg2"/>
+                  </a:outerShdw>
+                </a:effectLst>
+              </a14:hiddenEffects>
+            </a:ext>
+          </a:extLst>
+        </p:spPr>
+      </p:pic>
+      <p:pic>
+        <p:nvPicPr>
+          <p:cNvPr id="3076" name="Picture 4"/>
+          <p:cNvPicPr>
+            <a:picLocks noChangeAspect="1" noChangeArrowheads="1"/>
+          </p:cNvPicPr>
+          <p:nvPr/>
+        </p:nvPicPr>
+        <p:blipFill>
+          <a:blip r:embed="rId4">
+            <a:extLst>
+              <a:ext uri="{28A0092B-C50C-407E-A947-70E740481C1C}">
+                <a14:useLocalDpi xmlns:a14="http://schemas.microsoft.com/office/drawing/2010/main" val="0"/>
+              </a:ext>
+            </a:extLst>
+          </a:blip>
+          <a:srcRect/>
+          <a:stretch>
+            <a:fillRect/>
+          </a:stretch>
+        </p:blipFill>
+        <p:spPr bwMode="auto">
+          <a:xfrm>
+            <a:off x="233681" y="4571998"/>
+            <a:ext cx="5878482" cy="1661133"/>
+          </a:xfrm>
+          <a:prstGeom prst="rect">
+            <a:avLst/>
+          </a:prstGeom>
+          <a:noFill/>
+          <a:ln>
+            <a:noFill/>
+          </a:ln>
+          <a:effectLst/>
+          <a:extLst>
+            <a:ext uri="{909E8E84-426E-40DD-AFC4-6F175D3DCCD1}">
+              <a14:hiddenFill xmlns:a14="http://schemas.microsoft.com/office/drawing/2010/main">
+                <a:solidFill>
+                  <a:schemeClr val="accent1"/>
+                </a:solidFill>
+              </a14:hiddenFill>
+            </a:ext>
+            <a:ext uri="{91240B29-F687-4F45-9708-019B960494DF}">
+              <a14:hiddenLine xmlns:a14="http://schemas.microsoft.com/office/drawing/2010/main" w="9525">
+                <a:solidFill>
+                  <a:schemeClr val="tx1"/>
+                </a:solidFill>
+                <a:miter lim="800000"/>
+                <a:headEnd/>
+                <a:tailEnd/>
+              </a14:hiddenLine>
+            </a:ext>
+            <a:ext uri="{AF507438-7753-43E0-B8FC-AC1667EBCBE1}">
+              <a14:hiddenEffects xmlns:a14="http://schemas.microsoft.com/office/drawing/2010/main">
+                <a:effectLst>
+                  <a:outerShdw dist="35921" dir="2700000" algn="ctr" rotWithShape="0">
+                    <a:schemeClr val="bg2"/>
+                  </a:outerShdw>
+                </a:effectLst>
+              </a14:hiddenEffects>
+            </a:ext>
+          </a:extLst>
+        </p:spPr>
+      </p:pic>
+      <p:pic>
+        <p:nvPicPr>
+          <p:cNvPr id="3077" name="Picture 5"/>
+          <p:cNvPicPr>
+            <a:picLocks noChangeAspect="1" noChangeArrowheads="1"/>
+          </p:cNvPicPr>
+          <p:nvPr/>
+        </p:nvPicPr>
+        <p:blipFill>
+          <a:blip r:embed="rId5">
+            <a:extLst>
+              <a:ext uri="{28A0092B-C50C-407E-A947-70E740481C1C}">
+                <a14:useLocalDpi xmlns:a14="http://schemas.microsoft.com/office/drawing/2010/main" val="0"/>
+              </a:ext>
+            </a:extLst>
+          </a:blip>
+          <a:srcRect/>
+          <a:stretch>
+            <a:fillRect/>
+          </a:stretch>
+        </p:blipFill>
+        <p:spPr bwMode="auto">
+          <a:xfrm>
+            <a:off x="6355080" y="4399189"/>
+            <a:ext cx="4753933" cy="2334034"/>
+          </a:xfrm>
+          <a:prstGeom prst="rect">
+            <a:avLst/>
+          </a:prstGeom>
+          <a:noFill/>
+          <a:ln>
+            <a:noFill/>
+          </a:ln>
+          <a:effectLst/>
+          <a:extLst>
+            <a:ext uri="{909E8E84-426E-40DD-AFC4-6F175D3DCCD1}">
+              <a14:hiddenFill xmlns:a14="http://schemas.microsoft.com/office/drawing/2010/main">
+                <a:solidFill>
+                  <a:schemeClr val="accent1"/>
+                </a:solidFill>
+              </a14:hiddenFill>
+            </a:ext>
+            <a:ext uri="{91240B29-F687-4F45-9708-019B960494DF}">
+              <a14:hiddenLine xmlns:a14="http://schemas.microsoft.com/office/drawing/2010/main" w="9525">
+                <a:solidFill>
+                  <a:schemeClr val="tx1"/>
+                </a:solidFill>
+                <a:miter lim="800000"/>
+                <a:headEnd/>
+                <a:tailEnd/>
+              </a14:hiddenLine>
+            </a:ext>
+            <a:ext uri="{AF507438-7753-43E0-B8FC-AC1667EBCBE1}">
+              <a14:hiddenEffects xmlns:a14="http://schemas.microsoft.com/office/drawing/2010/main">
+                <a:effectLst>
+                  <a:outerShdw dist="35921" dir="2700000" algn="ctr" rotWithShape="0">
+                    <a:schemeClr val="bg2"/>
+                  </a:outerShdw>
+                </a:effectLst>
+              </a14:hiddenEffects>
+            </a:ext>
+          </a:extLst>
         </p:spPr>
       </p:pic>
     </p:spTree>
@@ -4437,7 +4862,7 @@
 </file>
 
 <file path=ppt/slides/slide11.xml><?xml version="1.0" encoding="utf-8"?>
-<p:sld xmlns:a="http://schemas.openxmlformats.org/drawingml/2006/main" xmlns:p="http://schemas.openxmlformats.org/presentationml/2006/main" xmlns:r="http://schemas.openxmlformats.org/officeDocument/2006/relationships">
+<p:sld xmlns:a="http://schemas.openxmlformats.org/drawingml/2006/main" xmlns:r="http://schemas.openxmlformats.org/officeDocument/2006/relationships" xmlns:p="http://schemas.openxmlformats.org/presentationml/2006/main">
   <p:cSld>
     <p:spTree>
       <p:nvGrpSpPr>
@@ -4445,7 +4870,14 @@
         <p:cNvGrpSpPr/>
         <p:nvPr/>
       </p:nvGrpSpPr>
-      <p:grpSpPr/>
+      <p:grpSpPr>
+        <a:xfrm>
+          <a:off x="0" y="0"/>
+          <a:ext cx="0" cy="0"/>
+          <a:chOff x="0" y="0"/>
+          <a:chExt cx="0" cy="0"/>
+        </a:xfrm>
+      </p:grpSpPr>
       <p:sp>
         <p:nvSpPr>
           <p:cNvPr id="2" name="Rectangle 1"/>
@@ -4488,95 +4920,7 @@
           <a:lstStyle/>
           <a:p>
             <a:pPr algn="ctr"/>
-          </a:p>
-        </p:txBody>
-      </p:sp>
-      <p:sp>
-        <p:nvSpPr>
-          <p:cNvPr id="3" name="TextBox 2"/>
-          <p:cNvSpPr txBox="1"/>
-          <p:nvPr/>
-        </p:nvSpPr>
-        <p:spPr>
-          <a:xfrm>
-            <a:off x="731520" y="457200"/>
-            <a:ext cx="7315200" cy="274320"/>
-          </a:xfrm>
-          <a:prstGeom prst="rect">
-            <a:avLst/>
-          </a:prstGeom>
-          <a:noFill/>
-        </p:spPr>
-        <p:txBody>
-          <a:bodyPr wrap="square">
-            <a:spAutoFit/>
-          </a:bodyPr>
-          <a:lstStyle/>
-          <a:p>
-            <a:pPr>
-              <a:defRPr sz="1000" b="1">
-                <a:solidFill>
-                  <a:srgbClr val="2563EB"/>
-                </a:solidFill>
-              </a:defRPr>
-            </a:pPr>
-            <a:r>
-              <a:t>EDUSCRIPT COMPILER DESIGN • REVIEW 3</a:t>
-            </a:r>
-          </a:p>
-        </p:txBody>
-      </p:sp>
-      <p:sp>
-        <p:nvSpPr>
-          <p:cNvPr id="4" name="Rounded Rectangle 3"/>
-          <p:cNvSpPr/>
-          <p:nvPr/>
-        </p:nvSpPr>
-        <p:spPr>
-          <a:xfrm>
-            <a:off x="9326880" y="457200"/>
-            <a:ext cx="2133295" cy="320040"/>
-          </a:xfrm>
-          <a:prstGeom prst="roundRect">
-            <a:avLst/>
-          </a:prstGeom>
-          <a:solidFill>
-            <a:srgbClr val="ECFDF5"/>
-          </a:solidFill>
-          <a:ln>
-            <a:solidFill>
-              <a:srgbClr val="10B981"/>
-            </a:solidFill>
-          </a:ln>
-        </p:spPr>
-        <p:style>
-          <a:lnRef idx="1">
-            <a:schemeClr val="accent1"/>
-          </a:lnRef>
-          <a:fillRef idx="3">
-            <a:schemeClr val="accent1"/>
-          </a:fillRef>
-          <a:effectRef idx="2">
-            <a:schemeClr val="accent1"/>
-          </a:effectRef>
-          <a:fontRef idx="minor">
-            <a:schemeClr val="lt1"/>
-          </a:fontRef>
-        </p:style>
-        <p:txBody>
-          <a:bodyPr rtlCol="0" anchor="ctr"/>
-          <a:lstStyle/>
-          <a:p>
-            <a:pPr algn="ctr">
-              <a:defRPr sz="1000" b="1">
-                <a:solidFill>
-                  <a:srgbClr val="10B981"/>
-                </a:solidFill>
-              </a:defRPr>
-            </a:pPr>
-            <a:r>
-              <a:t>✓ 100% IMPLEMENTED</a:t>
-            </a:r>
+            <a:endParaRPr/>
           </a:p>
         </p:txBody>
       </p:sp>
@@ -4657,6 +5001,7 @@
           <a:lstStyle/>
           <a:p>
             <a:pPr algn="ctr"/>
+            <a:endParaRPr/>
           </a:p>
         </p:txBody>
       </p:sp>
@@ -4668,7 +5013,7 @@
         </p:nvSpPr>
         <p:spPr>
           <a:xfrm>
-            <a:off x="914400" y="1600200"/>
+            <a:off x="914400" y="1986280"/>
             <a:ext cx="4663440" cy="4572000"/>
           </a:xfrm>
           <a:prstGeom prst="rect">
@@ -4693,6 +5038,7 @@
               </a:defRPr>
             </a:pPr>
             <a:r>
+              <a:rPr dirty="0"/>
               <a:t>Verified 12-Case Test Matrix</a:t>
             </a:r>
           </a:p>
@@ -4703,15 +5049,31 @@
               </a:spcAft>
             </a:pPr>
             <a:r>
-              <a:rPr b="1" sz="950">
-                <a:solidFill>
-                  <a:srgbClr val="0F172A"/>
-                </a:solidFill>
-              </a:rPr>
-              <a:t>✓ 1. Custom Hindi (example.custom): </a:t>
-            </a:r>
-            <a:r>
-              <a:rPr sz="950">
+              <a:rPr sz="950" b="1" dirty="0">
+                <a:solidFill>
+                  <a:srgbClr val="0F172A"/>
+                </a:solidFill>
+              </a:rPr>
+              <a:t>✓ 1. Custom Hindi (</a:t>
+            </a:r>
+            <a:r>
+              <a:rPr sz="950" b="1" dirty="0" err="1">
+                <a:solidFill>
+                  <a:srgbClr val="0F172A"/>
+                </a:solidFill>
+              </a:rPr>
+              <a:t>example.custom</a:t>
+            </a:r>
+            <a:r>
+              <a:rPr sz="950" b="1" dirty="0">
+                <a:solidFill>
+                  <a:srgbClr val="0F172A"/>
+                </a:solidFill>
+              </a:rPr>
+              <a:t>): </a:t>
+            </a:r>
+            <a:r>
+              <a:rPr sz="950" dirty="0">
                 <a:solidFill>
                   <a:srgbClr val="64748B"/>
                 </a:solidFill>
@@ -4719,7 +5081,7 @@
               <a:t>Loops, floats, if/else </a:t>
             </a:r>
             <a:r>
-              <a:rPr b="1" sz="950">
+              <a:rPr sz="950" b="1" dirty="0">
                 <a:solidFill>
                   <a:srgbClr val="10B981"/>
                 </a:solidFill>
@@ -4734,7 +5096,7 @@
               </a:spcAft>
             </a:pPr>
             <a:r>
-              <a:rPr b="1" sz="950">
+              <a:rPr sz="950" b="1" dirty="0">
                 <a:solidFill>
                   <a:srgbClr val="0F172A"/>
                 </a:solidFill>
@@ -4742,7 +5104,7 @@
               <a:t>✓ 2. Hindi Factorial: </a:t>
             </a:r>
             <a:r>
-              <a:rPr sz="950">
+              <a:rPr sz="950" dirty="0">
                 <a:solidFill>
                   <a:srgbClr val="64748B"/>
                 </a:solidFill>
@@ -4750,7 +5112,7 @@
               <a:t>Loop accumulator, compare </a:t>
             </a:r>
             <a:r>
-              <a:rPr b="1" sz="950">
+              <a:rPr sz="950" b="1" dirty="0">
                 <a:solidFill>
                   <a:srgbClr val="10B981"/>
                 </a:solidFill>
@@ -4765,7 +5127,7 @@
               </a:spcAft>
             </a:pPr>
             <a:r>
-              <a:rPr b="1" sz="950">
+              <a:rPr sz="950" b="1" dirty="0">
                 <a:solidFill>
                   <a:srgbClr val="0F172A"/>
                 </a:solidFill>
@@ -4773,7 +5135,7 @@
               <a:t>✓ 3. Arithmetic &amp; Precedence: </a:t>
             </a:r>
             <a:r>
-              <a:rPr sz="950">
+              <a:rPr sz="950" dirty="0">
                 <a:solidFill>
                   <a:srgbClr val="64748B"/>
                 </a:solidFill>
@@ -4781,7 +5143,7 @@
               <a:t>Ops (+,-,*,/,%), comp. assign </a:t>
             </a:r>
             <a:r>
-              <a:rPr b="1" sz="950">
+              <a:rPr sz="950" b="1" dirty="0">
                 <a:solidFill>
                   <a:srgbClr val="10B981"/>
                 </a:solidFill>
@@ -4796,7 +5158,7 @@
               </a:spcAft>
             </a:pPr>
             <a:r>
-              <a:rPr b="1" sz="950">
+              <a:rPr sz="950" b="1" dirty="0">
                 <a:solidFill>
                   <a:srgbClr val="0F172A"/>
                 </a:solidFill>
@@ -4804,7 +5166,7 @@
               <a:t>✓ 4. Control Flow &amp; Logic: </a:t>
             </a:r>
             <a:r>
-              <a:rPr sz="950">
+              <a:rPr sz="950" dirty="0">
                 <a:solidFill>
                   <a:srgbClr val="64748B"/>
                 </a:solidFill>
@@ -4812,7 +5174,7 @@
               <a:t>While, modulo, &amp;&amp;, || </a:t>
             </a:r>
             <a:r>
-              <a:rPr b="1" sz="950">
+              <a:rPr sz="950" b="1" dirty="0">
                 <a:solidFill>
                   <a:srgbClr val="10B981"/>
                 </a:solidFill>
@@ -4827,7 +5189,7 @@
               </a:spcAft>
             </a:pPr>
             <a:r>
-              <a:rPr b="1" sz="950">
+              <a:rPr sz="950" b="1" dirty="0">
                 <a:solidFill>
                   <a:srgbClr val="0F172A"/>
                 </a:solidFill>
@@ -4835,15 +5197,39 @@
               <a:t>✓ 5. For Loop: </a:t>
             </a:r>
             <a:r>
-              <a:rPr sz="950">
+              <a:rPr sz="950" dirty="0" err="1">
                 <a:solidFill>
                   <a:srgbClr val="64748B"/>
                 </a:solidFill>
               </a:rPr>
-              <a:t>Init, cond, update loop </a:t>
-            </a:r>
-            <a:r>
-              <a:rPr b="1" sz="950">
+              <a:t>Init</a:t>
+            </a:r>
+            <a:r>
+              <a:rPr sz="950" dirty="0">
+                <a:solidFill>
+                  <a:srgbClr val="64748B"/>
+                </a:solidFill>
+              </a:rPr>
+              <a:t>, </a:t>
+            </a:r>
+            <a:r>
+              <a:rPr sz="950" dirty="0" err="1">
+                <a:solidFill>
+                  <a:srgbClr val="64748B"/>
+                </a:solidFill>
+              </a:rPr>
+              <a:t>cond</a:t>
+            </a:r>
+            <a:r>
+              <a:rPr sz="950" dirty="0">
+                <a:solidFill>
+                  <a:srgbClr val="64748B"/>
+                </a:solidFill>
+              </a:rPr>
+              <a:t>, update loop </a:t>
+            </a:r>
+            <a:r>
+              <a:rPr sz="950" b="1" dirty="0">
                 <a:solidFill>
                   <a:srgbClr val="10B981"/>
                 </a:solidFill>
@@ -4858,7 +5244,7 @@
               </a:spcAft>
             </a:pPr>
             <a:r>
-              <a:rPr b="1" sz="950">
+              <a:rPr sz="950" b="1" dirty="0">
                 <a:solidFill>
                   <a:srgbClr val="0F172A"/>
                 </a:solidFill>
@@ -4866,7 +5252,7 @@
               <a:t>✓ 6. String Operations: </a:t>
             </a:r>
             <a:r>
-              <a:rPr sz="950">
+              <a:rPr sz="950" dirty="0">
                 <a:solidFill>
                   <a:srgbClr val="64748B"/>
                 </a:solidFill>
@@ -4874,7 +5260,7 @@
               <a:t>Concatenation, equality </a:t>
             </a:r>
             <a:r>
-              <a:rPr b="1" sz="950">
+              <a:rPr sz="950" b="1" dirty="0">
                 <a:solidFill>
                   <a:srgbClr val="10B981"/>
                 </a:solidFill>
@@ -4889,7 +5275,7 @@
               </a:spcAft>
             </a:pPr>
             <a:r>
-              <a:rPr b="1" sz="950">
+              <a:rPr sz="950" b="1" dirty="0">
                 <a:solidFill>
                   <a:srgbClr val="0F172A"/>
                 </a:solidFill>
@@ -4897,7 +5283,7 @@
               <a:t>✓ 7. Semantic: Type Mismatch: </a:t>
             </a:r>
             <a:r>
-              <a:rPr sz="950">
+              <a:rPr sz="950" dirty="0">
                 <a:solidFill>
                   <a:srgbClr val="64748B"/>
                 </a:solidFill>
@@ -4905,7 +5291,7 @@
               <a:t>Exit code 3 verified </a:t>
             </a:r>
             <a:r>
-              <a:rPr b="1" sz="950">
+              <a:rPr sz="950" b="1" dirty="0">
                 <a:solidFill>
                   <a:srgbClr val="10B981"/>
                 </a:solidFill>
@@ -4920,15 +5306,31 @@
               </a:spcAft>
             </a:pPr>
             <a:r>
-              <a:rPr b="1" sz="950">
-                <a:solidFill>
-                  <a:srgbClr val="0F172A"/>
-                </a:solidFill>
-              </a:rPr>
-              <a:t>✓ 8. Semantic: Undeclared Var: </a:t>
-            </a:r>
-            <a:r>
-              <a:rPr sz="950">
+              <a:rPr sz="950" b="1" dirty="0">
+                <a:solidFill>
+                  <a:srgbClr val="0F172A"/>
+                </a:solidFill>
+              </a:rPr>
+              <a:t>✓ 8. Semantic: Undeclared </a:t>
+            </a:r>
+            <a:r>
+              <a:rPr sz="950" b="1" dirty="0" err="1">
+                <a:solidFill>
+                  <a:srgbClr val="0F172A"/>
+                </a:solidFill>
+              </a:rPr>
+              <a:t>Var</a:t>
+            </a:r>
+            <a:r>
+              <a:rPr sz="950" b="1" dirty="0">
+                <a:solidFill>
+                  <a:srgbClr val="0F172A"/>
+                </a:solidFill>
+              </a:rPr>
+              <a:t>: </a:t>
+            </a:r>
+            <a:r>
+              <a:rPr sz="950" dirty="0">
                 <a:solidFill>
                   <a:srgbClr val="64748B"/>
                 </a:solidFill>
@@ -4936,7 +5338,7 @@
               <a:t>Exit code 3 verified </a:t>
             </a:r>
             <a:r>
-              <a:rPr b="1" sz="950">
+              <a:rPr sz="950" b="1" dirty="0">
                 <a:solidFill>
                   <a:srgbClr val="10B981"/>
                 </a:solidFill>
@@ -4951,15 +5353,31 @@
               </a:spcAft>
             </a:pPr>
             <a:r>
-              <a:rPr b="1" sz="950">
-                <a:solidFill>
-                  <a:srgbClr val="0F172A"/>
-                </a:solidFill>
-              </a:rPr>
-              <a:t>✓ 9. Semantic: Duplicate Decl: </a:t>
-            </a:r>
-            <a:r>
-              <a:rPr sz="950">
+              <a:rPr sz="950" b="1" dirty="0">
+                <a:solidFill>
+                  <a:srgbClr val="0F172A"/>
+                </a:solidFill>
+              </a:rPr>
+              <a:t>✓ 9. Semantic: Duplicate </a:t>
+            </a:r>
+            <a:r>
+              <a:rPr sz="950" b="1" dirty="0" err="1">
+                <a:solidFill>
+                  <a:srgbClr val="0F172A"/>
+                </a:solidFill>
+              </a:rPr>
+              <a:t>Decl</a:t>
+            </a:r>
+            <a:r>
+              <a:rPr sz="950" b="1" dirty="0">
+                <a:solidFill>
+                  <a:srgbClr val="0F172A"/>
+                </a:solidFill>
+              </a:rPr>
+              <a:t>: </a:t>
+            </a:r>
+            <a:r>
+              <a:rPr sz="950" dirty="0">
                 <a:solidFill>
                   <a:srgbClr val="64748B"/>
                 </a:solidFill>
@@ -4967,7 +5385,7 @@
               <a:t>Exit code 3 verified </a:t>
             </a:r>
             <a:r>
-              <a:rPr b="1" sz="950">
+              <a:rPr sz="950" b="1" dirty="0">
                 <a:solidFill>
                   <a:srgbClr val="10B981"/>
                 </a:solidFill>
@@ -4982,15 +5400,31 @@
               </a:spcAft>
             </a:pPr>
             <a:r>
-              <a:rPr b="1" sz="950">
-                <a:solidFill>
-                  <a:srgbClr val="0F172A"/>
-                </a:solidFill>
-              </a:rPr>
-              <a:t>✓ 10. Syntax: Malformed Expr: </a:t>
-            </a:r>
-            <a:r>
-              <a:rPr sz="950">
+              <a:rPr sz="950" b="1" dirty="0">
+                <a:solidFill>
+                  <a:srgbClr val="0F172A"/>
+                </a:solidFill>
+              </a:rPr>
+              <a:t>✓ 10. Syntax: Malformed </a:t>
+            </a:r>
+            <a:r>
+              <a:rPr sz="950" b="1" dirty="0" err="1">
+                <a:solidFill>
+                  <a:srgbClr val="0F172A"/>
+                </a:solidFill>
+              </a:rPr>
+              <a:t>Expr</a:t>
+            </a:r>
+            <a:r>
+              <a:rPr sz="950" b="1" dirty="0">
+                <a:solidFill>
+                  <a:srgbClr val="0F172A"/>
+                </a:solidFill>
+              </a:rPr>
+              <a:t>: </a:t>
+            </a:r>
+            <a:r>
+              <a:rPr sz="950" dirty="0">
                 <a:solidFill>
                   <a:srgbClr val="64748B"/>
                 </a:solidFill>
@@ -4998,7 +5432,7 @@
               <a:t>Exit code 2 verified </a:t>
             </a:r>
             <a:r>
-              <a:rPr b="1" sz="950">
+              <a:rPr sz="950" b="1" dirty="0">
                 <a:solidFill>
                   <a:srgbClr val="10B981"/>
                 </a:solidFill>
@@ -5013,7 +5447,7 @@
               </a:spcAft>
             </a:pPr>
             <a:r>
-              <a:rPr b="1" sz="950">
+              <a:rPr sz="950" b="1" dirty="0">
                 <a:solidFill>
                   <a:srgbClr val="0F172A"/>
                 </a:solidFill>
@@ -5021,7 +5455,7 @@
               <a:t>✓ 11. Lexical: Bad Characters: </a:t>
             </a:r>
             <a:r>
-              <a:rPr sz="950">
+              <a:rPr sz="950" dirty="0">
                 <a:solidFill>
                   <a:srgbClr val="64748B"/>
                 </a:solidFill>
@@ -5029,7 +5463,7 @@
               <a:t>Exit code 1 verified </a:t>
             </a:r>
             <a:r>
-              <a:rPr b="1" sz="950">
+              <a:rPr sz="950" b="1" dirty="0">
                 <a:solidFill>
                   <a:srgbClr val="10B981"/>
                 </a:solidFill>
@@ -5044,7 +5478,7 @@
               </a:spcAft>
             </a:pPr>
             <a:r>
-              <a:rPr b="1" sz="950">
+              <a:rPr sz="950" b="1" dirty="0">
                 <a:solidFill>
                   <a:srgbClr val="0F172A"/>
                 </a:solidFill>
@@ -5052,7 +5486,7 @@
               <a:t>✓ 12. Runtime: Zero Division: </a:t>
             </a:r>
             <a:r>
-              <a:rPr sz="950">
+              <a:rPr sz="950" dirty="0">
                 <a:solidFill>
                   <a:srgbClr val="64748B"/>
                 </a:solidFill>
@@ -5060,7 +5494,7 @@
               <a:t>Exit code 4 verified </a:t>
             </a:r>
             <a:r>
-              <a:rPr b="1" sz="950">
+              <a:rPr sz="950" b="1" dirty="0">
                 <a:solidFill>
                   <a:srgbClr val="10B981"/>
                 </a:solidFill>
@@ -5112,31 +5546,72 @@
           <a:lstStyle/>
           <a:p>
             <a:pPr algn="ctr"/>
+            <a:endParaRPr/>
           </a:p>
         </p:txBody>
       </p:sp>
       <p:pic>
         <p:nvPicPr>
-          <p:cNvPr id="9" name="Picture 8" descr="01_test_suite_runner.png"/>
+          <p:cNvPr id="2051" name="Picture 3"/>
           <p:cNvPicPr>
-            <a:picLocks noChangeAspect="1"/>
+            <a:picLocks noChangeAspect="1" noChangeArrowheads="1"/>
           </p:cNvPicPr>
           <p:nvPr/>
         </p:nvPicPr>
         <p:blipFill>
-          <a:blip r:embed="rId2"/>
+          <a:blip r:embed="rId2">
+            <a:extLst>
+              <a:ext uri="{28A0092B-C50C-407E-A947-70E740481C1C}">
+                <a14:useLocalDpi xmlns:a14="http://schemas.microsoft.com/office/drawing/2010/main" val="0"/>
+              </a:ext>
+            </a:extLst>
+          </a:blip>
+          <a:srcRect/>
           <a:stretch>
             <a:fillRect/>
           </a:stretch>
         </p:blipFill>
-        <p:spPr>
-          <a:xfrm>
-            <a:off x="6035040" y="1600200"/>
-            <a:ext cx="5333695" cy="4528129"/>
+        <p:spPr bwMode="auto">
+          <a:xfrm>
+            <a:off x="6027421" y="1820758"/>
+            <a:ext cx="5341314" cy="4351442"/>
           </a:xfrm>
           <a:prstGeom prst="rect">
             <a:avLst/>
           </a:prstGeom>
+          <a:noFill/>
+          <a:ln>
+            <a:noFill/>
+          </a:ln>
+          <a:effectLst/>
+          <a:extLst>
+            <a:ext uri="{909E8E84-426E-40DD-AFC4-6F175D3DCCD1}">
+              <a14:hiddenFill xmlns:a14="http://schemas.microsoft.com/office/drawing/2010/main">
+                <a:solidFill>
+                  <a:schemeClr val="accent1"/>
+                </a:solidFill>
+              </a14:hiddenFill>
+            </a:ext>
+            <a:ext uri="{91240B29-F687-4F45-9708-019B960494DF}">
+              <a14:hiddenLine xmlns:a14="http://schemas.microsoft.com/office/drawing/2010/main" w="9525">
+                <a:solidFill>
+                  <a:schemeClr val="tx1"/>
+                </a:solidFill>
+                <a:miter lim="800000"/>
+                <a:headEnd/>
+                <a:tailEnd/>
+              </a14:hiddenLine>
+            </a:ext>
+            <a:ext uri="{AF507438-7753-43E0-B8FC-AC1667EBCBE1}">
+              <a14:hiddenEffects xmlns:a14="http://schemas.microsoft.com/office/drawing/2010/main">
+                <a:effectLst>
+                  <a:outerShdw dist="35921" dir="2700000" algn="ctr" rotWithShape="0">
+                    <a:schemeClr val="bg2"/>
+                  </a:outerShdw>
+                </a:effectLst>
+              </a14:hiddenEffects>
+            </a:ext>
+          </a:extLst>
         </p:spPr>
       </p:pic>
     </p:spTree>
@@ -5148,7 +5623,7 @@
 </file>
 
 <file path=ppt/slides/slide12.xml><?xml version="1.0" encoding="utf-8"?>
-<p:sld xmlns:a="http://schemas.openxmlformats.org/drawingml/2006/main" xmlns:p="http://schemas.openxmlformats.org/presentationml/2006/main" xmlns:r="http://schemas.openxmlformats.org/officeDocument/2006/relationships">
+<p:sld xmlns:a="http://schemas.openxmlformats.org/drawingml/2006/main" xmlns:r="http://schemas.openxmlformats.org/officeDocument/2006/relationships" xmlns:p="http://schemas.openxmlformats.org/presentationml/2006/main">
   <p:cSld>
     <p:spTree>
       <p:nvGrpSpPr>
@@ -5156,7 +5631,14 @@
         <p:cNvGrpSpPr/>
         <p:nvPr/>
       </p:nvGrpSpPr>
-      <p:grpSpPr/>
+      <p:grpSpPr>
+        <a:xfrm>
+          <a:off x="0" y="0"/>
+          <a:ext cx="0" cy="0"/>
+          <a:chOff x="0" y="0"/>
+          <a:chExt cx="0" cy="0"/>
+        </a:xfrm>
+      </p:grpSpPr>
       <p:sp>
         <p:nvSpPr>
           <p:cNvPr id="2" name="Rectangle 1"/>
@@ -5199,95 +5681,7 @@
           <a:lstStyle/>
           <a:p>
             <a:pPr algn="ctr"/>
-          </a:p>
-        </p:txBody>
-      </p:sp>
-      <p:sp>
-        <p:nvSpPr>
-          <p:cNvPr id="3" name="TextBox 2"/>
-          <p:cNvSpPr txBox="1"/>
-          <p:nvPr/>
-        </p:nvSpPr>
-        <p:spPr>
-          <a:xfrm>
-            <a:off x="731520" y="457200"/>
-            <a:ext cx="7315200" cy="274320"/>
-          </a:xfrm>
-          <a:prstGeom prst="rect">
-            <a:avLst/>
-          </a:prstGeom>
-          <a:noFill/>
-        </p:spPr>
-        <p:txBody>
-          <a:bodyPr wrap="square">
-            <a:spAutoFit/>
-          </a:bodyPr>
-          <a:lstStyle/>
-          <a:p>
-            <a:pPr>
-              <a:defRPr sz="1000" b="1">
-                <a:solidFill>
-                  <a:srgbClr val="2563EB"/>
-                </a:solidFill>
-              </a:defRPr>
-            </a:pPr>
-            <a:r>
-              <a:t>EDUSCRIPT COMPILER DESIGN • REVIEW 3</a:t>
-            </a:r>
-          </a:p>
-        </p:txBody>
-      </p:sp>
-      <p:sp>
-        <p:nvSpPr>
-          <p:cNvPr id="4" name="Rounded Rectangle 3"/>
-          <p:cNvSpPr/>
-          <p:nvPr/>
-        </p:nvSpPr>
-        <p:spPr>
-          <a:xfrm>
-            <a:off x="9326880" y="457200"/>
-            <a:ext cx="2133295" cy="320040"/>
-          </a:xfrm>
-          <a:prstGeom prst="roundRect">
-            <a:avLst/>
-          </a:prstGeom>
-          <a:solidFill>
-            <a:srgbClr val="ECFDF5"/>
-          </a:solidFill>
-          <a:ln>
-            <a:solidFill>
-              <a:srgbClr val="10B981"/>
-            </a:solidFill>
-          </a:ln>
-        </p:spPr>
-        <p:style>
-          <a:lnRef idx="1">
-            <a:schemeClr val="accent1"/>
-          </a:lnRef>
-          <a:fillRef idx="3">
-            <a:schemeClr val="accent1"/>
-          </a:fillRef>
-          <a:effectRef idx="2">
-            <a:schemeClr val="accent1"/>
-          </a:effectRef>
-          <a:fontRef idx="minor">
-            <a:schemeClr val="lt1"/>
-          </a:fontRef>
-        </p:style>
-        <p:txBody>
-          <a:bodyPr rtlCol="0" anchor="ctr"/>
-          <a:lstStyle/>
-          <a:p>
-            <a:pPr algn="ctr">
-              <a:defRPr sz="1000" b="1">
-                <a:solidFill>
-                  <a:srgbClr val="10B981"/>
-                </a:solidFill>
-              </a:defRPr>
-            </a:pPr>
-            <a:r>
-              <a:t>✓ 100% IMPLEMENTED</a:t>
-            </a:r>
+            <a:endParaRPr/>
           </a:p>
         </p:txBody>
       </p:sp>
@@ -5357,7 +5751,7 @@
                     <a:lstStyle/>
                     <a:p>
                       <a:pPr algn="l">
-                        <a:defRPr b="1" sz="1100">
+                        <a:defRPr sz="1100" b="1">
                           <a:solidFill>
                             <a:srgbClr val="F8FAFC"/>
                           </a:solidFill>
@@ -5380,7 +5774,7 @@
                     <a:lstStyle/>
                     <a:p>
                       <a:pPr algn="l">
-                        <a:defRPr b="1" sz="1100">
+                        <a:defRPr sz="1100" b="1">
                           <a:solidFill>
                             <a:srgbClr val="F8FAFC"/>
                           </a:solidFill>
@@ -5403,7 +5797,7 @@
                     <a:lstStyle/>
                     <a:p>
                       <a:pPr algn="l">
-                        <a:defRPr b="1" sz="1100">
+                        <a:defRPr sz="1100" b="1">
                           <a:solidFill>
                             <a:srgbClr val="F8FAFC"/>
                           </a:solidFill>
@@ -5426,7 +5820,7 @@
                     <a:lstStyle/>
                     <a:p>
                       <a:pPr algn="ctr">
-                        <a:defRPr b="1" sz="1100">
+                        <a:defRPr sz="1100" b="1">
                           <a:solidFill>
                             <a:srgbClr val="F8FAFC"/>
                           </a:solidFill>
@@ -6209,7 +6603,7 @@
 </file>
 
 <file path=ppt/slides/slide13.xml><?xml version="1.0" encoding="utf-8"?>
-<p:sld xmlns:a="http://schemas.openxmlformats.org/drawingml/2006/main" xmlns:p="http://schemas.openxmlformats.org/presentationml/2006/main" xmlns:r="http://schemas.openxmlformats.org/officeDocument/2006/relationships">
+<p:sld xmlns:a="http://schemas.openxmlformats.org/drawingml/2006/main" xmlns:r="http://schemas.openxmlformats.org/officeDocument/2006/relationships" xmlns:p="http://schemas.openxmlformats.org/presentationml/2006/main">
   <p:cSld>
     <p:spTree>
       <p:nvGrpSpPr>
@@ -6217,7 +6611,14 @@
         <p:cNvGrpSpPr/>
         <p:nvPr/>
       </p:nvGrpSpPr>
-      <p:grpSpPr/>
+      <p:grpSpPr>
+        <a:xfrm>
+          <a:off x="0" y="0"/>
+          <a:ext cx="0" cy="0"/>
+          <a:chOff x="0" y="0"/>
+          <a:chExt cx="0" cy="0"/>
+        </a:xfrm>
+      </p:grpSpPr>
       <p:sp>
         <p:nvSpPr>
           <p:cNvPr id="2" name="Rectangle 1"/>
@@ -6260,95 +6661,7 @@
           <a:lstStyle/>
           <a:p>
             <a:pPr algn="ctr"/>
-          </a:p>
-        </p:txBody>
-      </p:sp>
-      <p:sp>
-        <p:nvSpPr>
-          <p:cNvPr id="3" name="TextBox 2"/>
-          <p:cNvSpPr txBox="1"/>
-          <p:nvPr/>
-        </p:nvSpPr>
-        <p:spPr>
-          <a:xfrm>
-            <a:off x="731520" y="457200"/>
-            <a:ext cx="7315200" cy="274320"/>
-          </a:xfrm>
-          <a:prstGeom prst="rect">
-            <a:avLst/>
-          </a:prstGeom>
-          <a:noFill/>
-        </p:spPr>
-        <p:txBody>
-          <a:bodyPr wrap="square">
-            <a:spAutoFit/>
-          </a:bodyPr>
-          <a:lstStyle/>
-          <a:p>
-            <a:pPr>
-              <a:defRPr sz="1000" b="1">
-                <a:solidFill>
-                  <a:srgbClr val="2563EB"/>
-                </a:solidFill>
-              </a:defRPr>
-            </a:pPr>
-            <a:r>
-              <a:t>EDUSCRIPT COMPILER DESIGN • REVIEW 3</a:t>
-            </a:r>
-          </a:p>
-        </p:txBody>
-      </p:sp>
-      <p:sp>
-        <p:nvSpPr>
-          <p:cNvPr id="4" name="Rounded Rectangle 3"/>
-          <p:cNvSpPr/>
-          <p:nvPr/>
-        </p:nvSpPr>
-        <p:spPr>
-          <a:xfrm>
-            <a:off x="9326880" y="457200"/>
-            <a:ext cx="2133295" cy="320040"/>
-          </a:xfrm>
-          <a:prstGeom prst="roundRect">
-            <a:avLst/>
-          </a:prstGeom>
-          <a:solidFill>
-            <a:srgbClr val="ECFDF5"/>
-          </a:solidFill>
-          <a:ln>
-            <a:solidFill>
-              <a:srgbClr val="10B981"/>
-            </a:solidFill>
-          </a:ln>
-        </p:spPr>
-        <p:style>
-          <a:lnRef idx="1">
-            <a:schemeClr val="accent1"/>
-          </a:lnRef>
-          <a:fillRef idx="3">
-            <a:schemeClr val="accent1"/>
-          </a:fillRef>
-          <a:effectRef idx="2">
-            <a:schemeClr val="accent1"/>
-          </a:effectRef>
-          <a:fontRef idx="minor">
-            <a:schemeClr val="lt1"/>
-          </a:fontRef>
-        </p:style>
-        <p:txBody>
-          <a:bodyPr rtlCol="0" anchor="ctr"/>
-          <a:lstStyle/>
-          <a:p>
-            <a:pPr algn="ctr">
-              <a:defRPr sz="1000" b="1">
-                <a:solidFill>
-                  <a:srgbClr val="10B981"/>
-                </a:solidFill>
-              </a:defRPr>
-            </a:pPr>
-            <a:r>
-              <a:t>✓ 100% IMPLEMENTED</a:t>
-            </a:r>
+            <a:endParaRPr/>
           </a:p>
         </p:txBody>
       </p:sp>
@@ -6429,49 +6742,7 @@
           <a:lstStyle/>
           <a:p>
             <a:pPr algn="ctr"/>
-          </a:p>
-        </p:txBody>
-      </p:sp>
-      <p:sp>
-        <p:nvSpPr>
-          <p:cNvPr id="7" name="Rectangle 6"/>
-          <p:cNvSpPr/>
-          <p:nvPr/>
-        </p:nvSpPr>
-        <p:spPr>
-          <a:xfrm>
-            <a:off x="731520" y="1463040"/>
-            <a:ext cx="5257800" cy="54864"/>
-          </a:xfrm>
-          <a:prstGeom prst="rect">
-            <a:avLst/>
-          </a:prstGeom>
-          <a:solidFill>
-            <a:srgbClr val="2563EB"/>
-          </a:solidFill>
-          <a:ln>
-            <a:noFill/>
-          </a:ln>
-        </p:spPr>
-        <p:style>
-          <a:lnRef idx="1">
-            <a:schemeClr val="accent1"/>
-          </a:lnRef>
-          <a:fillRef idx="3">
-            <a:schemeClr val="accent1"/>
-          </a:fillRef>
-          <a:effectRef idx="2">
-            <a:schemeClr val="accent1"/>
-          </a:effectRef>
-          <a:fontRef idx="minor">
-            <a:schemeClr val="lt1"/>
-          </a:fontRef>
-        </p:style>
-        <p:txBody>
-          <a:bodyPr rtlCol="0" anchor="ctr"/>
-          <a:lstStyle/>
-          <a:p>
-            <a:pPr algn="ctr"/>
+            <a:endParaRPr/>
           </a:p>
         </p:txBody>
       </p:sp>
@@ -6567,49 +6838,7 @@
           <a:lstStyle/>
           <a:p>
             <a:pPr algn="ctr"/>
-          </a:p>
-        </p:txBody>
-      </p:sp>
-      <p:sp>
-        <p:nvSpPr>
-          <p:cNvPr id="10" name="Rectangle 9"/>
-          <p:cNvSpPr/>
-          <p:nvPr/>
-        </p:nvSpPr>
-        <p:spPr>
-          <a:xfrm>
-            <a:off x="6172200" y="1463040"/>
-            <a:ext cx="5257800" cy="54864"/>
-          </a:xfrm>
-          <a:prstGeom prst="rect">
-            <a:avLst/>
-          </a:prstGeom>
-          <a:solidFill>
-            <a:srgbClr val="7C3AED"/>
-          </a:solidFill>
-          <a:ln>
-            <a:noFill/>
-          </a:ln>
-        </p:spPr>
-        <p:style>
-          <a:lnRef idx="1">
-            <a:schemeClr val="accent1"/>
-          </a:lnRef>
-          <a:fillRef idx="3">
-            <a:schemeClr val="accent1"/>
-          </a:fillRef>
-          <a:effectRef idx="2">
-            <a:schemeClr val="accent1"/>
-          </a:effectRef>
-          <a:fontRef idx="minor">
-            <a:schemeClr val="lt1"/>
-          </a:fontRef>
-        </p:style>
-        <p:txBody>
-          <a:bodyPr rtlCol="0" anchor="ctr"/>
-          <a:lstStyle/>
-          <a:p>
-            <a:pPr algn="ctr"/>
+            <a:endParaRPr/>
           </a:p>
         </p:txBody>
       </p:sp>
@@ -6646,6 +6875,7 @@
               </a:defRPr>
             </a:pPr>
             <a:r>
+              <a:rPr dirty="0"/>
               <a:t>2. Total Academic Transparency</a:t>
             </a:r>
           </a:p>
@@ -6658,7 +6888,32 @@
               </a:defRPr>
             </a:pPr>
             <a:r>
-              <a:t>Unlike black-box compilers, every intermediate stage (Tokens, AST, Symbol Table, TAC IR) is fully inspectable via dedicated CLI flags (--tokens, --ast, --symbols, --tac, --all).</a:t>
+              <a:rPr dirty="0"/>
+              <a:t>Unlike black-box compilers, every intermediate stage (Tokens, AST, Symbol Table, TAC IR) is fully </a:t>
+            </a:r>
+            <a:r>
+              <a:rPr dirty="0" err="1"/>
+              <a:t>inspectable</a:t>
+            </a:r>
+            <a:r>
+              <a:rPr dirty="0"/>
+              <a:t> via dedicated CLI flags (--tokens, --</a:t>
+            </a:r>
+            <a:r>
+              <a:rPr dirty="0" err="1"/>
+              <a:t>ast</a:t>
+            </a:r>
+            <a:r>
+              <a:rPr dirty="0"/>
+              <a:t>, --symbols, --</a:t>
+            </a:r>
+            <a:r>
+              <a:rPr dirty="0" err="1"/>
+              <a:t>tac</a:t>
+            </a:r>
+            <a:r>
+              <a:rPr dirty="0"/>
+              <a:t>, --all).</a:t>
             </a:r>
           </a:p>
         </p:txBody>
@@ -6705,49 +6960,7 @@
           <a:lstStyle/>
           <a:p>
             <a:pPr algn="ctr"/>
-          </a:p>
-        </p:txBody>
-      </p:sp>
-      <p:sp>
-        <p:nvSpPr>
-          <p:cNvPr id="13" name="Rectangle 12"/>
-          <p:cNvSpPr/>
-          <p:nvPr/>
-        </p:nvSpPr>
-        <p:spPr>
-          <a:xfrm>
-            <a:off x="731520" y="3931920"/>
-            <a:ext cx="5257800" cy="54864"/>
-          </a:xfrm>
-          <a:prstGeom prst="rect">
-            <a:avLst/>
-          </a:prstGeom>
-          <a:solidFill>
-            <a:srgbClr val="10B981"/>
-          </a:solidFill>
-          <a:ln>
-            <a:noFill/>
-          </a:ln>
-        </p:spPr>
-        <p:style>
-          <a:lnRef idx="1">
-            <a:schemeClr val="accent1"/>
-          </a:lnRef>
-          <a:fillRef idx="3">
-            <a:schemeClr val="accent1"/>
-          </a:fillRef>
-          <a:effectRef idx="2">
-            <a:schemeClr val="accent1"/>
-          </a:effectRef>
-          <a:fontRef idx="minor">
-            <a:schemeClr val="lt1"/>
-          </a:fontRef>
-        </p:style>
-        <p:txBody>
-          <a:bodyPr rtlCol="0" anchor="ctr"/>
-          <a:lstStyle/>
-          <a:p>
-            <a:pPr algn="ctr"/>
+            <a:endParaRPr/>
           </a:p>
         </p:txBody>
       </p:sp>
@@ -6843,49 +7056,7 @@
           <a:lstStyle/>
           <a:p>
             <a:pPr algn="ctr"/>
-          </a:p>
-        </p:txBody>
-      </p:sp>
-      <p:sp>
-        <p:nvSpPr>
-          <p:cNvPr id="16" name="Rectangle 15"/>
-          <p:cNvSpPr/>
-          <p:nvPr/>
-        </p:nvSpPr>
-        <p:spPr>
-          <a:xfrm>
-            <a:off x="6172200" y="3931920"/>
-            <a:ext cx="5257800" cy="54864"/>
-          </a:xfrm>
-          <a:prstGeom prst="rect">
-            <a:avLst/>
-          </a:prstGeom>
-          <a:solidFill>
-            <a:srgbClr val="EA580C"/>
-          </a:solidFill>
-          <a:ln>
-            <a:noFill/>
-          </a:ln>
-        </p:spPr>
-        <p:style>
-          <a:lnRef idx="1">
-            <a:schemeClr val="accent1"/>
-          </a:lnRef>
-          <a:fillRef idx="3">
-            <a:schemeClr val="accent1"/>
-          </a:fillRef>
-          <a:effectRef idx="2">
-            <a:schemeClr val="accent1"/>
-          </a:effectRef>
-          <a:fontRef idx="minor">
-            <a:schemeClr val="lt1"/>
-          </a:fontRef>
-        </p:style>
-        <p:txBody>
-          <a:bodyPr rtlCol="0" anchor="ctr"/>
-          <a:lstStyle/>
-          <a:p>
-            <a:pPr algn="ctr"/>
+            <a:endParaRPr/>
           </a:p>
         </p:txBody>
       </p:sp>
@@ -6948,7 +7119,7 @@
 </file>
 
 <file path=ppt/slides/slide14.xml><?xml version="1.0" encoding="utf-8"?>
-<p:sld xmlns:a="http://schemas.openxmlformats.org/drawingml/2006/main" xmlns:p="http://schemas.openxmlformats.org/presentationml/2006/main" xmlns:r="http://schemas.openxmlformats.org/officeDocument/2006/relationships">
+<p:sld xmlns:a="http://schemas.openxmlformats.org/drawingml/2006/main" xmlns:r="http://schemas.openxmlformats.org/officeDocument/2006/relationships" xmlns:p="http://schemas.openxmlformats.org/presentationml/2006/main">
   <p:cSld>
     <p:spTree>
       <p:nvGrpSpPr>
@@ -6956,7 +7127,14 @@
         <p:cNvGrpSpPr/>
         <p:nvPr/>
       </p:nvGrpSpPr>
-      <p:grpSpPr/>
+      <p:grpSpPr>
+        <a:xfrm>
+          <a:off x="0" y="0"/>
+          <a:ext cx="0" cy="0"/>
+          <a:chOff x="0" y="0"/>
+          <a:chExt cx="0" cy="0"/>
+        </a:xfrm>
+      </p:grpSpPr>
       <p:sp>
         <p:nvSpPr>
           <p:cNvPr id="2" name="Rectangle 1"/>
@@ -6999,95 +7177,7 @@
           <a:lstStyle/>
           <a:p>
             <a:pPr algn="ctr"/>
-          </a:p>
-        </p:txBody>
-      </p:sp>
-      <p:sp>
-        <p:nvSpPr>
-          <p:cNvPr id="3" name="TextBox 2"/>
-          <p:cNvSpPr txBox="1"/>
-          <p:nvPr/>
-        </p:nvSpPr>
-        <p:spPr>
-          <a:xfrm>
-            <a:off x="731520" y="457200"/>
-            <a:ext cx="7315200" cy="274320"/>
-          </a:xfrm>
-          <a:prstGeom prst="rect">
-            <a:avLst/>
-          </a:prstGeom>
-          <a:noFill/>
-        </p:spPr>
-        <p:txBody>
-          <a:bodyPr wrap="square">
-            <a:spAutoFit/>
-          </a:bodyPr>
-          <a:lstStyle/>
-          <a:p>
-            <a:pPr>
-              <a:defRPr sz="1000" b="1">
-                <a:solidFill>
-                  <a:srgbClr val="2563EB"/>
-                </a:solidFill>
-              </a:defRPr>
-            </a:pPr>
-            <a:r>
-              <a:t>EDUSCRIPT COMPILER DESIGN • REVIEW 3</a:t>
-            </a:r>
-          </a:p>
-        </p:txBody>
-      </p:sp>
-      <p:sp>
-        <p:nvSpPr>
-          <p:cNvPr id="4" name="Rounded Rectangle 3"/>
-          <p:cNvSpPr/>
-          <p:nvPr/>
-        </p:nvSpPr>
-        <p:spPr>
-          <a:xfrm>
-            <a:off x="9326880" y="457200"/>
-            <a:ext cx="2133295" cy="320040"/>
-          </a:xfrm>
-          <a:prstGeom prst="roundRect">
-            <a:avLst/>
-          </a:prstGeom>
-          <a:solidFill>
-            <a:srgbClr val="ECFDF5"/>
-          </a:solidFill>
-          <a:ln>
-            <a:solidFill>
-              <a:srgbClr val="10B981"/>
-            </a:solidFill>
-          </a:ln>
-        </p:spPr>
-        <p:style>
-          <a:lnRef idx="1">
-            <a:schemeClr val="accent1"/>
-          </a:lnRef>
-          <a:fillRef idx="3">
-            <a:schemeClr val="accent1"/>
-          </a:fillRef>
-          <a:effectRef idx="2">
-            <a:schemeClr val="accent1"/>
-          </a:effectRef>
-          <a:fontRef idx="minor">
-            <a:schemeClr val="lt1"/>
-          </a:fontRef>
-        </p:style>
-        <p:txBody>
-          <a:bodyPr rtlCol="0" anchor="ctr"/>
-          <a:lstStyle/>
-          <a:p>
-            <a:pPr algn="ctr">
-              <a:defRPr sz="1000" b="1">
-                <a:solidFill>
-                  <a:srgbClr val="10B981"/>
-                </a:solidFill>
-              </a:defRPr>
-            </a:pPr>
-            <a:r>
-              <a:t>✓ 100% IMPLEMENTED</a:t>
-            </a:r>
+            <a:endParaRPr/>
           </a:p>
         </p:txBody>
       </p:sp>
@@ -7168,6 +7258,7 @@
           <a:lstStyle/>
           <a:p>
             <a:pPr algn="ctr"/>
+            <a:endParaRPr/>
           </a:p>
         </p:txBody>
       </p:sp>
@@ -7263,6 +7354,7 @@
           <a:lstStyle/>
           <a:p>
             <a:pPr algn="ctr"/>
+            <a:endParaRPr/>
           </a:p>
         </p:txBody>
       </p:sp>
@@ -7358,6 +7450,7 @@
           <a:lstStyle/>
           <a:p>
             <a:pPr algn="ctr"/>
+            <a:endParaRPr/>
           </a:p>
         </p:txBody>
       </p:sp>
@@ -7453,6 +7546,7 @@
           <a:lstStyle/>
           <a:p>
             <a:pPr algn="ctr"/>
+            <a:endParaRPr/>
           </a:p>
         </p:txBody>
       </p:sp>
@@ -7515,7 +7609,7 @@
 </file>
 
 <file path=ppt/slides/slide15.xml><?xml version="1.0" encoding="utf-8"?>
-<p:sld xmlns:a="http://schemas.openxmlformats.org/drawingml/2006/main" xmlns:p="http://schemas.openxmlformats.org/presentationml/2006/main" xmlns:r="http://schemas.openxmlformats.org/officeDocument/2006/relationships">
+<p:sld xmlns:a="http://schemas.openxmlformats.org/drawingml/2006/main" xmlns:r="http://schemas.openxmlformats.org/officeDocument/2006/relationships" xmlns:p="http://schemas.openxmlformats.org/presentationml/2006/main">
   <p:cSld>
     <p:spTree>
       <p:nvGrpSpPr>
@@ -7523,7 +7617,14 @@
         <p:cNvGrpSpPr/>
         <p:nvPr/>
       </p:nvGrpSpPr>
-      <p:grpSpPr/>
+      <p:grpSpPr>
+        <a:xfrm>
+          <a:off x="0" y="0"/>
+          <a:ext cx="0" cy="0"/>
+          <a:chOff x="0" y="0"/>
+          <a:chExt cx="0" cy="0"/>
+        </a:xfrm>
+      </p:grpSpPr>
       <p:sp>
         <p:nvSpPr>
           <p:cNvPr id="2" name="Rectangle 1"/>
@@ -7566,19 +7667,20 @@
           <a:lstStyle/>
           <a:p>
             <a:pPr algn="ctr"/>
-          </a:p>
-        </p:txBody>
-      </p:sp>
-      <p:sp>
-        <p:nvSpPr>
-          <p:cNvPr id="3" name="TextBox 2"/>
+            <a:endParaRPr/>
+          </a:p>
+        </p:txBody>
+      </p:sp>
+      <p:sp>
+        <p:nvSpPr>
+          <p:cNvPr id="5" name="TextBox 4"/>
           <p:cNvSpPr txBox="1"/>
           <p:nvPr/>
         </p:nvSpPr>
         <p:spPr>
           <a:xfrm>
-            <a:off x="731520" y="457200"/>
-            <a:ext cx="7315200" cy="274320"/>
+            <a:off x="731520" y="570992"/>
+            <a:ext cx="10728655" cy="594360"/>
           </a:xfrm>
           <a:prstGeom prst="rect">
             <a:avLst/>
@@ -7592,95 +7694,6 @@
           <a:lstStyle/>
           <a:p>
             <a:pPr>
-              <a:defRPr sz="1000" b="1">
-                <a:solidFill>
-                  <a:srgbClr val="2563EB"/>
-                </a:solidFill>
-              </a:defRPr>
-            </a:pPr>
-            <a:r>
-              <a:t>EDUSCRIPT COMPILER DESIGN • REVIEW 3</a:t>
-            </a:r>
-          </a:p>
-        </p:txBody>
-      </p:sp>
-      <p:sp>
-        <p:nvSpPr>
-          <p:cNvPr id="4" name="Rounded Rectangle 3"/>
-          <p:cNvSpPr/>
-          <p:nvPr/>
-        </p:nvSpPr>
-        <p:spPr>
-          <a:xfrm>
-            <a:off x="9326880" y="457200"/>
-            <a:ext cx="2133295" cy="320040"/>
-          </a:xfrm>
-          <a:prstGeom prst="roundRect">
-            <a:avLst/>
-          </a:prstGeom>
-          <a:solidFill>
-            <a:srgbClr val="ECFDF5"/>
-          </a:solidFill>
-          <a:ln>
-            <a:solidFill>
-              <a:srgbClr val="10B981"/>
-            </a:solidFill>
-          </a:ln>
-        </p:spPr>
-        <p:style>
-          <a:lnRef idx="1">
-            <a:schemeClr val="accent1"/>
-          </a:lnRef>
-          <a:fillRef idx="3">
-            <a:schemeClr val="accent1"/>
-          </a:fillRef>
-          <a:effectRef idx="2">
-            <a:schemeClr val="accent1"/>
-          </a:effectRef>
-          <a:fontRef idx="minor">
-            <a:schemeClr val="lt1"/>
-          </a:fontRef>
-        </p:style>
-        <p:txBody>
-          <a:bodyPr rtlCol="0" anchor="ctr"/>
-          <a:lstStyle/>
-          <a:p>
-            <a:pPr algn="ctr">
-              <a:defRPr sz="1000" b="1">
-                <a:solidFill>
-                  <a:srgbClr val="10B981"/>
-                </a:solidFill>
-              </a:defRPr>
-            </a:pPr>
-            <a:r>
-              <a:t>✓ 100% IMPLEMENTED</a:t>
-            </a:r>
-          </a:p>
-        </p:txBody>
-      </p:sp>
-      <p:sp>
-        <p:nvSpPr>
-          <p:cNvPr id="5" name="TextBox 4"/>
-          <p:cNvSpPr txBox="1"/>
-          <p:nvPr/>
-        </p:nvSpPr>
-        <p:spPr>
-          <a:xfrm>
-            <a:off x="731520" y="713232"/>
-            <a:ext cx="10728655" cy="594360"/>
-          </a:xfrm>
-          <a:prstGeom prst="rect">
-            <a:avLst/>
-          </a:prstGeom>
-          <a:noFill/>
-        </p:spPr>
-        <p:txBody>
-          <a:bodyPr wrap="square">
-            <a:spAutoFit/>
-          </a:bodyPr>
-          <a:lstStyle/>
-          <a:p>
-            <a:pPr>
               <a:defRPr sz="2200" b="1">
                 <a:solidFill>
                   <a:srgbClr val="0F172A"/>
@@ -7701,7 +7714,7 @@
         </p:nvSpPr>
         <p:spPr>
           <a:xfrm>
-            <a:off x="731520" y="1463040"/>
+            <a:off x="731520" y="1165352"/>
             <a:ext cx="4754880" cy="4846320"/>
           </a:xfrm>
           <a:prstGeom prst="roundRect">
@@ -7735,6 +7748,7 @@
           <a:lstStyle/>
           <a:p>
             <a:pPr algn="ctr"/>
+            <a:endParaRPr/>
           </a:p>
         </p:txBody>
       </p:sp>
@@ -7771,6 +7785,7 @@
               </a:defRPr>
             </a:pPr>
             <a:r>
+              <a:rPr dirty="0"/>
               <a:t>Repository &amp; Version Control</a:t>
             </a:r>
           </a:p>
@@ -7781,15 +7796,31 @@
               </a:spcAft>
             </a:pPr>
             <a:r>
-              <a:rPr b="1" sz="1300">
-                <a:solidFill>
-                  <a:srgbClr val="0F172A"/>
-                </a:solidFill>
-              </a:rPr>
-              <a:t>• GitHub Repository: </a:t>
-            </a:r>
-            <a:r>
-              <a:rPr b="0" sz="1300">
+              <a:rPr sz="1300" b="1" dirty="0">
+                <a:solidFill>
+                  <a:srgbClr val="0F172A"/>
+                </a:solidFill>
+              </a:rPr>
+              <a:t>• </a:t>
+            </a:r>
+            <a:r>
+              <a:rPr sz="1300" b="1" dirty="0" err="1">
+                <a:solidFill>
+                  <a:srgbClr val="0F172A"/>
+                </a:solidFill>
+              </a:rPr>
+              <a:t>GitHub</a:t>
+            </a:r>
+            <a:r>
+              <a:rPr sz="1300" b="1" dirty="0">
+                <a:solidFill>
+                  <a:srgbClr val="0F172A"/>
+                </a:solidFill>
+              </a:rPr>
+              <a:t> Repository: </a:t>
+            </a:r>
+            <a:r>
+              <a:rPr sz="1300" b="0" dirty="0">
                 <a:solidFill>
                   <a:srgbClr val="0F172A"/>
                 </a:solidFill>
@@ -7804,7 +7835,7 @@
               </a:spcAft>
             </a:pPr>
             <a:r>
-              <a:rPr b="1" sz="1300">
+              <a:rPr sz="1300" b="1" dirty="0">
                 <a:solidFill>
                   <a:srgbClr val="0F172A"/>
                 </a:solidFill>
@@ -7812,7 +7843,7 @@
               <a:t>• Active Branch: </a:t>
             </a:r>
             <a:r>
-              <a:rPr b="0" sz="1300">
+              <a:rPr sz="1300" b="0" dirty="0">
                 <a:solidFill>
                   <a:srgbClr val="0F172A"/>
                 </a:solidFill>
@@ -7827,7 +7858,7 @@
               </a:spcAft>
             </a:pPr>
             <a:r>
-              <a:rPr b="1" sz="1300">
+              <a:rPr sz="1300" b="1" dirty="0">
                 <a:solidFill>
                   <a:srgbClr val="0F172A"/>
                 </a:solidFill>
@@ -7835,12 +7866,28 @@
               <a:t>• Final Project Deliverables: </a:t>
             </a:r>
             <a:r>
-              <a:rPr b="0" sz="1300">
-                <a:solidFill>
-                  <a:srgbClr val="0F172A"/>
-                </a:solidFill>
-              </a:rPr>
-              <a:t>Complete Working Source Code, Test Suite (12 test cases), Test Results (100% pass), Terminal Screenshots, Final Presentation (.pptx), User Guide.</a:t>
+              <a:rPr sz="1300" b="0" dirty="0">
+                <a:solidFill>
+                  <a:srgbClr val="0F172A"/>
+                </a:solidFill>
+              </a:rPr>
+              <a:t>Complete Working Source Code, Test Suite (12 test cases), Test Results (100% pass), Terminal Screenshots, Final Presentation (.</a:t>
+            </a:r>
+            <a:r>
+              <a:rPr sz="1300" b="0" dirty="0" err="1">
+                <a:solidFill>
+                  <a:srgbClr val="0F172A"/>
+                </a:solidFill>
+              </a:rPr>
+              <a:t>pptx</a:t>
+            </a:r>
+            <a:r>
+              <a:rPr sz="1300" b="0" dirty="0">
+                <a:solidFill>
+                  <a:srgbClr val="0F172A"/>
+                </a:solidFill>
+              </a:rPr>
+              <a:t>), User Guide.</a:t>
             </a:r>
           </a:p>
           <a:p>
@@ -7850,7 +7897,7 @@
               </a:spcAft>
             </a:pPr>
             <a:r>
-              <a:rPr b="1" sz="1300">
+              <a:rPr sz="1300" b="1" dirty="0">
                 <a:solidFill>
                   <a:srgbClr val="0F172A"/>
                 </a:solidFill>
@@ -7858,12 +7905,60 @@
               <a:t>• Individual Project: </a:t>
             </a:r>
             <a:r>
-              <a:rPr b="0" sz="1300">
-                <a:solidFill>
-                  <a:srgbClr val="0F172A"/>
-                </a:solidFill>
-              </a:rPr>
-              <a:t>Sole author and developer: Udbhav Tiwari (Reg No: 24BCT0328).</a:t>
+              <a:rPr sz="1300" b="0" dirty="0">
+                <a:solidFill>
+                  <a:srgbClr val="0F172A"/>
+                </a:solidFill>
+              </a:rPr>
+              <a:t>Sole author and developer: </a:t>
+            </a:r>
+            <a:r>
+              <a:rPr sz="1300" b="0" dirty="0" err="1">
+                <a:solidFill>
+                  <a:srgbClr val="0F172A"/>
+                </a:solidFill>
+              </a:rPr>
+              <a:t>Udbhav</a:t>
+            </a:r>
+            <a:r>
+              <a:rPr sz="1300" b="0" dirty="0">
+                <a:solidFill>
+                  <a:srgbClr val="0F172A"/>
+                </a:solidFill>
+              </a:rPr>
+              <a:t> </a:t>
+            </a:r>
+            <a:r>
+              <a:rPr sz="1300" b="0" dirty="0" err="1">
+                <a:solidFill>
+                  <a:srgbClr val="0F172A"/>
+                </a:solidFill>
+              </a:rPr>
+              <a:t>Tiwari</a:t>
+            </a:r>
+            <a:r>
+              <a:rPr sz="1300" b="0" dirty="0">
+                <a:solidFill>
+                  <a:srgbClr val="0F172A"/>
+                </a:solidFill>
+              </a:rPr>
+              <a:t> (</a:t>
+            </a:r>
+            <a:r>
+              <a:rPr sz="1300" b="0" dirty="0" err="1">
+                <a:solidFill>
+                  <a:srgbClr val="0F172A"/>
+                </a:solidFill>
+              </a:rPr>
+              <a:t>Reg</a:t>
+            </a:r>
+            <a:r>
+              <a:rPr sz="1300" b="0" dirty="0">
+                <a:solidFill>
+                  <a:srgbClr val="0F172A"/>
+                </a:solidFill>
+              </a:rPr>
+              <a:t> No: 24BCT0328).</a:t>
             </a:r>
           </a:p>
         </p:txBody>
@@ -7876,7 +7971,7 @@
         </p:nvSpPr>
         <p:spPr>
           <a:xfrm>
-            <a:off x="5669280" y="1463040"/>
+            <a:off x="5669278" y="1165352"/>
             <a:ext cx="5790895" cy="4846320"/>
           </a:xfrm>
           <a:prstGeom prst="roundRect">
@@ -7910,31 +8005,72 @@
           <a:lstStyle/>
           <a:p>
             <a:pPr algn="ctr"/>
+            <a:endParaRPr/>
           </a:p>
         </p:txBody>
       </p:sp>
       <p:pic>
         <p:nvPicPr>
-          <p:cNvPr id="9" name="Picture 8" descr="14_git_status_log.png"/>
+          <p:cNvPr id="1026" name="Picture 2"/>
           <p:cNvPicPr>
-            <a:picLocks noChangeAspect="1"/>
+            <a:picLocks noChangeAspect="1" noChangeArrowheads="1"/>
           </p:cNvPicPr>
           <p:nvPr/>
         </p:nvPicPr>
         <p:blipFill>
-          <a:blip r:embed="rId2"/>
+          <a:blip r:embed="rId2">
+            <a:extLst>
+              <a:ext uri="{28A0092B-C50C-407E-A947-70E740481C1C}">
+                <a14:useLocalDpi xmlns:a14="http://schemas.microsoft.com/office/drawing/2010/main" val="0"/>
+              </a:ext>
+            </a:extLst>
+          </a:blip>
+          <a:srcRect/>
           <a:stretch>
             <a:fillRect/>
           </a:stretch>
         </p:blipFill>
-        <p:spPr>
-          <a:xfrm>
-            <a:off x="5806440" y="2011680"/>
-            <a:ext cx="5516575" cy="1184612"/>
+        <p:spPr bwMode="auto">
+          <a:xfrm>
+            <a:off x="5877724" y="2293743"/>
+            <a:ext cx="5374005" cy="863179"/>
           </a:xfrm>
           <a:prstGeom prst="rect">
             <a:avLst/>
           </a:prstGeom>
+          <a:noFill/>
+          <a:ln>
+            <a:noFill/>
+          </a:ln>
+          <a:effectLst/>
+          <a:extLst>
+            <a:ext uri="{909E8E84-426E-40DD-AFC4-6F175D3DCCD1}">
+              <a14:hiddenFill xmlns:a14="http://schemas.microsoft.com/office/drawing/2010/main">
+                <a:solidFill>
+                  <a:schemeClr val="accent1"/>
+                </a:solidFill>
+              </a14:hiddenFill>
+            </a:ext>
+            <a:ext uri="{91240B29-F687-4F45-9708-019B960494DF}">
+              <a14:hiddenLine xmlns:a14="http://schemas.microsoft.com/office/drawing/2010/main" w="9525">
+                <a:solidFill>
+                  <a:schemeClr val="tx1"/>
+                </a:solidFill>
+                <a:miter lim="800000"/>
+                <a:headEnd/>
+                <a:tailEnd/>
+              </a14:hiddenLine>
+            </a:ext>
+            <a:ext uri="{AF507438-7753-43E0-B8FC-AC1667EBCBE1}">
+              <a14:hiddenEffects xmlns:a14="http://schemas.microsoft.com/office/drawing/2010/main">
+                <a:effectLst>
+                  <a:outerShdw dist="35921" dir="2700000" algn="ctr" rotWithShape="0">
+                    <a:schemeClr val="bg2"/>
+                  </a:outerShdw>
+                </a:effectLst>
+              </a14:hiddenEffects>
+            </a:ext>
+          </a:extLst>
         </p:spPr>
       </p:pic>
     </p:spTree>
@@ -7946,7 +8082,7 @@
 </file>
 
 <file path=ppt/slides/slide16.xml><?xml version="1.0" encoding="utf-8"?>
-<p:sld xmlns:a="http://schemas.openxmlformats.org/drawingml/2006/main" xmlns:p="http://schemas.openxmlformats.org/presentationml/2006/main" xmlns:r="http://schemas.openxmlformats.org/officeDocument/2006/relationships">
+<p:sld xmlns:a="http://schemas.openxmlformats.org/drawingml/2006/main" xmlns:r="http://schemas.openxmlformats.org/officeDocument/2006/relationships" xmlns:p="http://schemas.openxmlformats.org/presentationml/2006/main">
   <p:cSld>
     <p:spTree>
       <p:nvGrpSpPr>
@@ -7954,7 +8090,14 @@
         <p:cNvGrpSpPr/>
         <p:nvPr/>
       </p:nvGrpSpPr>
-      <p:grpSpPr/>
+      <p:grpSpPr>
+        <a:xfrm>
+          <a:off x="0" y="0"/>
+          <a:ext cx="0" cy="0"/>
+          <a:chOff x="0" y="0"/>
+          <a:chExt cx="0" cy="0"/>
+        </a:xfrm>
+      </p:grpSpPr>
       <p:sp>
         <p:nvSpPr>
           <p:cNvPr id="2" name="Rectangle 1"/>
@@ -7997,19 +8140,20 @@
           <a:lstStyle/>
           <a:p>
             <a:pPr algn="ctr"/>
-          </a:p>
-        </p:txBody>
-      </p:sp>
-      <p:sp>
-        <p:nvSpPr>
-          <p:cNvPr id="3" name="TextBox 2"/>
+            <a:endParaRPr/>
+          </a:p>
+        </p:txBody>
+      </p:sp>
+      <p:sp>
+        <p:nvSpPr>
+          <p:cNvPr id="5" name="TextBox 4"/>
           <p:cNvSpPr txBox="1"/>
           <p:nvPr/>
         </p:nvSpPr>
         <p:spPr>
           <a:xfrm>
-            <a:off x="731520" y="457200"/>
-            <a:ext cx="7315200" cy="274320"/>
+            <a:off x="731520" y="611632"/>
+            <a:ext cx="10728655" cy="594360"/>
           </a:xfrm>
           <a:prstGeom prst="rect">
             <a:avLst/>
@@ -8023,102 +8167,14 @@
           <a:lstStyle/>
           <a:p>
             <a:pPr>
-              <a:defRPr sz="1000" b="1">
-                <a:solidFill>
-                  <a:srgbClr val="2563EB"/>
+              <a:defRPr sz="2200" b="1">
+                <a:solidFill>
+                  <a:srgbClr val="0F172A"/>
                 </a:solidFill>
               </a:defRPr>
             </a:pPr>
             <a:r>
-              <a:t>EDUSCRIPT COMPILER DESIGN • REVIEW 3</a:t>
-            </a:r>
-          </a:p>
-        </p:txBody>
-      </p:sp>
-      <p:sp>
-        <p:nvSpPr>
-          <p:cNvPr id="4" name="Rounded Rectangle 3"/>
-          <p:cNvSpPr/>
-          <p:nvPr/>
-        </p:nvSpPr>
-        <p:spPr>
-          <a:xfrm>
-            <a:off x="9326880" y="457200"/>
-            <a:ext cx="2133295" cy="320040"/>
-          </a:xfrm>
-          <a:prstGeom prst="roundRect">
-            <a:avLst/>
-          </a:prstGeom>
-          <a:solidFill>
-            <a:srgbClr val="ECFDF5"/>
-          </a:solidFill>
-          <a:ln>
-            <a:solidFill>
-              <a:srgbClr val="10B981"/>
-            </a:solidFill>
-          </a:ln>
-        </p:spPr>
-        <p:style>
-          <a:lnRef idx="1">
-            <a:schemeClr val="accent1"/>
-          </a:lnRef>
-          <a:fillRef idx="3">
-            <a:schemeClr val="accent1"/>
-          </a:fillRef>
-          <a:effectRef idx="2">
-            <a:schemeClr val="accent1"/>
-          </a:effectRef>
-          <a:fontRef idx="minor">
-            <a:schemeClr val="lt1"/>
-          </a:fontRef>
-        </p:style>
-        <p:txBody>
-          <a:bodyPr rtlCol="0" anchor="ctr"/>
-          <a:lstStyle/>
-          <a:p>
-            <a:pPr algn="ctr">
-              <a:defRPr sz="1000" b="1">
-                <a:solidFill>
-                  <a:srgbClr val="10B981"/>
-                </a:solidFill>
-              </a:defRPr>
-            </a:pPr>
-            <a:r>
-              <a:t>✓ 100% IMPLEMENTED</a:t>
-            </a:r>
-          </a:p>
-        </p:txBody>
-      </p:sp>
-      <p:sp>
-        <p:nvSpPr>
-          <p:cNvPr id="5" name="TextBox 4"/>
-          <p:cNvSpPr txBox="1"/>
-          <p:nvPr/>
-        </p:nvSpPr>
-        <p:spPr>
-          <a:xfrm>
-            <a:off x="731520" y="713232"/>
-            <a:ext cx="10728655" cy="594360"/>
-          </a:xfrm>
-          <a:prstGeom prst="rect">
-            <a:avLst/>
-          </a:prstGeom>
-          <a:noFill/>
-        </p:spPr>
-        <p:txBody>
-          <a:bodyPr wrap="square">
-            <a:spAutoFit/>
-          </a:bodyPr>
-          <a:lstStyle/>
-          <a:p>
-            <a:pPr>
-              <a:defRPr sz="2200" b="1">
-                <a:solidFill>
-                  <a:srgbClr val="0F172A"/>
-                </a:solidFill>
-              </a:defRPr>
-            </a:pPr>
-            <a:r>
+              <a:rPr dirty="0"/>
               <a:t>Conclusion &amp; Future Enhancements</a:t>
             </a:r>
           </a:p>
@@ -8132,7 +8188,7 @@
         </p:nvSpPr>
         <p:spPr>
           <a:xfrm>
-            <a:off x="731520" y="1463040"/>
+            <a:off x="731520" y="1205992"/>
             <a:ext cx="5120640" cy="4846320"/>
           </a:xfrm>
           <a:prstGeom prst="roundRect">
@@ -8166,6 +8222,7 @@
           <a:lstStyle/>
           <a:p>
             <a:pPr algn="ctr"/>
+            <a:endParaRPr/>
           </a:p>
         </p:txBody>
       </p:sp>
@@ -8212,7 +8269,7 @@
               </a:spcAft>
             </a:pPr>
             <a:r>
-              <a:rPr b="1" sz="1300">
+              <a:rPr sz="1300" b="1">
                 <a:solidFill>
                   <a:srgbClr val="0F172A"/>
                 </a:solidFill>
@@ -8220,7 +8277,7 @@
               <a:t>• Comprehensive Implementation: </a:t>
             </a:r>
             <a:r>
-              <a:rPr b="0" sz="1300">
+              <a:rPr sz="1300" b="0">
                 <a:solidFill>
                   <a:srgbClr val="0F172A"/>
                 </a:solidFill>
@@ -8235,7 +8292,7 @@
               </a:spcAft>
             </a:pPr>
             <a:r>
-              <a:rPr b="1" sz="1300">
+              <a:rPr sz="1300" b="1">
                 <a:solidFill>
                   <a:srgbClr val="0F172A"/>
                 </a:solidFill>
@@ -8243,7 +8300,7 @@
               <a:t>• Educational &amp; Modular: </a:t>
             </a:r>
             <a:r>
-              <a:rPr b="0" sz="1300">
+              <a:rPr sz="1300" b="0">
                 <a:solidFill>
                   <a:srgbClr val="0F172A"/>
                 </a:solidFill>
@@ -8258,7 +8315,7 @@
               </a:spcAft>
             </a:pPr>
             <a:r>
-              <a:rPr b="1" sz="1300">
+              <a:rPr sz="1300" b="1">
                 <a:solidFill>
                   <a:srgbClr val="0F172A"/>
                 </a:solidFill>
@@ -8266,7 +8323,7 @@
               <a:t>• Fully Verified: </a:t>
             </a:r>
             <a:r>
-              <a:rPr b="0" sz="1300">
+              <a:rPr sz="1300" b="0">
                 <a:solidFill>
                   <a:srgbClr val="0F172A"/>
                 </a:solidFill>
@@ -8281,7 +8338,7 @@
               </a:spcAft>
             </a:pPr>
             <a:r>
-              <a:rPr b="1" sz="1300">
+              <a:rPr sz="1300" b="1">
                 <a:solidFill>
                   <a:srgbClr val="0F172A"/>
                 </a:solidFill>
@@ -8289,7 +8346,7 @@
               <a:t>• Ready for Evaluation: </a:t>
             </a:r>
             <a:r>
-              <a:rPr b="0" sz="1300">
+              <a:rPr sz="1300" b="0">
                 <a:solidFill>
                   <a:srgbClr val="0F172A"/>
                 </a:solidFill>
@@ -8307,7 +8364,7 @@
         </p:nvSpPr>
         <p:spPr>
           <a:xfrm>
-            <a:off x="6217920" y="1463040"/>
+            <a:off x="6217919" y="1205992"/>
             <a:ext cx="5242255" cy="4846320"/>
           </a:xfrm>
           <a:prstGeom prst="roundRect">
@@ -8341,6 +8398,7 @@
           <a:lstStyle/>
           <a:p>
             <a:pPr algn="ctr"/>
+            <a:endParaRPr/>
           </a:p>
         </p:txBody>
       </p:sp>
@@ -8387,7 +8445,7 @@
               </a:spcAft>
             </a:pPr>
             <a:r>
-              <a:rPr b="1" sz="1300">
+              <a:rPr sz="1300" b="1">
                 <a:solidFill>
                   <a:srgbClr val="0F172A"/>
                 </a:solidFill>
@@ -8395,7 +8453,7 @@
               <a:t>• TAC Optimization Passes: </a:t>
             </a:r>
             <a:r>
-              <a:rPr b="0" sz="1300">
+              <a:rPr sz="1300" b="0">
                 <a:solidFill>
                   <a:srgbClr val="0F172A"/>
                 </a:solidFill>
@@ -8410,7 +8468,7 @@
               </a:spcAft>
             </a:pPr>
             <a:r>
-              <a:rPr b="1" sz="1300">
+              <a:rPr sz="1300" b="1">
                 <a:solidFill>
                   <a:srgbClr val="0F172A"/>
                 </a:solidFill>
@@ -8418,7 +8476,7 @@
               <a:t>• Bytecode / Assembly Target: </a:t>
             </a:r>
             <a:r>
-              <a:rPr b="0" sz="1300">
+              <a:rPr sz="1300" b="0">
                 <a:solidFill>
                   <a:srgbClr val="0F172A"/>
                 </a:solidFill>
@@ -8433,7 +8491,7 @@
               </a:spcAft>
             </a:pPr>
             <a:r>
-              <a:rPr b="1" sz="1300">
+              <a:rPr sz="1300" b="1">
                 <a:solidFill>
                   <a:srgbClr val="0F172A"/>
                 </a:solidFill>
@@ -8441,7 +8499,7 @@
               <a:t>• User-Defined Functions &amp; Arrays: </a:t>
             </a:r>
             <a:r>
-              <a:rPr b="0" sz="1300">
+              <a:rPr sz="1300" b="0">
                 <a:solidFill>
                   <a:srgbClr val="0F172A"/>
                 </a:solidFill>
@@ -8456,7 +8514,7 @@
               </a:spcAft>
             </a:pPr>
             <a:r>
-              <a:rPr b="1" sz="1300">
+              <a:rPr sz="1300" b="1">
                 <a:solidFill>
                   <a:srgbClr val="0F172A"/>
                 </a:solidFill>
@@ -8464,7 +8522,7 @@
               <a:t>• Interactive Web Playground: </a:t>
             </a:r>
             <a:r>
-              <a:rPr b="0" sz="1300">
+              <a:rPr sz="1300" b="0">
                 <a:solidFill>
                   <a:srgbClr val="0F172A"/>
                 </a:solidFill>
@@ -8483,7 +8541,7 @@
 </file>
 
 <file path=ppt/slides/slide2.xml><?xml version="1.0" encoding="utf-8"?>
-<p:sld xmlns:a="http://schemas.openxmlformats.org/drawingml/2006/main" xmlns:p="http://schemas.openxmlformats.org/presentationml/2006/main" xmlns:r="http://schemas.openxmlformats.org/officeDocument/2006/relationships">
+<p:sld xmlns:a="http://schemas.openxmlformats.org/drawingml/2006/main" xmlns:r="http://schemas.openxmlformats.org/officeDocument/2006/relationships" xmlns:p="http://schemas.openxmlformats.org/presentationml/2006/main">
   <p:cSld>
     <p:spTree>
       <p:nvGrpSpPr>
@@ -8491,7 +8549,14 @@
         <p:cNvGrpSpPr/>
         <p:nvPr/>
       </p:nvGrpSpPr>
-      <p:grpSpPr/>
+      <p:grpSpPr>
+        <a:xfrm>
+          <a:off x="0" y="0"/>
+          <a:ext cx="0" cy="0"/>
+          <a:chOff x="0" y="0"/>
+          <a:chExt cx="0" cy="0"/>
+        </a:xfrm>
+      </p:grpSpPr>
       <p:sp>
         <p:nvSpPr>
           <p:cNvPr id="2" name="Rectangle 1"/>
@@ -8534,95 +8599,7 @@
           <a:lstStyle/>
           <a:p>
             <a:pPr algn="ctr"/>
-          </a:p>
-        </p:txBody>
-      </p:sp>
-      <p:sp>
-        <p:nvSpPr>
-          <p:cNvPr id="3" name="TextBox 2"/>
-          <p:cNvSpPr txBox="1"/>
-          <p:nvPr/>
-        </p:nvSpPr>
-        <p:spPr>
-          <a:xfrm>
-            <a:off x="731520" y="457200"/>
-            <a:ext cx="7315200" cy="274320"/>
-          </a:xfrm>
-          <a:prstGeom prst="rect">
-            <a:avLst/>
-          </a:prstGeom>
-          <a:noFill/>
-        </p:spPr>
-        <p:txBody>
-          <a:bodyPr wrap="square">
-            <a:spAutoFit/>
-          </a:bodyPr>
-          <a:lstStyle/>
-          <a:p>
-            <a:pPr>
-              <a:defRPr sz="1000" b="1">
-                <a:solidFill>
-                  <a:srgbClr val="2563EB"/>
-                </a:solidFill>
-              </a:defRPr>
-            </a:pPr>
-            <a:r>
-              <a:t>EDUSCRIPT COMPILER DESIGN • REVIEW 3</a:t>
-            </a:r>
-          </a:p>
-        </p:txBody>
-      </p:sp>
-      <p:sp>
-        <p:nvSpPr>
-          <p:cNvPr id="4" name="Rounded Rectangle 3"/>
-          <p:cNvSpPr/>
-          <p:nvPr/>
-        </p:nvSpPr>
-        <p:spPr>
-          <a:xfrm>
-            <a:off x="9326880" y="457200"/>
-            <a:ext cx="2133295" cy="320040"/>
-          </a:xfrm>
-          <a:prstGeom prst="roundRect">
-            <a:avLst/>
-          </a:prstGeom>
-          <a:solidFill>
-            <a:srgbClr val="ECFDF5"/>
-          </a:solidFill>
-          <a:ln>
-            <a:solidFill>
-              <a:srgbClr val="10B981"/>
-            </a:solidFill>
-          </a:ln>
-        </p:spPr>
-        <p:style>
-          <a:lnRef idx="1">
-            <a:schemeClr val="accent1"/>
-          </a:lnRef>
-          <a:fillRef idx="3">
-            <a:schemeClr val="accent1"/>
-          </a:fillRef>
-          <a:effectRef idx="2">
-            <a:schemeClr val="accent1"/>
-          </a:effectRef>
-          <a:fontRef idx="minor">
-            <a:schemeClr val="lt1"/>
-          </a:fontRef>
-        </p:style>
-        <p:txBody>
-          <a:bodyPr rtlCol="0" anchor="ctr"/>
-          <a:lstStyle/>
-          <a:p>
-            <a:pPr algn="ctr">
-              <a:defRPr sz="1000" b="1">
-                <a:solidFill>
-                  <a:srgbClr val="10B981"/>
-                </a:solidFill>
-              </a:defRPr>
-            </a:pPr>
-            <a:r>
-              <a:t>✓ 100% IMPLEMENTED</a:t>
-            </a:r>
+            <a:endParaRPr/>
           </a:p>
         </p:txBody>
       </p:sp>
@@ -8703,6 +8680,7 @@
           <a:lstStyle/>
           <a:p>
             <a:pPr algn="ctr"/>
+            <a:endParaRPr/>
           </a:p>
         </p:txBody>
       </p:sp>
@@ -8749,7 +8727,7 @@
               </a:spcAft>
             </a:pPr>
             <a:r>
-              <a:rPr b="1" sz="1300">
+              <a:rPr sz="1300" b="1">
                 <a:solidFill>
                   <a:srgbClr val="0F172A"/>
                 </a:solidFill>
@@ -8757,7 +8735,7 @@
               <a:t>1. Lexical Analysis (lexer.py): </a:t>
             </a:r>
             <a:r>
-              <a:rPr b="0" sz="1300">
+              <a:rPr sz="1300" b="0">
                 <a:solidFill>
                   <a:srgbClr val="0F172A"/>
                 </a:solidFill>
@@ -8772,7 +8750,7 @@
               </a:spcAft>
             </a:pPr>
             <a:r>
-              <a:rPr b="1" sz="1300">
+              <a:rPr sz="1300" b="1">
                 <a:solidFill>
                   <a:srgbClr val="0F172A"/>
                 </a:solidFill>
@@ -8780,7 +8758,7 @@
               <a:t>2. Syntax Analysis (parser.py): </a:t>
             </a:r>
             <a:r>
-              <a:rPr b="0" sz="1300">
+              <a:rPr sz="1300" b="0">
                 <a:solidFill>
                   <a:srgbClr val="0F172A"/>
                 </a:solidFill>
@@ -8795,7 +8773,7 @@
               </a:spcAft>
             </a:pPr>
             <a:r>
-              <a:rPr b="1" sz="1300">
+              <a:rPr sz="1300" b="1">
                 <a:solidFill>
                   <a:srgbClr val="0F172A"/>
                 </a:solidFill>
@@ -8803,7 +8781,7 @@
               <a:t>3. Semantic Analysis (semantic_analyzer.py): </a:t>
             </a:r>
             <a:r>
-              <a:rPr b="0" sz="1300">
+              <a:rPr sz="1300" b="0">
                 <a:solidFill>
                   <a:srgbClr val="0F172A"/>
                 </a:solidFill>
@@ -8818,7 +8796,7 @@
               </a:spcAft>
             </a:pPr>
             <a:r>
-              <a:rPr b="1" sz="1300">
+              <a:rPr sz="1300" b="1">
                 <a:solidFill>
                   <a:srgbClr val="0F172A"/>
                 </a:solidFill>
@@ -8826,7 +8804,7 @@
               <a:t>4. Intermediate Code (tac_generator.py): </a:t>
             </a:r>
             <a:r>
-              <a:rPr b="0" sz="1300">
+              <a:rPr sz="1300" b="0">
                 <a:solidFill>
                   <a:srgbClr val="0F172A"/>
                 </a:solidFill>
@@ -8841,7 +8819,7 @@
               </a:spcAft>
             </a:pPr>
             <a:r>
-              <a:rPr b="1" sz="1300">
+              <a:rPr sz="1300" b="1">
                 <a:solidFill>
                   <a:srgbClr val="0F172A"/>
                 </a:solidFill>
@@ -8849,7 +8827,7 @@
               <a:t>5. Execution Engine (interpreter.py): </a:t>
             </a:r>
             <a:r>
-              <a:rPr b="0" sz="1300">
+              <a:rPr sz="1300" b="0">
                 <a:solidFill>
                   <a:srgbClr val="0F172A"/>
                 </a:solidFill>
@@ -8901,6 +8879,7 @@
           <a:lstStyle/>
           <a:p>
             <a:pPr algn="ctr"/>
+            <a:endParaRPr/>
           </a:p>
         </p:txBody>
       </p:sp>
@@ -8947,7 +8926,7 @@
               </a:spcAft>
             </a:pPr>
             <a:r>
-              <a:rPr b="1" sz="1300">
+              <a:rPr sz="1300" b="1">
                 <a:solidFill>
                   <a:srgbClr val="0F172A"/>
                 </a:solidFill>
@@ -8955,7 +8934,7 @@
               <a:t>• 100% Implemented &amp; Tested: </a:t>
             </a:r>
             <a:r>
-              <a:rPr b="0" sz="1300">
+              <a:rPr sz="1300" b="0">
                 <a:solidFill>
                   <a:srgbClr val="0F172A"/>
                 </a:solidFill>
@@ -8970,7 +8949,7 @@
               </a:spcAft>
             </a:pPr>
             <a:r>
-              <a:rPr b="1" sz="1300">
+              <a:rPr sz="1300" b="1">
                 <a:solidFill>
                   <a:srgbClr val="0F172A"/>
                 </a:solidFill>
@@ -8978,7 +8957,7 @@
               <a:t>• Multilingual/Custom Keywords: </a:t>
             </a:r>
             <a:r>
-              <a:rPr b="0" sz="1300">
+              <a:rPr sz="1300" b="0">
                 <a:solidFill>
                   <a:srgbClr val="0F172A"/>
                 </a:solidFill>
@@ -8993,7 +8972,7 @@
               </a:spcAft>
             </a:pPr>
             <a:r>
-              <a:rPr b="1" sz="1300">
+              <a:rPr sz="1300" b="1">
                 <a:solidFill>
                   <a:srgbClr val="0F172A"/>
                 </a:solidFill>
@@ -9001,7 +8980,7 @@
               <a:t>• Comprehensive Test Suite: </a:t>
             </a:r>
             <a:r>
-              <a:rPr b="0" sz="1300">
+              <a:rPr sz="1300" b="0">
                 <a:solidFill>
                   <a:srgbClr val="0F172A"/>
                 </a:solidFill>
@@ -9016,7 +8995,7 @@
               </a:spcAft>
             </a:pPr>
             <a:r>
-              <a:rPr b="1" sz="1300">
+              <a:rPr sz="1300" b="1">
                 <a:solidFill>
                   <a:srgbClr val="0F172A"/>
                 </a:solidFill>
@@ -9024,7 +9003,7 @@
               <a:t>• Academic Transparency: </a:t>
             </a:r>
             <a:r>
-              <a:rPr b="0" sz="1300">
+              <a:rPr sz="1300" b="0">
                 <a:solidFill>
                   <a:srgbClr val="0F172A"/>
                 </a:solidFill>
@@ -9039,7 +9018,7 @@
               </a:spcAft>
             </a:pPr>
             <a:r>
-              <a:rPr b="1" sz="1300">
+              <a:rPr sz="1300" b="1">
                 <a:solidFill>
                   <a:srgbClr val="0F172A"/>
                 </a:solidFill>
@@ -9047,7 +9026,7 @@
               <a:t>• Zero External Dependencies: </a:t>
             </a:r>
             <a:r>
-              <a:rPr b="0" sz="1300">
+              <a:rPr sz="1300" b="0">
                 <a:solidFill>
                   <a:srgbClr val="0F172A"/>
                 </a:solidFill>
@@ -9066,7 +9045,7 @@
 </file>
 
 <file path=ppt/slides/slide3.xml><?xml version="1.0" encoding="utf-8"?>
-<p:sld xmlns:a="http://schemas.openxmlformats.org/drawingml/2006/main" xmlns:p="http://schemas.openxmlformats.org/presentationml/2006/main" xmlns:r="http://schemas.openxmlformats.org/officeDocument/2006/relationships">
+<p:sld xmlns:a="http://schemas.openxmlformats.org/drawingml/2006/main" xmlns:r="http://schemas.openxmlformats.org/officeDocument/2006/relationships" xmlns:p="http://schemas.openxmlformats.org/presentationml/2006/main">
   <p:cSld>
     <p:spTree>
       <p:nvGrpSpPr>
@@ -9074,7 +9053,14 @@
         <p:cNvGrpSpPr/>
         <p:nvPr/>
       </p:nvGrpSpPr>
-      <p:grpSpPr/>
+      <p:grpSpPr>
+        <a:xfrm>
+          <a:off x="0" y="0"/>
+          <a:ext cx="0" cy="0"/>
+          <a:chOff x="0" y="0"/>
+          <a:chExt cx="0" cy="0"/>
+        </a:xfrm>
+      </p:grpSpPr>
       <p:sp>
         <p:nvSpPr>
           <p:cNvPr id="2" name="Rectangle 1"/>
@@ -9117,95 +9103,7 @@
           <a:lstStyle/>
           <a:p>
             <a:pPr algn="ctr"/>
-          </a:p>
-        </p:txBody>
-      </p:sp>
-      <p:sp>
-        <p:nvSpPr>
-          <p:cNvPr id="3" name="TextBox 2"/>
-          <p:cNvSpPr txBox="1"/>
-          <p:nvPr/>
-        </p:nvSpPr>
-        <p:spPr>
-          <a:xfrm>
-            <a:off x="731520" y="457200"/>
-            <a:ext cx="7315200" cy="274320"/>
-          </a:xfrm>
-          <a:prstGeom prst="rect">
-            <a:avLst/>
-          </a:prstGeom>
-          <a:noFill/>
-        </p:spPr>
-        <p:txBody>
-          <a:bodyPr wrap="square">
-            <a:spAutoFit/>
-          </a:bodyPr>
-          <a:lstStyle/>
-          <a:p>
-            <a:pPr>
-              <a:defRPr sz="1000" b="1">
-                <a:solidFill>
-                  <a:srgbClr val="2563EB"/>
-                </a:solidFill>
-              </a:defRPr>
-            </a:pPr>
-            <a:r>
-              <a:t>EDUSCRIPT COMPILER DESIGN • REVIEW 3</a:t>
-            </a:r>
-          </a:p>
-        </p:txBody>
-      </p:sp>
-      <p:sp>
-        <p:nvSpPr>
-          <p:cNvPr id="4" name="Rounded Rectangle 3"/>
-          <p:cNvSpPr/>
-          <p:nvPr/>
-        </p:nvSpPr>
-        <p:spPr>
-          <a:xfrm>
-            <a:off x="9326880" y="457200"/>
-            <a:ext cx="2133295" cy="320040"/>
-          </a:xfrm>
-          <a:prstGeom prst="roundRect">
-            <a:avLst/>
-          </a:prstGeom>
-          <a:solidFill>
-            <a:srgbClr val="ECFDF5"/>
-          </a:solidFill>
-          <a:ln>
-            <a:solidFill>
-              <a:srgbClr val="10B981"/>
-            </a:solidFill>
-          </a:ln>
-        </p:spPr>
-        <p:style>
-          <a:lnRef idx="1">
-            <a:schemeClr val="accent1"/>
-          </a:lnRef>
-          <a:fillRef idx="3">
-            <a:schemeClr val="accent1"/>
-          </a:fillRef>
-          <a:effectRef idx="2">
-            <a:schemeClr val="accent1"/>
-          </a:effectRef>
-          <a:fontRef idx="minor">
-            <a:schemeClr val="lt1"/>
-          </a:fontRef>
-        </p:style>
-        <p:txBody>
-          <a:bodyPr rtlCol="0" anchor="ctr"/>
-          <a:lstStyle/>
-          <a:p>
-            <a:pPr algn="ctr">
-              <a:defRPr sz="1000" b="1">
-                <a:solidFill>
-                  <a:srgbClr val="10B981"/>
-                </a:solidFill>
-              </a:defRPr>
-            </a:pPr>
-            <a:r>
-              <a:t>✓ 100% IMPLEMENTED</a:t>
-            </a:r>
+            <a:endParaRPr/>
           </a:p>
         </p:txBody>
       </p:sp>
@@ -9286,49 +9184,7 @@
           <a:lstStyle/>
           <a:p>
             <a:pPr algn="ctr"/>
-          </a:p>
-        </p:txBody>
-      </p:sp>
-      <p:sp>
-        <p:nvSpPr>
-          <p:cNvPr id="7" name="Rectangle 6"/>
-          <p:cNvSpPr/>
-          <p:nvPr/>
-        </p:nvSpPr>
-        <p:spPr>
-          <a:xfrm>
-            <a:off x="731520" y="1463040"/>
-            <a:ext cx="2560320" cy="73152"/>
-          </a:xfrm>
-          <a:prstGeom prst="rect">
-            <a:avLst/>
-          </a:prstGeom>
-          <a:solidFill>
-            <a:srgbClr val="2563EB"/>
-          </a:solidFill>
-          <a:ln>
-            <a:noFill/>
-          </a:ln>
-        </p:spPr>
-        <p:style>
-          <a:lnRef idx="1">
-            <a:schemeClr val="accent1"/>
-          </a:lnRef>
-          <a:fillRef idx="3">
-            <a:schemeClr val="accent1"/>
-          </a:fillRef>
-          <a:effectRef idx="2">
-            <a:schemeClr val="accent1"/>
-          </a:effectRef>
-          <a:fontRef idx="minor">
-            <a:schemeClr val="lt1"/>
-          </a:fontRef>
-        </p:style>
-        <p:txBody>
-          <a:bodyPr rtlCol="0" anchor="ctr"/>
-          <a:lstStyle/>
-          <a:p>
-            <a:pPr algn="ctr"/>
+            <a:endParaRPr/>
           </a:p>
         </p:txBody>
       </p:sp>
@@ -9502,49 +9358,7 @@
           <a:lstStyle/>
           <a:p>
             <a:pPr algn="ctr"/>
-          </a:p>
-        </p:txBody>
-      </p:sp>
-      <p:sp>
-        <p:nvSpPr>
-          <p:cNvPr id="10" name="Rectangle 9"/>
-          <p:cNvSpPr/>
-          <p:nvPr/>
-        </p:nvSpPr>
-        <p:spPr>
-          <a:xfrm>
-            <a:off x="3456432" y="1463040"/>
-            <a:ext cx="2560320" cy="73152"/>
-          </a:xfrm>
-          <a:prstGeom prst="rect">
-            <a:avLst/>
-          </a:prstGeom>
-          <a:solidFill>
-            <a:srgbClr val="7C3AED"/>
-          </a:solidFill>
-          <a:ln>
-            <a:noFill/>
-          </a:ln>
-        </p:spPr>
-        <p:style>
-          <a:lnRef idx="1">
-            <a:schemeClr val="accent1"/>
-          </a:lnRef>
-          <a:fillRef idx="3">
-            <a:schemeClr val="accent1"/>
-          </a:fillRef>
-          <a:effectRef idx="2">
-            <a:schemeClr val="accent1"/>
-          </a:effectRef>
-          <a:fontRef idx="minor">
-            <a:schemeClr val="lt1"/>
-          </a:fontRef>
-        </p:style>
-        <p:txBody>
-          <a:bodyPr rtlCol="0" anchor="ctr"/>
-          <a:lstStyle/>
-          <a:p>
-            <a:pPr algn="ctr"/>
+            <a:endParaRPr/>
           </a:p>
         </p:txBody>
       </p:sp>
@@ -9718,49 +9532,7 @@
           <a:lstStyle/>
           <a:p>
             <a:pPr algn="ctr"/>
-          </a:p>
-        </p:txBody>
-      </p:sp>
-      <p:sp>
-        <p:nvSpPr>
-          <p:cNvPr id="13" name="Rectangle 12"/>
-          <p:cNvSpPr/>
-          <p:nvPr/>
-        </p:nvSpPr>
-        <p:spPr>
-          <a:xfrm>
-            <a:off x="6181344" y="1463040"/>
-            <a:ext cx="2560320" cy="73152"/>
-          </a:xfrm>
-          <a:prstGeom prst="rect">
-            <a:avLst/>
-          </a:prstGeom>
-          <a:solidFill>
-            <a:srgbClr val="EA580C"/>
-          </a:solidFill>
-          <a:ln>
-            <a:noFill/>
-          </a:ln>
-        </p:spPr>
-        <p:style>
-          <a:lnRef idx="1">
-            <a:schemeClr val="accent1"/>
-          </a:lnRef>
-          <a:fillRef idx="3">
-            <a:schemeClr val="accent1"/>
-          </a:fillRef>
-          <a:effectRef idx="2">
-            <a:schemeClr val="accent1"/>
-          </a:effectRef>
-          <a:fontRef idx="minor">
-            <a:schemeClr val="lt1"/>
-          </a:fontRef>
-        </p:style>
-        <p:txBody>
-          <a:bodyPr rtlCol="0" anchor="ctr"/>
-          <a:lstStyle/>
-          <a:p>
-            <a:pPr algn="ctr"/>
+            <a:endParaRPr/>
           </a:p>
         </p:txBody>
       </p:sp>
@@ -9934,49 +9706,7 @@
           <a:lstStyle/>
           <a:p>
             <a:pPr algn="ctr"/>
-          </a:p>
-        </p:txBody>
-      </p:sp>
-      <p:sp>
-        <p:nvSpPr>
-          <p:cNvPr id="16" name="Rectangle 15"/>
-          <p:cNvSpPr/>
-          <p:nvPr/>
-        </p:nvSpPr>
-        <p:spPr>
-          <a:xfrm>
-            <a:off x="8906256" y="1463040"/>
-            <a:ext cx="2560320" cy="73152"/>
-          </a:xfrm>
-          <a:prstGeom prst="rect">
-            <a:avLst/>
-          </a:prstGeom>
-          <a:solidFill>
-            <a:srgbClr val="10B981"/>
-          </a:solidFill>
-          <a:ln>
-            <a:noFill/>
-          </a:ln>
-        </p:spPr>
-        <p:style>
-          <a:lnRef idx="1">
-            <a:schemeClr val="accent1"/>
-          </a:lnRef>
-          <a:fillRef idx="3">
-            <a:schemeClr val="accent1"/>
-          </a:fillRef>
-          <a:effectRef idx="2">
-            <a:schemeClr val="accent1"/>
-          </a:effectRef>
-          <a:fontRef idx="minor">
-            <a:schemeClr val="lt1"/>
-          </a:fontRef>
-        </p:style>
-        <p:txBody>
-          <a:bodyPr rtlCol="0" anchor="ctr"/>
-          <a:lstStyle/>
-          <a:p>
-            <a:pPr algn="ctr"/>
+            <a:endParaRPr/>
           </a:p>
         </p:txBody>
       </p:sp>
@@ -10117,7 +9847,7 @@
 </file>
 
 <file path=ppt/slides/slide4.xml><?xml version="1.0" encoding="utf-8"?>
-<p:sld xmlns:a="http://schemas.openxmlformats.org/drawingml/2006/main" xmlns:p="http://schemas.openxmlformats.org/presentationml/2006/main" xmlns:r="http://schemas.openxmlformats.org/officeDocument/2006/relationships">
+<p:sld xmlns:a="http://schemas.openxmlformats.org/drawingml/2006/main" xmlns:r="http://schemas.openxmlformats.org/officeDocument/2006/relationships" xmlns:p="http://schemas.openxmlformats.org/presentationml/2006/main">
   <p:cSld>
     <p:spTree>
       <p:nvGrpSpPr>
@@ -10125,7 +9855,14 @@
         <p:cNvGrpSpPr/>
         <p:nvPr/>
       </p:nvGrpSpPr>
-      <p:grpSpPr/>
+      <p:grpSpPr>
+        <a:xfrm>
+          <a:off x="0" y="0"/>
+          <a:ext cx="0" cy="0"/>
+          <a:chOff x="0" y="0"/>
+          <a:chExt cx="0" cy="0"/>
+        </a:xfrm>
+      </p:grpSpPr>
       <p:sp>
         <p:nvSpPr>
           <p:cNvPr id="2" name="Rectangle 1"/>
@@ -10168,19 +9905,20 @@
           <a:lstStyle/>
           <a:p>
             <a:pPr algn="ctr"/>
-          </a:p>
-        </p:txBody>
-      </p:sp>
-      <p:sp>
-        <p:nvSpPr>
-          <p:cNvPr id="3" name="TextBox 2"/>
+            <a:endParaRPr/>
+          </a:p>
+        </p:txBody>
+      </p:sp>
+      <p:sp>
+        <p:nvSpPr>
+          <p:cNvPr id="5" name="TextBox 4"/>
           <p:cNvSpPr txBox="1"/>
           <p:nvPr/>
         </p:nvSpPr>
         <p:spPr>
           <a:xfrm>
-            <a:off x="731520" y="457200"/>
-            <a:ext cx="7315200" cy="274320"/>
+            <a:off x="731520" y="601472"/>
+            <a:ext cx="10728655" cy="594360"/>
           </a:xfrm>
           <a:prstGeom prst="rect">
             <a:avLst/>
@@ -10194,102 +9932,14 @@
           <a:lstStyle/>
           <a:p>
             <a:pPr>
-              <a:defRPr sz="1000" b="1">
-                <a:solidFill>
-                  <a:srgbClr val="2563EB"/>
+              <a:defRPr sz="2200" b="1">
+                <a:solidFill>
+                  <a:srgbClr val="0F172A"/>
                 </a:solidFill>
               </a:defRPr>
             </a:pPr>
             <a:r>
-              <a:t>EDUSCRIPT COMPILER DESIGN • REVIEW 3</a:t>
-            </a:r>
-          </a:p>
-        </p:txBody>
-      </p:sp>
-      <p:sp>
-        <p:nvSpPr>
-          <p:cNvPr id="4" name="Rounded Rectangle 3"/>
-          <p:cNvSpPr/>
-          <p:nvPr/>
-        </p:nvSpPr>
-        <p:spPr>
-          <a:xfrm>
-            <a:off x="9326880" y="457200"/>
-            <a:ext cx="2133295" cy="320040"/>
-          </a:xfrm>
-          <a:prstGeom prst="roundRect">
-            <a:avLst/>
-          </a:prstGeom>
-          <a:solidFill>
-            <a:srgbClr val="ECFDF5"/>
-          </a:solidFill>
-          <a:ln>
-            <a:solidFill>
-              <a:srgbClr val="10B981"/>
-            </a:solidFill>
-          </a:ln>
-        </p:spPr>
-        <p:style>
-          <a:lnRef idx="1">
-            <a:schemeClr val="accent1"/>
-          </a:lnRef>
-          <a:fillRef idx="3">
-            <a:schemeClr val="accent1"/>
-          </a:fillRef>
-          <a:effectRef idx="2">
-            <a:schemeClr val="accent1"/>
-          </a:effectRef>
-          <a:fontRef idx="minor">
-            <a:schemeClr val="lt1"/>
-          </a:fontRef>
-        </p:style>
-        <p:txBody>
-          <a:bodyPr rtlCol="0" anchor="ctr"/>
-          <a:lstStyle/>
-          <a:p>
-            <a:pPr algn="ctr">
-              <a:defRPr sz="1000" b="1">
-                <a:solidFill>
-                  <a:srgbClr val="10B981"/>
-                </a:solidFill>
-              </a:defRPr>
-            </a:pPr>
-            <a:r>
-              <a:t>✓ 100% IMPLEMENTED</a:t>
-            </a:r>
-          </a:p>
-        </p:txBody>
-      </p:sp>
-      <p:sp>
-        <p:nvSpPr>
-          <p:cNvPr id="5" name="TextBox 4"/>
-          <p:cNvSpPr txBox="1"/>
-          <p:nvPr/>
-        </p:nvSpPr>
-        <p:spPr>
-          <a:xfrm>
-            <a:off x="731520" y="713232"/>
-            <a:ext cx="10728655" cy="594360"/>
-          </a:xfrm>
-          <a:prstGeom prst="rect">
-            <a:avLst/>
-          </a:prstGeom>
-          <a:noFill/>
-        </p:spPr>
-        <p:txBody>
-          <a:bodyPr wrap="square">
-            <a:spAutoFit/>
-          </a:bodyPr>
-          <a:lstStyle/>
-          <a:p>
-            <a:pPr>
-              <a:defRPr sz="2200" b="1">
-                <a:solidFill>
-                  <a:srgbClr val="0F172A"/>
-                </a:solidFill>
-              </a:defRPr>
-            </a:pPr>
-            <a:r>
+              <a:rPr dirty="0"/>
               <a:t>Phase 1: Lexical Analysis &amp; Custom Keyword Normalization</a:t>
             </a:r>
           </a:p>
@@ -10303,7 +9953,7 @@
         </p:nvSpPr>
         <p:spPr>
           <a:xfrm>
-            <a:off x="731520" y="1463040"/>
+            <a:off x="731520" y="1287272"/>
             <a:ext cx="4754880" cy="4846320"/>
           </a:xfrm>
           <a:prstGeom prst="roundRect">
@@ -10337,6 +9987,7 @@
           <a:lstStyle/>
           <a:p>
             <a:pPr algn="ctr"/>
+            <a:endParaRPr/>
           </a:p>
         </p:txBody>
       </p:sp>
@@ -10348,7 +9999,7 @@
         </p:nvSpPr>
         <p:spPr>
           <a:xfrm>
-            <a:off x="914400" y="1600200"/>
+            <a:off x="914400" y="1884680"/>
             <a:ext cx="4389120" cy="4572000"/>
           </a:xfrm>
           <a:prstGeom prst="rect">
@@ -10373,7 +10024,12 @@
               </a:defRPr>
             </a:pPr>
             <a:r>
-              <a:t>Lexer Design &amp; Keyword Normalization</a:t>
+              <a:rPr dirty="0" err="1"/>
+              <a:t>Lexer</a:t>
+            </a:r>
+            <a:r>
+              <a:rPr dirty="0"/>
+              <a:t> Design &amp; Keyword Normalization</a:t>
             </a:r>
           </a:p>
           <a:p>
@@ -10383,20 +10039,68 @@
               </a:spcAft>
             </a:pPr>
             <a:r>
-              <a:rPr b="1" sz="1300">
-                <a:solidFill>
-                  <a:srgbClr val="0F172A"/>
-                </a:solidFill>
-              </a:rPr>
-              <a:t>• Data-Driven Lexer (lexer.py): </a:t>
-            </a:r>
-            <a:r>
-              <a:rPr b="0" sz="1300">
-                <a:solidFill>
-                  <a:srgbClr val="0F172A"/>
-                </a:solidFill>
-              </a:rPr>
-              <a:t>Loads token specifications from default_tokens.json and keyword aliases from keyword_mapping.json.</a:t>
+              <a:rPr sz="1300" b="1" dirty="0">
+                <a:solidFill>
+                  <a:srgbClr val="0F172A"/>
+                </a:solidFill>
+              </a:rPr>
+              <a:t>• Data-Driven </a:t>
+            </a:r>
+            <a:r>
+              <a:rPr sz="1300" b="1" dirty="0" err="1">
+                <a:solidFill>
+                  <a:srgbClr val="0F172A"/>
+                </a:solidFill>
+              </a:rPr>
+              <a:t>Lexer</a:t>
+            </a:r>
+            <a:r>
+              <a:rPr sz="1300" b="1" dirty="0">
+                <a:solidFill>
+                  <a:srgbClr val="0F172A"/>
+                </a:solidFill>
+              </a:rPr>
+              <a:t> (lexer.py): </a:t>
+            </a:r>
+            <a:r>
+              <a:rPr sz="1300" b="0" dirty="0">
+                <a:solidFill>
+                  <a:srgbClr val="0F172A"/>
+                </a:solidFill>
+              </a:rPr>
+              <a:t>Loads token specifications from </a:t>
+            </a:r>
+            <a:r>
+              <a:rPr sz="1300" b="0" dirty="0" err="1">
+                <a:solidFill>
+                  <a:srgbClr val="0F172A"/>
+                </a:solidFill>
+              </a:rPr>
+              <a:t>default_tokens.json</a:t>
+            </a:r>
+            <a:r>
+              <a:rPr sz="1300" b="0" dirty="0">
+                <a:solidFill>
+                  <a:srgbClr val="0F172A"/>
+                </a:solidFill>
+              </a:rPr>
+              <a:t> and keyword aliases from </a:t>
+            </a:r>
+            <a:r>
+              <a:rPr sz="1300" b="0" dirty="0" err="1">
+                <a:solidFill>
+                  <a:srgbClr val="0F172A"/>
+                </a:solidFill>
+              </a:rPr>
+              <a:t>keyword_mapping.json</a:t>
+            </a:r>
+            <a:r>
+              <a:rPr sz="1300" b="0" dirty="0">
+                <a:solidFill>
+                  <a:srgbClr val="0F172A"/>
+                </a:solidFill>
+              </a:rPr>
+              <a:t>.</a:t>
             </a:r>
           </a:p>
           <a:p>
@@ -10406,7 +10110,7 @@
               </a:spcAft>
             </a:pPr>
             <a:r>
-              <a:rPr b="1" sz="1300">
+              <a:rPr sz="1300" b="1" dirty="0">
                 <a:solidFill>
                   <a:srgbClr val="0F172A"/>
                 </a:solidFill>
@@ -10414,12 +10118,60 @@
               <a:t>• Transparent Normalization: </a:t>
             </a:r>
             <a:r>
-              <a:rPr b="0" sz="1300">
-                <a:solidFill>
-                  <a:srgbClr val="0F172A"/>
-                </a:solidFill>
-              </a:rPr>
-              <a:t>Custom words (purnaank, jabtak, agar) are converted into canonical tokens (int, while, if) while preserving original lexemes.</a:t>
+              <a:rPr sz="1300" b="0" dirty="0">
+                <a:solidFill>
+                  <a:srgbClr val="0F172A"/>
+                </a:solidFill>
+              </a:rPr>
+              <a:t>Custom words (</a:t>
+            </a:r>
+            <a:r>
+              <a:rPr sz="1300" b="0" dirty="0" err="1">
+                <a:solidFill>
+                  <a:srgbClr val="0F172A"/>
+                </a:solidFill>
+              </a:rPr>
+              <a:t>purnaank</a:t>
+            </a:r>
+            <a:r>
+              <a:rPr sz="1300" b="0" dirty="0">
+                <a:solidFill>
+                  <a:srgbClr val="0F172A"/>
+                </a:solidFill>
+              </a:rPr>
+              <a:t>, </a:t>
+            </a:r>
+            <a:r>
+              <a:rPr sz="1300" b="0" dirty="0" err="1">
+                <a:solidFill>
+                  <a:srgbClr val="0F172A"/>
+                </a:solidFill>
+              </a:rPr>
+              <a:t>jabtak</a:t>
+            </a:r>
+            <a:r>
+              <a:rPr sz="1300" b="0" dirty="0">
+                <a:solidFill>
+                  <a:srgbClr val="0F172A"/>
+                </a:solidFill>
+              </a:rPr>
+              <a:t>, agar) are converted into canonical tokens (</a:t>
+            </a:r>
+            <a:r>
+              <a:rPr sz="1300" b="0" dirty="0" err="1">
+                <a:solidFill>
+                  <a:srgbClr val="0F172A"/>
+                </a:solidFill>
+              </a:rPr>
+              <a:t>int</a:t>
+            </a:r>
+            <a:r>
+              <a:rPr sz="1300" b="0" dirty="0">
+                <a:solidFill>
+                  <a:srgbClr val="0F172A"/>
+                </a:solidFill>
+              </a:rPr>
+              <a:t>, while, if) while preserving original lexemes.</a:t>
             </a:r>
           </a:p>
           <a:p>
@@ -10429,7 +10181,7 @@
               </a:spcAft>
             </a:pPr>
             <a:r>
-              <a:rPr b="1" sz="1300">
+              <a:rPr sz="1300" b="1" dirty="0">
                 <a:solidFill>
                   <a:srgbClr val="0F172A"/>
                 </a:solidFill>
@@ -10437,7 +10189,7 @@
               <a:t>• Longest-Match Operators: </a:t>
             </a:r>
             <a:r>
-              <a:rPr b="0" sz="1300">
+              <a:rPr sz="1300" b="0" dirty="0">
                 <a:solidFill>
                   <a:srgbClr val="0F172A"/>
                 </a:solidFill>
@@ -10452,7 +10204,7 @@
               </a:spcAft>
             </a:pPr>
             <a:r>
-              <a:rPr b="1" sz="1300">
+              <a:rPr sz="1300" b="1" dirty="0">
                 <a:solidFill>
                   <a:srgbClr val="0F172A"/>
                 </a:solidFill>
@@ -10460,7 +10212,7 @@
               <a:t>• Position Tracking: </a:t>
             </a:r>
             <a:r>
-              <a:rPr b="0" sz="1300">
+              <a:rPr sz="1300" b="0" dirty="0">
                 <a:solidFill>
                   <a:srgbClr val="0F172A"/>
                 </a:solidFill>
@@ -10478,7 +10230,7 @@
         </p:nvSpPr>
         <p:spPr>
           <a:xfrm>
-            <a:off x="5669280" y="1463040"/>
+            <a:off x="5669279" y="1195832"/>
             <a:ext cx="5790895" cy="4846320"/>
           </a:xfrm>
           <a:prstGeom prst="roundRect">
@@ -10512,31 +10264,72 @@
           <a:lstStyle/>
           <a:p>
             <a:pPr algn="ctr"/>
+            <a:endParaRPr/>
           </a:p>
         </p:txBody>
       </p:sp>
       <p:pic>
         <p:nvPicPr>
-          <p:cNvPr id="9" name="Picture 8" descr="03_phase1_tokens.png"/>
+          <p:cNvPr id="9218" name="Picture 2"/>
           <p:cNvPicPr>
-            <a:picLocks noChangeAspect="1"/>
+            <a:picLocks noChangeAspect="1" noChangeArrowheads="1"/>
           </p:cNvPicPr>
           <p:nvPr/>
         </p:nvPicPr>
         <p:blipFill>
-          <a:blip r:embed="rId2"/>
+          <a:blip r:embed="rId2">
+            <a:extLst>
+              <a:ext uri="{28A0092B-C50C-407E-A947-70E740481C1C}">
+                <a14:useLocalDpi xmlns:a14="http://schemas.microsoft.com/office/drawing/2010/main" val="0"/>
+              </a:ext>
+            </a:extLst>
+          </a:blip>
+          <a:srcRect/>
           <a:stretch>
             <a:fillRect/>
           </a:stretch>
         </p:blipFill>
-        <p:spPr>
-          <a:xfrm>
-            <a:off x="5806440" y="1600200"/>
-            <a:ext cx="5516575" cy="5626176"/>
+        <p:spPr bwMode="auto">
+          <a:xfrm>
+            <a:off x="6165037" y="1292417"/>
+            <a:ext cx="4799377" cy="4653149"/>
           </a:xfrm>
           <a:prstGeom prst="rect">
             <a:avLst/>
           </a:prstGeom>
+          <a:noFill/>
+          <a:ln>
+            <a:noFill/>
+          </a:ln>
+          <a:effectLst/>
+          <a:extLst>
+            <a:ext uri="{909E8E84-426E-40DD-AFC4-6F175D3DCCD1}">
+              <a14:hiddenFill xmlns:a14="http://schemas.microsoft.com/office/drawing/2010/main">
+                <a:solidFill>
+                  <a:schemeClr val="accent1"/>
+                </a:solidFill>
+              </a14:hiddenFill>
+            </a:ext>
+            <a:ext uri="{91240B29-F687-4F45-9708-019B960494DF}">
+              <a14:hiddenLine xmlns:a14="http://schemas.microsoft.com/office/drawing/2010/main" w="9525">
+                <a:solidFill>
+                  <a:schemeClr val="tx1"/>
+                </a:solidFill>
+                <a:miter lim="800000"/>
+                <a:headEnd/>
+                <a:tailEnd/>
+              </a14:hiddenLine>
+            </a:ext>
+            <a:ext uri="{AF507438-7753-43E0-B8FC-AC1667EBCBE1}">
+              <a14:hiddenEffects xmlns:a14="http://schemas.microsoft.com/office/drawing/2010/main">
+                <a:effectLst>
+                  <a:outerShdw dist="35921" dir="2700000" algn="ctr" rotWithShape="0">
+                    <a:schemeClr val="bg2"/>
+                  </a:outerShdw>
+                </a:effectLst>
+              </a14:hiddenEffects>
+            </a:ext>
+          </a:extLst>
         </p:spPr>
       </p:pic>
     </p:spTree>
@@ -10548,7 +10341,7 @@
 </file>
 
 <file path=ppt/slides/slide5.xml><?xml version="1.0" encoding="utf-8"?>
-<p:sld xmlns:a="http://schemas.openxmlformats.org/drawingml/2006/main" xmlns:p="http://schemas.openxmlformats.org/presentationml/2006/main" xmlns:r="http://schemas.openxmlformats.org/officeDocument/2006/relationships">
+<p:sld xmlns:a="http://schemas.openxmlformats.org/drawingml/2006/main" xmlns:r="http://schemas.openxmlformats.org/officeDocument/2006/relationships" xmlns:p="http://schemas.openxmlformats.org/presentationml/2006/main">
   <p:cSld>
     <p:spTree>
       <p:nvGrpSpPr>
@@ -10556,7 +10349,14 @@
         <p:cNvGrpSpPr/>
         <p:nvPr/>
       </p:nvGrpSpPr>
-      <p:grpSpPr/>
+      <p:grpSpPr>
+        <a:xfrm>
+          <a:off x="0" y="0"/>
+          <a:ext cx="0" cy="0"/>
+          <a:chOff x="0" y="0"/>
+          <a:chExt cx="0" cy="0"/>
+        </a:xfrm>
+      </p:grpSpPr>
       <p:sp>
         <p:nvSpPr>
           <p:cNvPr id="2" name="Rectangle 1"/>
@@ -10599,19 +10399,20 @@
           <a:lstStyle/>
           <a:p>
             <a:pPr algn="ctr"/>
-          </a:p>
-        </p:txBody>
-      </p:sp>
-      <p:sp>
-        <p:nvSpPr>
-          <p:cNvPr id="3" name="TextBox 2"/>
+            <a:endParaRPr/>
+          </a:p>
+        </p:txBody>
+      </p:sp>
+      <p:sp>
+        <p:nvSpPr>
+          <p:cNvPr id="5" name="TextBox 4"/>
           <p:cNvSpPr txBox="1"/>
           <p:nvPr/>
         </p:nvSpPr>
         <p:spPr>
           <a:xfrm>
-            <a:off x="731520" y="457200"/>
-            <a:ext cx="7315200" cy="274320"/>
+            <a:off x="731520" y="540512"/>
+            <a:ext cx="10728655" cy="594360"/>
           </a:xfrm>
           <a:prstGeom prst="rect">
             <a:avLst/>
@@ -10625,102 +10426,14 @@
           <a:lstStyle/>
           <a:p>
             <a:pPr>
-              <a:defRPr sz="1000" b="1">
-                <a:solidFill>
-                  <a:srgbClr val="2563EB"/>
+              <a:defRPr sz="2200" b="1">
+                <a:solidFill>
+                  <a:srgbClr val="0F172A"/>
                 </a:solidFill>
               </a:defRPr>
             </a:pPr>
             <a:r>
-              <a:t>EDUSCRIPT COMPILER DESIGN • REVIEW 3</a:t>
-            </a:r>
-          </a:p>
-        </p:txBody>
-      </p:sp>
-      <p:sp>
-        <p:nvSpPr>
-          <p:cNvPr id="4" name="Rounded Rectangle 3"/>
-          <p:cNvSpPr/>
-          <p:nvPr/>
-        </p:nvSpPr>
-        <p:spPr>
-          <a:xfrm>
-            <a:off x="9326880" y="457200"/>
-            <a:ext cx="2133295" cy="320040"/>
-          </a:xfrm>
-          <a:prstGeom prst="roundRect">
-            <a:avLst/>
-          </a:prstGeom>
-          <a:solidFill>
-            <a:srgbClr val="ECFDF5"/>
-          </a:solidFill>
-          <a:ln>
-            <a:solidFill>
-              <a:srgbClr val="10B981"/>
-            </a:solidFill>
-          </a:ln>
-        </p:spPr>
-        <p:style>
-          <a:lnRef idx="1">
-            <a:schemeClr val="accent1"/>
-          </a:lnRef>
-          <a:fillRef idx="3">
-            <a:schemeClr val="accent1"/>
-          </a:fillRef>
-          <a:effectRef idx="2">
-            <a:schemeClr val="accent1"/>
-          </a:effectRef>
-          <a:fontRef idx="minor">
-            <a:schemeClr val="lt1"/>
-          </a:fontRef>
-        </p:style>
-        <p:txBody>
-          <a:bodyPr rtlCol="0" anchor="ctr"/>
-          <a:lstStyle/>
-          <a:p>
-            <a:pPr algn="ctr">
-              <a:defRPr sz="1000" b="1">
-                <a:solidFill>
-                  <a:srgbClr val="10B981"/>
-                </a:solidFill>
-              </a:defRPr>
-            </a:pPr>
-            <a:r>
-              <a:t>✓ 100% IMPLEMENTED</a:t>
-            </a:r>
-          </a:p>
-        </p:txBody>
-      </p:sp>
-      <p:sp>
-        <p:nvSpPr>
-          <p:cNvPr id="5" name="TextBox 4"/>
-          <p:cNvSpPr txBox="1"/>
-          <p:nvPr/>
-        </p:nvSpPr>
-        <p:spPr>
-          <a:xfrm>
-            <a:off x="731520" y="713232"/>
-            <a:ext cx="10728655" cy="594360"/>
-          </a:xfrm>
-          <a:prstGeom prst="rect">
-            <a:avLst/>
-          </a:prstGeom>
-          <a:noFill/>
-        </p:spPr>
-        <p:txBody>
-          <a:bodyPr wrap="square">
-            <a:spAutoFit/>
-          </a:bodyPr>
-          <a:lstStyle/>
-          <a:p>
-            <a:pPr>
-              <a:defRPr sz="2200" b="1">
-                <a:solidFill>
-                  <a:srgbClr val="0F172A"/>
-                </a:solidFill>
-              </a:defRPr>
-            </a:pPr>
-            <a:r>
+              <a:rPr dirty="0"/>
               <a:t>Phase 2: Syntax Analysis &amp; Abstract Syntax Tree (AST)</a:t>
             </a:r>
           </a:p>
@@ -10768,6 +10481,7 @@
           <a:lstStyle/>
           <a:p>
             <a:pPr algn="ctr"/>
+            <a:endParaRPr/>
           </a:p>
         </p:txBody>
       </p:sp>
@@ -10779,7 +10493,7 @@
         </p:nvSpPr>
         <p:spPr>
           <a:xfrm>
-            <a:off x="914400" y="1600200"/>
+            <a:off x="914400" y="1986280"/>
             <a:ext cx="4389120" cy="4572000"/>
           </a:xfrm>
           <a:prstGeom prst="rect">
@@ -10804,6 +10518,7 @@
               </a:defRPr>
             </a:pPr>
             <a:r>
+              <a:rPr dirty="0"/>
               <a:t>Recursive Descent Parser (parser.py)</a:t>
             </a:r>
           </a:p>
@@ -10814,7 +10529,7 @@
               </a:spcAft>
             </a:pPr>
             <a:r>
-              <a:rPr b="1" sz="1300">
+              <a:rPr sz="1300" b="1" dirty="0">
                 <a:solidFill>
                   <a:srgbClr val="0F172A"/>
                 </a:solidFill>
@@ -10822,7 +10537,7 @@
               <a:t>• Precedence Climbing: </a:t>
             </a:r>
             <a:r>
-              <a:rPr b="0" sz="1300">
+              <a:rPr sz="1300" b="0" dirty="0">
                 <a:solidFill>
                   <a:srgbClr val="0F172A"/>
                 </a:solidFill>
@@ -10837,7 +10552,7 @@
               </a:spcAft>
             </a:pPr>
             <a:r>
-              <a:rPr b="1" sz="1300">
+              <a:rPr sz="1300" b="1" dirty="0">
                 <a:solidFill>
                   <a:srgbClr val="0F172A"/>
                 </a:solidFill>
@@ -10845,12 +10560,108 @@
               <a:t>• Modular AST Nodes (ast_nodes.py): </a:t>
             </a:r>
             <a:r>
-              <a:rPr b="0" sz="1300">
-                <a:solidFill>
-                  <a:srgbClr val="0F172A"/>
-                </a:solidFill>
-              </a:rPr>
-              <a:t>Strongly-typed nodes for Program, VarDecl, IfStmt, WhileStmt, ForStmt, BinaryExpr, AssignExpr, etc.</a:t>
+              <a:rPr sz="1300" b="0" dirty="0">
+                <a:solidFill>
+                  <a:srgbClr val="0F172A"/>
+                </a:solidFill>
+              </a:rPr>
+              <a:t>Strongly-typed nodes for Program, </a:t>
+            </a:r>
+            <a:r>
+              <a:rPr sz="1300" b="0" dirty="0" err="1">
+                <a:solidFill>
+                  <a:srgbClr val="0F172A"/>
+                </a:solidFill>
+              </a:rPr>
+              <a:t>VarDecl</a:t>
+            </a:r>
+            <a:r>
+              <a:rPr sz="1300" b="0" dirty="0">
+                <a:solidFill>
+                  <a:srgbClr val="0F172A"/>
+                </a:solidFill>
+              </a:rPr>
+              <a:t>, </a:t>
+            </a:r>
+            <a:r>
+              <a:rPr sz="1300" b="0" dirty="0" err="1">
+                <a:solidFill>
+                  <a:srgbClr val="0F172A"/>
+                </a:solidFill>
+              </a:rPr>
+              <a:t>IfStmt</a:t>
+            </a:r>
+            <a:r>
+              <a:rPr sz="1300" b="0" dirty="0">
+                <a:solidFill>
+                  <a:srgbClr val="0F172A"/>
+                </a:solidFill>
+              </a:rPr>
+              <a:t>, </a:t>
+            </a:r>
+            <a:r>
+              <a:rPr sz="1300" b="0" dirty="0" err="1">
+                <a:solidFill>
+                  <a:srgbClr val="0F172A"/>
+                </a:solidFill>
+              </a:rPr>
+              <a:t>WhileStmt</a:t>
+            </a:r>
+            <a:r>
+              <a:rPr sz="1300" b="0" dirty="0">
+                <a:solidFill>
+                  <a:srgbClr val="0F172A"/>
+                </a:solidFill>
+              </a:rPr>
+              <a:t>, </a:t>
+            </a:r>
+            <a:r>
+              <a:rPr sz="1300" b="0" dirty="0" err="1">
+                <a:solidFill>
+                  <a:srgbClr val="0F172A"/>
+                </a:solidFill>
+              </a:rPr>
+              <a:t>ForStmt</a:t>
+            </a:r>
+            <a:r>
+              <a:rPr sz="1300" b="0" dirty="0">
+                <a:solidFill>
+                  <a:srgbClr val="0F172A"/>
+                </a:solidFill>
+              </a:rPr>
+              <a:t>, </a:t>
+            </a:r>
+            <a:r>
+              <a:rPr sz="1300" b="0" dirty="0" err="1">
+                <a:solidFill>
+                  <a:srgbClr val="0F172A"/>
+                </a:solidFill>
+              </a:rPr>
+              <a:t>BinaryExpr</a:t>
+            </a:r>
+            <a:r>
+              <a:rPr sz="1300" b="0" dirty="0">
+                <a:solidFill>
+                  <a:srgbClr val="0F172A"/>
+                </a:solidFill>
+              </a:rPr>
+              <a:t>, </a:t>
+            </a:r>
+            <a:r>
+              <a:rPr sz="1300" b="0" dirty="0" err="1">
+                <a:solidFill>
+                  <a:srgbClr val="0F172A"/>
+                </a:solidFill>
+              </a:rPr>
+              <a:t>AssignExpr</a:t>
+            </a:r>
+            <a:r>
+              <a:rPr sz="1300" b="0" dirty="0">
+                <a:solidFill>
+                  <a:srgbClr val="0F172A"/>
+                </a:solidFill>
+              </a:rPr>
+              <a:t>, etc.</a:t>
             </a:r>
           </a:p>
           <a:p>
@@ -10860,7 +10671,7 @@
               </a:spcAft>
             </a:pPr>
             <a:r>
-              <a:rPr b="1" sz="1300">
+              <a:rPr sz="1300" b="1" dirty="0">
                 <a:solidFill>
                   <a:srgbClr val="0F172A"/>
                 </a:solidFill>
@@ -10868,7 +10679,7 @@
               <a:t>• Visitor Pattern Support: </a:t>
             </a:r>
             <a:r>
-              <a:rPr b="0" sz="1300">
+              <a:rPr sz="1300" b="0" dirty="0">
                 <a:solidFill>
                   <a:srgbClr val="0F172A"/>
                 </a:solidFill>
@@ -10883,7 +10694,7 @@
               </a:spcAft>
             </a:pPr>
             <a:r>
-              <a:rPr b="1" sz="1300">
+              <a:rPr sz="1300" b="1" dirty="0">
                 <a:solidFill>
                   <a:srgbClr val="0F172A"/>
                 </a:solidFill>
@@ -10891,7 +10702,7 @@
               <a:t>• Panic-Mode Recovery: </a:t>
             </a:r>
             <a:r>
-              <a:rPr b="0" sz="1300">
+              <a:rPr sz="1300" b="0" dirty="0">
                 <a:solidFill>
                   <a:srgbClr val="0F172A"/>
                 </a:solidFill>
@@ -10909,8 +10720,8 @@
         </p:nvSpPr>
         <p:spPr>
           <a:xfrm>
-            <a:off x="5669280" y="1463040"/>
-            <a:ext cx="5790895" cy="4846320"/>
+            <a:off x="5750560" y="934720"/>
+            <a:ext cx="5709615" cy="5852160"/>
           </a:xfrm>
           <a:prstGeom prst="roundRect">
             <a:avLst/>
@@ -10943,31 +10754,72 @@
           <a:lstStyle/>
           <a:p>
             <a:pPr algn="ctr"/>
+            <a:endParaRPr/>
           </a:p>
         </p:txBody>
       </p:sp>
       <p:pic>
         <p:nvPicPr>
-          <p:cNvPr id="9" name="Picture 8" descr="04_phase2_ast.png"/>
+          <p:cNvPr id="8194" name="Picture 2"/>
           <p:cNvPicPr>
-            <a:picLocks noChangeAspect="1"/>
+            <a:picLocks noChangeAspect="1" noChangeArrowheads="1"/>
           </p:cNvPicPr>
           <p:nvPr/>
         </p:nvPicPr>
         <p:blipFill>
-          <a:blip r:embed="rId2"/>
+          <a:blip r:embed="rId2">
+            <a:extLst>
+              <a:ext uri="{28A0092B-C50C-407E-A947-70E740481C1C}">
+                <a14:useLocalDpi xmlns:a14="http://schemas.microsoft.com/office/drawing/2010/main" val="0"/>
+              </a:ext>
+            </a:extLst>
+          </a:blip>
+          <a:srcRect/>
           <a:stretch>
             <a:fillRect/>
           </a:stretch>
         </p:blipFill>
-        <p:spPr>
-          <a:xfrm>
-            <a:off x="5806440" y="1600200"/>
-            <a:ext cx="5516575" cy="6210714"/>
+        <p:spPr bwMode="auto">
+          <a:xfrm>
+            <a:off x="6070586" y="1132840"/>
+            <a:ext cx="5069561" cy="5506720"/>
           </a:xfrm>
           <a:prstGeom prst="rect">
             <a:avLst/>
           </a:prstGeom>
+          <a:noFill/>
+          <a:ln>
+            <a:noFill/>
+          </a:ln>
+          <a:effectLst/>
+          <a:extLst>
+            <a:ext uri="{909E8E84-426E-40DD-AFC4-6F175D3DCCD1}">
+              <a14:hiddenFill xmlns:a14="http://schemas.microsoft.com/office/drawing/2010/main">
+                <a:solidFill>
+                  <a:schemeClr val="accent1"/>
+                </a:solidFill>
+              </a14:hiddenFill>
+            </a:ext>
+            <a:ext uri="{91240B29-F687-4F45-9708-019B960494DF}">
+              <a14:hiddenLine xmlns:a14="http://schemas.microsoft.com/office/drawing/2010/main" w="9525">
+                <a:solidFill>
+                  <a:schemeClr val="tx1"/>
+                </a:solidFill>
+                <a:miter lim="800000"/>
+                <a:headEnd/>
+                <a:tailEnd/>
+              </a14:hiddenLine>
+            </a:ext>
+            <a:ext uri="{AF507438-7753-43E0-B8FC-AC1667EBCBE1}">
+              <a14:hiddenEffects xmlns:a14="http://schemas.microsoft.com/office/drawing/2010/main">
+                <a:effectLst>
+                  <a:outerShdw dist="35921" dir="2700000" algn="ctr" rotWithShape="0">
+                    <a:schemeClr val="bg2"/>
+                  </a:outerShdw>
+                </a:effectLst>
+              </a14:hiddenEffects>
+            </a:ext>
+          </a:extLst>
         </p:spPr>
       </p:pic>
     </p:spTree>
@@ -10979,7 +10831,7 @@
 </file>
 
 <file path=ppt/slides/slide6.xml><?xml version="1.0" encoding="utf-8"?>
-<p:sld xmlns:a="http://schemas.openxmlformats.org/drawingml/2006/main" xmlns:p="http://schemas.openxmlformats.org/presentationml/2006/main" xmlns:r="http://schemas.openxmlformats.org/officeDocument/2006/relationships">
+<p:sld xmlns:a="http://schemas.openxmlformats.org/drawingml/2006/main" xmlns:r="http://schemas.openxmlformats.org/officeDocument/2006/relationships" xmlns:p="http://schemas.openxmlformats.org/presentationml/2006/main">
   <p:cSld>
     <p:spTree>
       <p:nvGrpSpPr>
@@ -10987,7 +10839,14 @@
         <p:cNvGrpSpPr/>
         <p:nvPr/>
       </p:nvGrpSpPr>
-      <p:grpSpPr/>
+      <p:grpSpPr>
+        <a:xfrm>
+          <a:off x="0" y="0"/>
+          <a:ext cx="0" cy="0"/>
+          <a:chOff x="0" y="0"/>
+          <a:chExt cx="0" cy="0"/>
+        </a:xfrm>
+      </p:grpSpPr>
       <p:sp>
         <p:nvSpPr>
           <p:cNvPr id="2" name="Rectangle 1"/>
@@ -11030,19 +10889,20 @@
           <a:lstStyle/>
           <a:p>
             <a:pPr algn="ctr"/>
-          </a:p>
-        </p:txBody>
-      </p:sp>
-      <p:sp>
-        <p:nvSpPr>
-          <p:cNvPr id="3" name="TextBox 2"/>
+            <a:endParaRPr/>
+          </a:p>
+        </p:txBody>
+      </p:sp>
+      <p:sp>
+        <p:nvSpPr>
+          <p:cNvPr id="5" name="TextBox 4"/>
           <p:cNvSpPr txBox="1"/>
           <p:nvPr/>
         </p:nvSpPr>
         <p:spPr>
           <a:xfrm>
-            <a:off x="731520" y="457200"/>
-            <a:ext cx="7315200" cy="274320"/>
+            <a:off x="731520" y="713232"/>
+            <a:ext cx="10728655" cy="594360"/>
           </a:xfrm>
           <a:prstGeom prst="rect">
             <a:avLst/>
@@ -11056,95 +10916,6 @@
           <a:lstStyle/>
           <a:p>
             <a:pPr>
-              <a:defRPr sz="1000" b="1">
-                <a:solidFill>
-                  <a:srgbClr val="2563EB"/>
-                </a:solidFill>
-              </a:defRPr>
-            </a:pPr>
-            <a:r>
-              <a:t>EDUSCRIPT COMPILER DESIGN • REVIEW 3</a:t>
-            </a:r>
-          </a:p>
-        </p:txBody>
-      </p:sp>
-      <p:sp>
-        <p:nvSpPr>
-          <p:cNvPr id="4" name="Rounded Rectangle 3"/>
-          <p:cNvSpPr/>
-          <p:nvPr/>
-        </p:nvSpPr>
-        <p:spPr>
-          <a:xfrm>
-            <a:off x="9326880" y="457200"/>
-            <a:ext cx="2133295" cy="320040"/>
-          </a:xfrm>
-          <a:prstGeom prst="roundRect">
-            <a:avLst/>
-          </a:prstGeom>
-          <a:solidFill>
-            <a:srgbClr val="ECFDF5"/>
-          </a:solidFill>
-          <a:ln>
-            <a:solidFill>
-              <a:srgbClr val="10B981"/>
-            </a:solidFill>
-          </a:ln>
-        </p:spPr>
-        <p:style>
-          <a:lnRef idx="1">
-            <a:schemeClr val="accent1"/>
-          </a:lnRef>
-          <a:fillRef idx="3">
-            <a:schemeClr val="accent1"/>
-          </a:fillRef>
-          <a:effectRef idx="2">
-            <a:schemeClr val="accent1"/>
-          </a:effectRef>
-          <a:fontRef idx="minor">
-            <a:schemeClr val="lt1"/>
-          </a:fontRef>
-        </p:style>
-        <p:txBody>
-          <a:bodyPr rtlCol="0" anchor="ctr"/>
-          <a:lstStyle/>
-          <a:p>
-            <a:pPr algn="ctr">
-              <a:defRPr sz="1000" b="1">
-                <a:solidFill>
-                  <a:srgbClr val="10B981"/>
-                </a:solidFill>
-              </a:defRPr>
-            </a:pPr>
-            <a:r>
-              <a:t>✓ 100% IMPLEMENTED</a:t>
-            </a:r>
-          </a:p>
-        </p:txBody>
-      </p:sp>
-      <p:sp>
-        <p:nvSpPr>
-          <p:cNvPr id="5" name="TextBox 4"/>
-          <p:cNvSpPr txBox="1"/>
-          <p:nvPr/>
-        </p:nvSpPr>
-        <p:spPr>
-          <a:xfrm>
-            <a:off x="731520" y="713232"/>
-            <a:ext cx="10728655" cy="594360"/>
-          </a:xfrm>
-          <a:prstGeom prst="rect">
-            <a:avLst/>
-          </a:prstGeom>
-          <a:noFill/>
-        </p:spPr>
-        <p:txBody>
-          <a:bodyPr wrap="square">
-            <a:spAutoFit/>
-          </a:bodyPr>
-          <a:lstStyle/>
-          <a:p>
-            <a:pPr>
               <a:defRPr sz="2200" b="1">
                 <a:solidFill>
                   <a:srgbClr val="0F172A"/>
@@ -11165,7 +10936,7 @@
         </p:nvSpPr>
         <p:spPr>
           <a:xfrm>
-            <a:off x="731520" y="1463040"/>
+            <a:off x="731520" y="1307592"/>
             <a:ext cx="4754880" cy="4846320"/>
           </a:xfrm>
           <a:prstGeom prst="roundRect">
@@ -11199,6 +10970,7 @@
           <a:lstStyle/>
           <a:p>
             <a:pPr algn="ctr"/>
+            <a:endParaRPr/>
           </a:p>
         </p:txBody>
       </p:sp>
@@ -11210,7 +10982,7 @@
         </p:nvSpPr>
         <p:spPr>
           <a:xfrm>
-            <a:off x="914400" y="1600200"/>
+            <a:off x="914400" y="1846107"/>
             <a:ext cx="4389120" cy="4572000"/>
           </a:xfrm>
           <a:prstGeom prst="rect">
@@ -11235,6 +11007,7 @@
               </a:defRPr>
             </a:pPr>
             <a:r>
+              <a:rPr dirty="0"/>
               <a:t>Semantic Validation &amp; Scope Engine</a:t>
             </a:r>
           </a:p>
@@ -11245,7 +11018,7 @@
               </a:spcAft>
             </a:pPr>
             <a:r>
-              <a:rPr b="1" sz="1300">
+              <a:rPr sz="1300" b="1" dirty="0">
                 <a:solidFill>
                   <a:srgbClr val="0F172A"/>
                 </a:solidFill>
@@ -11253,12 +11026,44 @@
               <a:t>• Scoped Symbol Table (symbol_table.py): </a:t>
             </a:r>
             <a:r>
-              <a:rPr b="0" sz="1300">
-                <a:solidFill>
-                  <a:srgbClr val="0F172A"/>
-                </a:solidFill>
-              </a:rPr>
-              <a:t>Nested Scope tree maintaining identifier name, data type (int, float, string, bool), scope level, and initialization status.</a:t>
+              <a:rPr sz="1300" b="0" dirty="0">
+                <a:solidFill>
+                  <a:srgbClr val="0F172A"/>
+                </a:solidFill>
+              </a:rPr>
+              <a:t>Nested Scope tree maintaining identifier name, data type (</a:t>
+            </a:r>
+            <a:r>
+              <a:rPr sz="1300" b="0" dirty="0" err="1">
+                <a:solidFill>
+                  <a:srgbClr val="0F172A"/>
+                </a:solidFill>
+              </a:rPr>
+              <a:t>int</a:t>
+            </a:r>
+            <a:r>
+              <a:rPr sz="1300" b="0" dirty="0">
+                <a:solidFill>
+                  <a:srgbClr val="0F172A"/>
+                </a:solidFill>
+              </a:rPr>
+              <a:t>, float, string, </a:t>
+            </a:r>
+            <a:r>
+              <a:rPr sz="1300" b="0" dirty="0" err="1">
+                <a:solidFill>
+                  <a:srgbClr val="0F172A"/>
+                </a:solidFill>
+              </a:rPr>
+              <a:t>bool</a:t>
+            </a:r>
+            <a:r>
+              <a:rPr sz="1300" b="0" dirty="0">
+                <a:solidFill>
+                  <a:srgbClr val="0F172A"/>
+                </a:solidFill>
+              </a:rPr>
+              <a:t>), scope level, and initialization status.</a:t>
             </a:r>
           </a:p>
           <a:p>
@@ -11268,7 +11073,7 @@
               </a:spcAft>
             </a:pPr>
             <a:r>
-              <a:rPr b="1" sz="1300">
+              <a:rPr sz="1300" b="1" dirty="0">
                 <a:solidFill>
                   <a:srgbClr val="0F172A"/>
                 </a:solidFill>
@@ -11276,7 +11081,7 @@
               <a:t>• Variable Shadowing: </a:t>
             </a:r>
             <a:r>
-              <a:rPr b="0" sz="1300">
+              <a:rPr sz="1300" b="0" dirty="0">
                 <a:solidFill>
                   <a:srgbClr val="0F172A"/>
                 </a:solidFill>
@@ -11291,7 +11096,7 @@
               </a:spcAft>
             </a:pPr>
             <a:r>
-              <a:rPr b="1" sz="1300">
+              <a:rPr sz="1300" b="1" dirty="0">
                 <a:solidFill>
                   <a:srgbClr val="0F172A"/>
                 </a:solidFill>
@@ -11299,12 +11104,28 @@
               <a:t>• Type Checking (semantic_analyzer.py): </a:t>
             </a:r>
             <a:r>
-              <a:rPr b="0" sz="1300">
-                <a:solidFill>
-                  <a:srgbClr val="0F172A"/>
-                </a:solidFill>
-              </a:rPr>
-              <a:t>Enforces static type compatibility; allows widening int -&gt; float; validates relational &amp; logical operands.</a:t>
+              <a:rPr sz="1300" b="0" dirty="0">
+                <a:solidFill>
+                  <a:srgbClr val="0F172A"/>
+                </a:solidFill>
+              </a:rPr>
+              <a:t>Enforces static type compatibility; allows widening </a:t>
+            </a:r>
+            <a:r>
+              <a:rPr sz="1300" b="0" dirty="0" err="1">
+                <a:solidFill>
+                  <a:srgbClr val="0F172A"/>
+                </a:solidFill>
+              </a:rPr>
+              <a:t>int</a:t>
+            </a:r>
+            <a:r>
+              <a:rPr sz="1300" b="0" dirty="0">
+                <a:solidFill>
+                  <a:srgbClr val="0F172A"/>
+                </a:solidFill>
+              </a:rPr>
+              <a:t> -&gt; float; validates relational &amp; logical operands.</a:t>
             </a:r>
           </a:p>
           <a:p>
@@ -11314,7 +11135,7 @@
               </a:spcAft>
             </a:pPr>
             <a:r>
-              <a:rPr b="1" sz="1300">
+              <a:rPr sz="1300" b="1" dirty="0">
                 <a:solidFill>
                   <a:srgbClr val="0F172A"/>
                 </a:solidFill>
@@ -11322,7 +11143,7 @@
               <a:t>• Semantic Error Trapping: </a:t>
             </a:r>
             <a:r>
-              <a:rPr b="0" sz="1300">
+              <a:rPr sz="1300" b="0" dirty="0">
                 <a:solidFill>
                   <a:srgbClr val="0F172A"/>
                 </a:solidFill>
@@ -11340,7 +11161,7 @@
         </p:nvSpPr>
         <p:spPr>
           <a:xfrm>
-            <a:off x="5669280" y="1463040"/>
+            <a:off x="5669279" y="1307592"/>
             <a:ext cx="5790895" cy="4846320"/>
           </a:xfrm>
           <a:prstGeom prst="roundRect">
@@ -11374,31 +11195,72 @@
           <a:lstStyle/>
           <a:p>
             <a:pPr algn="ctr"/>
+            <a:endParaRPr/>
           </a:p>
         </p:txBody>
       </p:sp>
       <p:pic>
         <p:nvPicPr>
-          <p:cNvPr id="9" name="Picture 8" descr="05_phase3_symbol_table.png"/>
+          <p:cNvPr id="7170" name="Picture 2"/>
           <p:cNvPicPr>
-            <a:picLocks noChangeAspect="1"/>
+            <a:picLocks noChangeAspect="1" noChangeArrowheads="1"/>
           </p:cNvPicPr>
           <p:nvPr/>
         </p:nvPicPr>
         <p:blipFill>
-          <a:blip r:embed="rId2"/>
+          <a:blip r:embed="rId2">
+            <a:extLst>
+              <a:ext uri="{28A0092B-C50C-407E-A947-70E740481C1C}">
+                <a14:useLocalDpi xmlns:a14="http://schemas.microsoft.com/office/drawing/2010/main" val="0"/>
+              </a:ext>
+            </a:extLst>
+          </a:blip>
+          <a:srcRect/>
           <a:stretch>
             <a:fillRect/>
           </a:stretch>
         </p:blipFill>
-        <p:spPr>
-          <a:xfrm>
-            <a:off x="5806440" y="1691640"/>
-            <a:ext cx="5516575" cy="4114872"/>
+        <p:spPr bwMode="auto">
+          <a:xfrm>
+            <a:off x="5814280" y="1846107"/>
+            <a:ext cx="5417600" cy="3769289"/>
           </a:xfrm>
           <a:prstGeom prst="rect">
             <a:avLst/>
           </a:prstGeom>
+          <a:noFill/>
+          <a:ln>
+            <a:noFill/>
+          </a:ln>
+          <a:effectLst/>
+          <a:extLst>
+            <a:ext uri="{909E8E84-426E-40DD-AFC4-6F175D3DCCD1}">
+              <a14:hiddenFill xmlns:a14="http://schemas.microsoft.com/office/drawing/2010/main">
+                <a:solidFill>
+                  <a:schemeClr val="accent1"/>
+                </a:solidFill>
+              </a14:hiddenFill>
+            </a:ext>
+            <a:ext uri="{91240B29-F687-4F45-9708-019B960494DF}">
+              <a14:hiddenLine xmlns:a14="http://schemas.microsoft.com/office/drawing/2010/main" w="9525">
+                <a:solidFill>
+                  <a:schemeClr val="tx1"/>
+                </a:solidFill>
+                <a:miter lim="800000"/>
+                <a:headEnd/>
+                <a:tailEnd/>
+              </a14:hiddenLine>
+            </a:ext>
+            <a:ext uri="{AF507438-7753-43E0-B8FC-AC1667EBCBE1}">
+              <a14:hiddenEffects xmlns:a14="http://schemas.microsoft.com/office/drawing/2010/main">
+                <a:effectLst>
+                  <a:outerShdw dist="35921" dir="2700000" algn="ctr" rotWithShape="0">
+                    <a:schemeClr val="bg2"/>
+                  </a:outerShdw>
+                </a:effectLst>
+              </a14:hiddenEffects>
+            </a:ext>
+          </a:extLst>
         </p:spPr>
       </p:pic>
     </p:spTree>
@@ -11410,7 +11272,7 @@
 </file>
 
 <file path=ppt/slides/slide7.xml><?xml version="1.0" encoding="utf-8"?>
-<p:sld xmlns:a="http://schemas.openxmlformats.org/drawingml/2006/main" xmlns:p="http://schemas.openxmlformats.org/presentationml/2006/main" xmlns:r="http://schemas.openxmlformats.org/officeDocument/2006/relationships">
+<p:sld xmlns:a="http://schemas.openxmlformats.org/drawingml/2006/main" xmlns:r="http://schemas.openxmlformats.org/officeDocument/2006/relationships" xmlns:p="http://schemas.openxmlformats.org/presentationml/2006/main">
   <p:cSld>
     <p:spTree>
       <p:nvGrpSpPr>
@@ -11418,7 +11280,14 @@
         <p:cNvGrpSpPr/>
         <p:nvPr/>
       </p:nvGrpSpPr>
-      <p:grpSpPr/>
+      <p:grpSpPr>
+        <a:xfrm>
+          <a:off x="0" y="0"/>
+          <a:ext cx="0" cy="0"/>
+          <a:chOff x="0" y="0"/>
+          <a:chExt cx="0" cy="0"/>
+        </a:xfrm>
+      </p:grpSpPr>
       <p:sp>
         <p:nvSpPr>
           <p:cNvPr id="2" name="Rectangle 1"/>
@@ -11461,19 +11330,20 @@
           <a:lstStyle/>
           <a:p>
             <a:pPr algn="ctr"/>
-          </a:p>
-        </p:txBody>
-      </p:sp>
-      <p:sp>
-        <p:nvSpPr>
-          <p:cNvPr id="3" name="TextBox 2"/>
+            <a:endParaRPr/>
+          </a:p>
+        </p:txBody>
+      </p:sp>
+      <p:sp>
+        <p:nvSpPr>
+          <p:cNvPr id="5" name="TextBox 4"/>
           <p:cNvSpPr txBox="1"/>
           <p:nvPr/>
         </p:nvSpPr>
         <p:spPr>
           <a:xfrm>
-            <a:off x="731520" y="457200"/>
-            <a:ext cx="7315200" cy="274320"/>
+            <a:off x="731520" y="581152"/>
+            <a:ext cx="10728655" cy="594360"/>
           </a:xfrm>
           <a:prstGeom prst="rect">
             <a:avLst/>
@@ -11487,95 +11357,6 @@
           <a:lstStyle/>
           <a:p>
             <a:pPr>
-              <a:defRPr sz="1000" b="1">
-                <a:solidFill>
-                  <a:srgbClr val="2563EB"/>
-                </a:solidFill>
-              </a:defRPr>
-            </a:pPr>
-            <a:r>
-              <a:t>EDUSCRIPT COMPILER DESIGN • REVIEW 3</a:t>
-            </a:r>
-          </a:p>
-        </p:txBody>
-      </p:sp>
-      <p:sp>
-        <p:nvSpPr>
-          <p:cNvPr id="4" name="Rounded Rectangle 3"/>
-          <p:cNvSpPr/>
-          <p:nvPr/>
-        </p:nvSpPr>
-        <p:spPr>
-          <a:xfrm>
-            <a:off x="9326880" y="457200"/>
-            <a:ext cx="2133295" cy="320040"/>
-          </a:xfrm>
-          <a:prstGeom prst="roundRect">
-            <a:avLst/>
-          </a:prstGeom>
-          <a:solidFill>
-            <a:srgbClr val="ECFDF5"/>
-          </a:solidFill>
-          <a:ln>
-            <a:solidFill>
-              <a:srgbClr val="10B981"/>
-            </a:solidFill>
-          </a:ln>
-        </p:spPr>
-        <p:style>
-          <a:lnRef idx="1">
-            <a:schemeClr val="accent1"/>
-          </a:lnRef>
-          <a:fillRef idx="3">
-            <a:schemeClr val="accent1"/>
-          </a:fillRef>
-          <a:effectRef idx="2">
-            <a:schemeClr val="accent1"/>
-          </a:effectRef>
-          <a:fontRef idx="minor">
-            <a:schemeClr val="lt1"/>
-          </a:fontRef>
-        </p:style>
-        <p:txBody>
-          <a:bodyPr rtlCol="0" anchor="ctr"/>
-          <a:lstStyle/>
-          <a:p>
-            <a:pPr algn="ctr">
-              <a:defRPr sz="1000" b="1">
-                <a:solidFill>
-                  <a:srgbClr val="10B981"/>
-                </a:solidFill>
-              </a:defRPr>
-            </a:pPr>
-            <a:r>
-              <a:t>✓ 100% IMPLEMENTED</a:t>
-            </a:r>
-          </a:p>
-        </p:txBody>
-      </p:sp>
-      <p:sp>
-        <p:nvSpPr>
-          <p:cNvPr id="5" name="TextBox 4"/>
-          <p:cNvSpPr txBox="1"/>
-          <p:nvPr/>
-        </p:nvSpPr>
-        <p:spPr>
-          <a:xfrm>
-            <a:off x="731520" y="713232"/>
-            <a:ext cx="10728655" cy="594360"/>
-          </a:xfrm>
-          <a:prstGeom prst="rect">
-            <a:avLst/>
-          </a:prstGeom>
-          <a:noFill/>
-        </p:spPr>
-        <p:txBody>
-          <a:bodyPr wrap="square">
-            <a:spAutoFit/>
-          </a:bodyPr>
-          <a:lstStyle/>
-          <a:p>
-            <a:pPr>
               <a:defRPr sz="2200" b="1">
                 <a:solidFill>
                   <a:srgbClr val="0F172A"/>
@@ -11596,7 +11377,7 @@
         </p:nvSpPr>
         <p:spPr>
           <a:xfrm>
-            <a:off x="731520" y="1463040"/>
+            <a:off x="548640" y="1221232"/>
             <a:ext cx="4754880" cy="4846320"/>
           </a:xfrm>
           <a:prstGeom prst="roundRect">
@@ -11630,6 +11411,7 @@
           <a:lstStyle/>
           <a:p>
             <a:pPr algn="ctr"/>
+            <a:endParaRPr/>
           </a:p>
         </p:txBody>
       </p:sp>
@@ -11676,7 +11458,7 @@
               </a:spcAft>
             </a:pPr>
             <a:r>
-              <a:rPr b="1" sz="1300">
+              <a:rPr sz="1300" b="1">
                 <a:solidFill>
                   <a:srgbClr val="0F172A"/>
                 </a:solidFill>
@@ -11684,7 +11466,7 @@
               <a:t>• Linearized Quadruple IR: </a:t>
             </a:r>
             <a:r>
-              <a:rPr b="0" sz="1300">
+              <a:rPr sz="1300" b="0">
                 <a:solidFill>
                   <a:srgbClr val="0F172A"/>
                 </a:solidFill>
@@ -11699,7 +11481,7 @@
               </a:spcAft>
             </a:pPr>
             <a:r>
-              <a:rPr b="1" sz="1300">
+              <a:rPr sz="1300" b="1">
                 <a:solidFill>
                   <a:srgbClr val="0F172A"/>
                 </a:solidFill>
@@ -11707,7 +11489,7 @@
               <a:t>• Register &amp; Label Generation: </a:t>
             </a:r>
             <a:r>
-              <a:rPr b="0" sz="1300">
+              <a:rPr sz="1300" b="0">
                 <a:solidFill>
                   <a:srgbClr val="0F172A"/>
                 </a:solidFill>
@@ -11722,7 +11504,7 @@
               </a:spcAft>
             </a:pPr>
             <a:r>
-              <a:rPr b="1" sz="1300">
+              <a:rPr sz="1300" b="1">
                 <a:solidFill>
                   <a:srgbClr val="0F172A"/>
                 </a:solidFill>
@@ -11730,7 +11512,7 @@
               <a:t>• Complete Instruction Set: </a:t>
             </a:r>
             <a:r>
-              <a:rPr b="0" sz="1300">
+              <a:rPr sz="1300" b="0">
                 <a:solidFill>
                   <a:srgbClr val="0F172A"/>
                 </a:solidFill>
@@ -11745,7 +11527,7 @@
               </a:spcAft>
             </a:pPr>
             <a:r>
-              <a:rPr b="1" sz="1300">
+              <a:rPr sz="1300" b="1">
                 <a:solidFill>
                   <a:srgbClr val="0F172A"/>
                 </a:solidFill>
@@ -11753,7 +11535,7 @@
               <a:t>• Clear Machine Abstraction: </a:t>
             </a:r>
             <a:r>
-              <a:rPr b="0" sz="1300">
+              <a:rPr sz="1300" b="0">
                 <a:solidFill>
                   <a:srgbClr val="0F172A"/>
                 </a:solidFill>
@@ -11805,31 +11587,72 @@
           <a:lstStyle/>
           <a:p>
             <a:pPr algn="ctr"/>
+            <a:endParaRPr/>
           </a:p>
         </p:txBody>
       </p:sp>
       <p:pic>
         <p:nvPicPr>
-          <p:cNvPr id="9" name="Picture 8" descr="06_phase4_tac_ir.png"/>
+          <p:cNvPr id="6146" name="Picture 2"/>
           <p:cNvPicPr>
-            <a:picLocks noChangeAspect="1"/>
+            <a:picLocks noChangeAspect="1" noChangeArrowheads="1"/>
           </p:cNvPicPr>
           <p:nvPr/>
         </p:nvPicPr>
         <p:blipFill>
-          <a:blip r:embed="rId2"/>
+          <a:blip r:embed="rId2">
+            <a:extLst>
+              <a:ext uri="{28A0092B-C50C-407E-A947-70E740481C1C}">
+                <a14:useLocalDpi xmlns:a14="http://schemas.microsoft.com/office/drawing/2010/main" val="0"/>
+              </a:ext>
+            </a:extLst>
+          </a:blip>
+          <a:srcRect/>
           <a:stretch>
             <a:fillRect/>
           </a:stretch>
         </p:blipFill>
-        <p:spPr>
-          <a:xfrm>
-            <a:off x="5806440" y="1600200"/>
-            <a:ext cx="5516575" cy="5626176"/>
+        <p:spPr bwMode="auto">
+          <a:xfrm>
+            <a:off x="5918713" y="1032351"/>
+            <a:ext cx="5880222" cy="5707698"/>
           </a:xfrm>
           <a:prstGeom prst="rect">
             <a:avLst/>
           </a:prstGeom>
+          <a:noFill/>
+          <a:ln>
+            <a:noFill/>
+          </a:ln>
+          <a:effectLst/>
+          <a:extLst>
+            <a:ext uri="{909E8E84-426E-40DD-AFC4-6F175D3DCCD1}">
+              <a14:hiddenFill xmlns:a14="http://schemas.microsoft.com/office/drawing/2010/main">
+                <a:solidFill>
+                  <a:schemeClr val="accent1"/>
+                </a:solidFill>
+              </a14:hiddenFill>
+            </a:ext>
+            <a:ext uri="{91240B29-F687-4F45-9708-019B960494DF}">
+              <a14:hiddenLine xmlns:a14="http://schemas.microsoft.com/office/drawing/2010/main" w="9525">
+                <a:solidFill>
+                  <a:schemeClr val="tx1"/>
+                </a:solidFill>
+                <a:miter lim="800000"/>
+                <a:headEnd/>
+                <a:tailEnd/>
+              </a14:hiddenLine>
+            </a:ext>
+            <a:ext uri="{AF507438-7753-43E0-B8FC-AC1667EBCBE1}">
+              <a14:hiddenEffects xmlns:a14="http://schemas.microsoft.com/office/drawing/2010/main">
+                <a:effectLst>
+                  <a:outerShdw dist="35921" dir="2700000" algn="ctr" rotWithShape="0">
+                    <a:schemeClr val="bg2"/>
+                  </a:outerShdw>
+                </a:effectLst>
+              </a14:hiddenEffects>
+            </a:ext>
+          </a:extLst>
         </p:spPr>
       </p:pic>
     </p:spTree>
@@ -11841,7 +11664,7 @@
 </file>
 
 <file path=ppt/slides/slide8.xml><?xml version="1.0" encoding="utf-8"?>
-<p:sld xmlns:a="http://schemas.openxmlformats.org/drawingml/2006/main" xmlns:p="http://schemas.openxmlformats.org/presentationml/2006/main" xmlns:r="http://schemas.openxmlformats.org/officeDocument/2006/relationships">
+<p:sld xmlns:a="http://schemas.openxmlformats.org/drawingml/2006/main" xmlns:r="http://schemas.openxmlformats.org/officeDocument/2006/relationships" xmlns:p="http://schemas.openxmlformats.org/presentationml/2006/main">
   <p:cSld>
     <p:spTree>
       <p:nvGrpSpPr>
@@ -11849,7 +11672,14 @@
         <p:cNvGrpSpPr/>
         <p:nvPr/>
       </p:nvGrpSpPr>
-      <p:grpSpPr/>
+      <p:grpSpPr>
+        <a:xfrm>
+          <a:off x="0" y="0"/>
+          <a:ext cx="0" cy="0"/>
+          <a:chOff x="0" y="0"/>
+          <a:chExt cx="0" cy="0"/>
+        </a:xfrm>
+      </p:grpSpPr>
       <p:sp>
         <p:nvSpPr>
           <p:cNvPr id="2" name="Rectangle 1"/>
@@ -11892,19 +11722,20 @@
           <a:lstStyle/>
           <a:p>
             <a:pPr algn="ctr"/>
-          </a:p>
-        </p:txBody>
-      </p:sp>
-      <p:sp>
-        <p:nvSpPr>
-          <p:cNvPr id="3" name="TextBox 2"/>
+            <a:endParaRPr/>
+          </a:p>
+        </p:txBody>
+      </p:sp>
+      <p:sp>
+        <p:nvSpPr>
+          <p:cNvPr id="5" name="TextBox 4"/>
           <p:cNvSpPr txBox="1"/>
           <p:nvPr/>
         </p:nvSpPr>
         <p:spPr>
           <a:xfrm>
-            <a:off x="731520" y="457200"/>
-            <a:ext cx="7315200" cy="274320"/>
+            <a:off x="731520" y="492760"/>
+            <a:ext cx="10728655" cy="594360"/>
           </a:xfrm>
           <a:prstGeom prst="rect">
             <a:avLst/>
@@ -11918,102 +11749,14 @@
           <a:lstStyle/>
           <a:p>
             <a:pPr>
-              <a:defRPr sz="1000" b="1">
-                <a:solidFill>
-                  <a:srgbClr val="2563EB"/>
+              <a:defRPr sz="2200" b="1">
+                <a:solidFill>
+                  <a:srgbClr val="0F172A"/>
                 </a:solidFill>
               </a:defRPr>
             </a:pPr>
             <a:r>
-              <a:t>EDUSCRIPT COMPILER DESIGN • REVIEW 3</a:t>
-            </a:r>
-          </a:p>
-        </p:txBody>
-      </p:sp>
-      <p:sp>
-        <p:nvSpPr>
-          <p:cNvPr id="4" name="Rounded Rectangle 3"/>
-          <p:cNvSpPr/>
-          <p:nvPr/>
-        </p:nvSpPr>
-        <p:spPr>
-          <a:xfrm>
-            <a:off x="9326880" y="457200"/>
-            <a:ext cx="2133295" cy="320040"/>
-          </a:xfrm>
-          <a:prstGeom prst="roundRect">
-            <a:avLst/>
-          </a:prstGeom>
-          <a:solidFill>
-            <a:srgbClr val="ECFDF5"/>
-          </a:solidFill>
-          <a:ln>
-            <a:solidFill>
-              <a:srgbClr val="10B981"/>
-            </a:solidFill>
-          </a:ln>
-        </p:spPr>
-        <p:style>
-          <a:lnRef idx="1">
-            <a:schemeClr val="accent1"/>
-          </a:lnRef>
-          <a:fillRef idx="3">
-            <a:schemeClr val="accent1"/>
-          </a:fillRef>
-          <a:effectRef idx="2">
-            <a:schemeClr val="accent1"/>
-          </a:effectRef>
-          <a:fontRef idx="minor">
-            <a:schemeClr val="lt1"/>
-          </a:fontRef>
-        </p:style>
-        <p:txBody>
-          <a:bodyPr rtlCol="0" anchor="ctr"/>
-          <a:lstStyle/>
-          <a:p>
-            <a:pPr algn="ctr">
-              <a:defRPr sz="1000" b="1">
-                <a:solidFill>
-                  <a:srgbClr val="10B981"/>
-                </a:solidFill>
-              </a:defRPr>
-            </a:pPr>
-            <a:r>
-              <a:t>✓ 100% IMPLEMENTED</a:t>
-            </a:r>
-          </a:p>
-        </p:txBody>
-      </p:sp>
-      <p:sp>
-        <p:nvSpPr>
-          <p:cNvPr id="5" name="TextBox 4"/>
-          <p:cNvSpPr txBox="1"/>
-          <p:nvPr/>
-        </p:nvSpPr>
-        <p:spPr>
-          <a:xfrm>
-            <a:off x="731520" y="713232"/>
-            <a:ext cx="10728655" cy="594360"/>
-          </a:xfrm>
-          <a:prstGeom prst="rect">
-            <a:avLst/>
-          </a:prstGeom>
-          <a:noFill/>
-        </p:spPr>
-        <p:txBody>
-          <a:bodyPr wrap="square">
-            <a:spAutoFit/>
-          </a:bodyPr>
-          <a:lstStyle/>
-          <a:p>
-            <a:pPr>
-              <a:defRPr sz="2200" b="1">
-                <a:solidFill>
-                  <a:srgbClr val="0F172A"/>
-                </a:solidFill>
-              </a:defRPr>
-            </a:pPr>
-            <a:r>
+              <a:rPr dirty="0"/>
               <a:t>Phase 5: Execution Engine &amp; TAC Virtual Machine</a:t>
             </a:r>
           </a:p>
@@ -12027,7 +11770,7 @@
         </p:nvSpPr>
         <p:spPr>
           <a:xfrm>
-            <a:off x="731520" y="1463040"/>
+            <a:off x="731520" y="1087120"/>
             <a:ext cx="4754880" cy="4846320"/>
           </a:xfrm>
           <a:prstGeom prst="roundRect">
@@ -12061,6 +11804,7 @@
           <a:lstStyle/>
           <a:p>
             <a:pPr algn="ctr"/>
+            <a:endParaRPr/>
           </a:p>
         </p:txBody>
       </p:sp>
@@ -12072,7 +11816,7 @@
         </p:nvSpPr>
         <p:spPr>
           <a:xfrm>
-            <a:off x="914400" y="1600200"/>
+            <a:off x="914400" y="1889760"/>
             <a:ext cx="4389120" cy="4572000"/>
           </a:xfrm>
           <a:prstGeom prst="rect">
@@ -12097,6 +11841,7 @@
               </a:defRPr>
             </a:pPr>
             <a:r>
+              <a:rPr dirty="0"/>
               <a:t>Execution Engine (interpreter.py)</a:t>
             </a:r>
           </a:p>
@@ -12107,7 +11852,7 @@
               </a:spcAft>
             </a:pPr>
             <a:r>
-              <a:rPr b="1" sz="1300">
+              <a:rPr sz="1300" b="1" dirty="0">
                 <a:solidFill>
                   <a:srgbClr val="0F172A"/>
                 </a:solidFill>
@@ -12115,7 +11860,7 @@
               <a:t>• TAC Virtual Machine (Primary): </a:t>
             </a:r>
             <a:r>
-              <a:rPr b="0" sz="1300">
+              <a:rPr sz="1300" b="0" dirty="0">
                 <a:solidFill>
                   <a:srgbClr val="0F172A"/>
                 </a:solidFill>
@@ -12130,7 +11875,7 @@
               </a:spcAft>
             </a:pPr>
             <a:r>
-              <a:rPr b="1" sz="1300">
+              <a:rPr sz="1300" b="1" dirty="0">
                 <a:solidFill>
                   <a:srgbClr val="0F172A"/>
                 </a:solidFill>
@@ -12138,12 +11883,44 @@
               <a:t>• AST Tree-Walk Interpreter (Auxiliary): </a:t>
             </a:r>
             <a:r>
-              <a:rPr b="0" sz="1300">
-                <a:solidFill>
-                  <a:srgbClr val="0F172A"/>
-                </a:solidFill>
-              </a:rPr>
-              <a:t>Direct AST traversal execution engine available via --ast-run flag for comparative demonstration in vivas.</a:t>
+              <a:rPr sz="1300" b="0" dirty="0">
+                <a:solidFill>
+                  <a:srgbClr val="0F172A"/>
+                </a:solidFill>
+              </a:rPr>
+              <a:t>Direct AST traversal execution engine available via --</a:t>
+            </a:r>
+            <a:r>
+              <a:rPr sz="1300" b="0" dirty="0" err="1">
+                <a:solidFill>
+                  <a:srgbClr val="0F172A"/>
+                </a:solidFill>
+              </a:rPr>
+              <a:t>ast</a:t>
+            </a:r>
+            <a:r>
+              <a:rPr sz="1300" b="0" dirty="0">
+                <a:solidFill>
+                  <a:srgbClr val="0F172A"/>
+                </a:solidFill>
+              </a:rPr>
+              <a:t>-run flag for comparative demonstration in </a:t>
+            </a:r>
+            <a:r>
+              <a:rPr sz="1300" b="0" dirty="0" err="1">
+                <a:solidFill>
+                  <a:srgbClr val="0F172A"/>
+                </a:solidFill>
+              </a:rPr>
+              <a:t>vivas</a:t>
+            </a:r>
+            <a:r>
+              <a:rPr sz="1300" b="0" dirty="0">
+                <a:solidFill>
+                  <a:srgbClr val="0F172A"/>
+                </a:solidFill>
+              </a:rPr>
+              <a:t>.</a:t>
             </a:r>
           </a:p>
           <a:p>
@@ -12153,7 +11930,7 @@
               </a:spcAft>
             </a:pPr>
             <a:r>
-              <a:rPr b="1" sz="1300">
+              <a:rPr sz="1300" b="1" dirty="0">
                 <a:solidFill>
                   <a:srgbClr val="0F172A"/>
                 </a:solidFill>
@@ -12161,7 +11938,7 @@
               <a:t>• Runtime Error Trapping: </a:t>
             </a:r>
             <a:r>
-              <a:rPr b="0" sz="1300">
+              <a:rPr sz="1300" b="0" dirty="0">
                 <a:solidFill>
                   <a:srgbClr val="0F172A"/>
                 </a:solidFill>
@@ -12176,7 +11953,7 @@
               </a:spcAft>
             </a:pPr>
             <a:r>
-              <a:rPr b="1" sz="1300">
+              <a:rPr sz="1300" b="1" dirty="0">
                 <a:solidFill>
                   <a:srgbClr val="0F172A"/>
                 </a:solidFill>
@@ -12184,12 +11961,28 @@
               <a:t>• Program Exit &amp; Output: </a:t>
             </a:r>
             <a:r>
-              <a:rPr b="0" sz="1300">
-                <a:solidFill>
-                  <a:srgbClr val="0F172A"/>
-                </a:solidFill>
-              </a:rPr>
-              <a:t>Captures stdout cleanly in execution buffers and propagates exit return codes (0 on success).</a:t>
+              <a:rPr sz="1300" b="0" dirty="0">
+                <a:solidFill>
+                  <a:srgbClr val="0F172A"/>
+                </a:solidFill>
+              </a:rPr>
+              <a:t>Captures </a:t>
+            </a:r>
+            <a:r>
+              <a:rPr sz="1300" b="0" dirty="0" err="1">
+                <a:solidFill>
+                  <a:srgbClr val="0F172A"/>
+                </a:solidFill>
+              </a:rPr>
+              <a:t>stdout</a:t>
+            </a:r>
+            <a:r>
+              <a:rPr sz="1300" b="0" dirty="0">
+                <a:solidFill>
+                  <a:srgbClr val="0F172A"/>
+                </a:solidFill>
+              </a:rPr>
+              <a:t> cleanly in execution buffers and propagates exit return codes (0 on success).</a:t>
             </a:r>
           </a:p>
         </p:txBody>
@@ -12202,8 +11995,8 @@
         </p:nvSpPr>
         <p:spPr>
           <a:xfrm>
-            <a:off x="5669280" y="1463040"/>
-            <a:ext cx="5790895" cy="4846320"/>
+            <a:off x="5669279" y="1087120"/>
+            <a:ext cx="5790895" cy="4683760"/>
           </a:xfrm>
           <a:prstGeom prst="roundRect">
             <a:avLst/>
@@ -12236,31 +12029,72 @@
           <a:lstStyle/>
           <a:p>
             <a:pPr algn="ctr"/>
+            <a:endParaRPr/>
           </a:p>
         </p:txBody>
       </p:sp>
       <p:pic>
         <p:nvPicPr>
-          <p:cNvPr id="9" name="Picture 8" descr="07_hindi_factorial_run.png"/>
+          <p:cNvPr id="5122" name="Picture 2"/>
           <p:cNvPicPr>
-            <a:picLocks noChangeAspect="1"/>
+            <a:picLocks noChangeAspect="1" noChangeArrowheads="1"/>
           </p:cNvPicPr>
           <p:nvPr/>
         </p:nvPicPr>
         <p:blipFill>
-          <a:blip r:embed="rId2"/>
+          <a:blip r:embed="rId2">
+            <a:extLst>
+              <a:ext uri="{28A0092B-C50C-407E-A947-70E740481C1C}">
+                <a14:useLocalDpi xmlns:a14="http://schemas.microsoft.com/office/drawing/2010/main" val="0"/>
+              </a:ext>
+            </a:extLst>
+          </a:blip>
+          <a:srcRect/>
           <a:stretch>
             <a:fillRect/>
           </a:stretch>
         </p:blipFill>
-        <p:spPr>
-          <a:xfrm>
-            <a:off x="5806440" y="2011680"/>
-            <a:ext cx="5516575" cy="3288025"/>
+        <p:spPr bwMode="auto">
+          <a:xfrm>
+            <a:off x="5694860" y="1889760"/>
+            <a:ext cx="5739734" cy="3080068"/>
           </a:xfrm>
           <a:prstGeom prst="rect">
             <a:avLst/>
           </a:prstGeom>
+          <a:noFill/>
+          <a:ln>
+            <a:noFill/>
+          </a:ln>
+          <a:effectLst/>
+          <a:extLst>
+            <a:ext uri="{909E8E84-426E-40DD-AFC4-6F175D3DCCD1}">
+              <a14:hiddenFill xmlns:a14="http://schemas.microsoft.com/office/drawing/2010/main">
+                <a:solidFill>
+                  <a:schemeClr val="accent1"/>
+                </a:solidFill>
+              </a14:hiddenFill>
+            </a:ext>
+            <a:ext uri="{91240B29-F687-4F45-9708-019B960494DF}">
+              <a14:hiddenLine xmlns:a14="http://schemas.microsoft.com/office/drawing/2010/main" w="9525">
+                <a:solidFill>
+                  <a:schemeClr val="tx1"/>
+                </a:solidFill>
+                <a:miter lim="800000"/>
+                <a:headEnd/>
+                <a:tailEnd/>
+              </a14:hiddenLine>
+            </a:ext>
+            <a:ext uri="{AF507438-7753-43E0-B8FC-AC1667EBCBE1}">
+              <a14:hiddenEffects xmlns:a14="http://schemas.microsoft.com/office/drawing/2010/main">
+                <a:effectLst>
+                  <a:outerShdw dist="35921" dir="2700000" algn="ctr" rotWithShape="0">
+                    <a:schemeClr val="bg2"/>
+                  </a:outerShdw>
+                </a:effectLst>
+              </a14:hiddenEffects>
+            </a:ext>
+          </a:extLst>
         </p:spPr>
       </p:pic>
     </p:spTree>
@@ -12272,7 +12106,7 @@
 </file>
 
 <file path=ppt/slides/slide9.xml><?xml version="1.0" encoding="utf-8"?>
-<p:sld xmlns:a="http://schemas.openxmlformats.org/drawingml/2006/main" xmlns:p="http://schemas.openxmlformats.org/presentationml/2006/main" xmlns:r="http://schemas.openxmlformats.org/officeDocument/2006/relationships">
+<p:sld xmlns:a="http://schemas.openxmlformats.org/drawingml/2006/main" xmlns:r="http://schemas.openxmlformats.org/officeDocument/2006/relationships" xmlns:p="http://schemas.openxmlformats.org/presentationml/2006/main">
   <p:cSld>
     <p:spTree>
       <p:nvGrpSpPr>
@@ -12280,7 +12114,14 @@
         <p:cNvGrpSpPr/>
         <p:nvPr/>
       </p:nvGrpSpPr>
-      <p:grpSpPr/>
+      <p:grpSpPr>
+        <a:xfrm>
+          <a:off x="0" y="0"/>
+          <a:ext cx="0" cy="0"/>
+          <a:chOff x="0" y="0"/>
+          <a:chExt cx="0" cy="0"/>
+        </a:xfrm>
+      </p:grpSpPr>
       <p:sp>
         <p:nvSpPr>
           <p:cNvPr id="2" name="Rectangle 1"/>
@@ -12323,19 +12164,20 @@
           <a:lstStyle/>
           <a:p>
             <a:pPr algn="ctr"/>
-          </a:p>
-        </p:txBody>
-      </p:sp>
-      <p:sp>
-        <p:nvSpPr>
-          <p:cNvPr id="3" name="TextBox 2"/>
+            <a:endParaRPr/>
+          </a:p>
+        </p:txBody>
+      </p:sp>
+      <p:sp>
+        <p:nvSpPr>
+          <p:cNvPr id="5" name="TextBox 4"/>
           <p:cNvSpPr txBox="1"/>
           <p:nvPr/>
         </p:nvSpPr>
         <p:spPr>
           <a:xfrm>
-            <a:off x="731520" y="457200"/>
-            <a:ext cx="7315200" cy="274320"/>
+            <a:off x="731519" y="540512"/>
+            <a:ext cx="10728655" cy="594360"/>
           </a:xfrm>
           <a:prstGeom prst="rect">
             <a:avLst/>
@@ -12349,102 +12191,14 @@
           <a:lstStyle/>
           <a:p>
             <a:pPr>
-              <a:defRPr sz="1000" b="1">
-                <a:solidFill>
-                  <a:srgbClr val="2563EB"/>
+              <a:defRPr sz="2200" b="1">
+                <a:solidFill>
+                  <a:srgbClr val="0F172A"/>
                 </a:solidFill>
               </a:defRPr>
             </a:pPr>
             <a:r>
-              <a:t>EDUSCRIPT COMPILER DESIGN • REVIEW 3</a:t>
-            </a:r>
-          </a:p>
-        </p:txBody>
-      </p:sp>
-      <p:sp>
-        <p:nvSpPr>
-          <p:cNvPr id="4" name="Rounded Rectangle 3"/>
-          <p:cNvSpPr/>
-          <p:nvPr/>
-        </p:nvSpPr>
-        <p:spPr>
-          <a:xfrm>
-            <a:off x="9326880" y="457200"/>
-            <a:ext cx="2133295" cy="320040"/>
-          </a:xfrm>
-          <a:prstGeom prst="roundRect">
-            <a:avLst/>
-          </a:prstGeom>
-          <a:solidFill>
-            <a:srgbClr val="ECFDF5"/>
-          </a:solidFill>
-          <a:ln>
-            <a:solidFill>
-              <a:srgbClr val="10B981"/>
-            </a:solidFill>
-          </a:ln>
-        </p:spPr>
-        <p:style>
-          <a:lnRef idx="1">
-            <a:schemeClr val="accent1"/>
-          </a:lnRef>
-          <a:fillRef idx="3">
-            <a:schemeClr val="accent1"/>
-          </a:fillRef>
-          <a:effectRef idx="2">
-            <a:schemeClr val="accent1"/>
-          </a:effectRef>
-          <a:fontRef idx="minor">
-            <a:schemeClr val="lt1"/>
-          </a:fontRef>
-        </p:style>
-        <p:txBody>
-          <a:bodyPr rtlCol="0" anchor="ctr"/>
-          <a:lstStyle/>
-          <a:p>
-            <a:pPr algn="ctr">
-              <a:defRPr sz="1000" b="1">
-                <a:solidFill>
-                  <a:srgbClr val="10B981"/>
-                </a:solidFill>
-              </a:defRPr>
-            </a:pPr>
-            <a:r>
-              <a:t>✓ 100% IMPLEMENTED</a:t>
-            </a:r>
-          </a:p>
-        </p:txBody>
-      </p:sp>
-      <p:sp>
-        <p:nvSpPr>
-          <p:cNvPr id="5" name="TextBox 4"/>
-          <p:cNvSpPr txBox="1"/>
-          <p:nvPr/>
-        </p:nvSpPr>
-        <p:spPr>
-          <a:xfrm>
-            <a:off x="731520" y="713232"/>
-            <a:ext cx="10728655" cy="594360"/>
-          </a:xfrm>
-          <a:prstGeom prst="rect">
-            <a:avLst/>
-          </a:prstGeom>
-          <a:noFill/>
-        </p:spPr>
-        <p:txBody>
-          <a:bodyPr wrap="square">
-            <a:spAutoFit/>
-          </a:bodyPr>
-          <a:lstStyle/>
-          <a:p>
-            <a:pPr>
-              <a:defRPr sz="2200" b="1">
-                <a:solidFill>
-                  <a:srgbClr val="0F172A"/>
-                </a:solidFill>
-              </a:defRPr>
-            </a:pPr>
-            <a:r>
+              <a:rPr dirty="0"/>
               <a:t>Live End-to-End Execution Evidence (All 5 Stages)</a:t>
             </a:r>
           </a:p>
@@ -12458,7 +12212,7 @@
         </p:nvSpPr>
         <p:spPr>
           <a:xfrm>
-            <a:off x="731520" y="1463040"/>
+            <a:off x="731520" y="1134872"/>
             <a:ext cx="4389120" cy="4846320"/>
           </a:xfrm>
           <a:prstGeom prst="roundRect">
@@ -12492,6 +12246,7 @@
           <a:lstStyle/>
           <a:p>
             <a:pPr algn="ctr"/>
+            <a:endParaRPr/>
           </a:p>
         </p:txBody>
       </p:sp>
@@ -12538,7 +12293,7 @@
               </a:spcAft>
             </a:pPr>
             <a:r>
-              <a:rPr b="1" sz="1300">
+              <a:rPr sz="1300" b="1">
                 <a:solidFill>
                   <a:srgbClr val="0F172A"/>
                 </a:solidFill>
@@ -12546,7 +12301,7 @@
               <a:t>• Source Code Tested: </a:t>
             </a:r>
             <a:r>
-              <a:rPr b="0" sz="1300">
+              <a:rPr sz="1300" b="0">
                 <a:solidFill>
                   <a:srgbClr val="0F172A"/>
                 </a:solidFill>
@@ -12561,7 +12316,7 @@
               </a:spcAft>
             </a:pPr>
             <a:r>
-              <a:rPr b="1" sz="1300">
+              <a:rPr sz="1300" b="1">
                 <a:solidFill>
                   <a:srgbClr val="0F172A"/>
                 </a:solidFill>
@@ -12569,7 +12324,7 @@
               <a:t>• Executed Command: </a:t>
             </a:r>
             <a:r>
-              <a:rPr b="0" sz="1300">
+              <a:rPr sz="1300" b="0">
                 <a:solidFill>
                   <a:srgbClr val="0F172A"/>
                 </a:solidFill>
@@ -12584,7 +12339,7 @@
               </a:spcAft>
             </a:pPr>
             <a:r>
-              <a:rPr b="1" sz="1300">
+              <a:rPr sz="1300" b="1">
                 <a:solidFill>
                   <a:srgbClr val="0F172A"/>
                 </a:solidFill>
@@ -12592,7 +12347,7 @@
               <a:t>• Complete Pipeline Verification: </a:t>
             </a:r>
             <a:r>
-              <a:rPr b="0" sz="1300">
+              <a:rPr sz="1300" b="0">
                 <a:solidFill>
                   <a:srgbClr val="0F172A"/>
                 </a:solidFill>
@@ -12607,7 +12362,7 @@
               </a:spcAft>
             </a:pPr>
             <a:r>
-              <a:rPr b="1" sz="1300">
+              <a:rPr sz="1300" b="1">
                 <a:solidFill>
                   <a:srgbClr val="0F172A"/>
                 </a:solidFill>
@@ -12615,7 +12370,7 @@
               <a:t>• Verification Status: </a:t>
             </a:r>
             <a:r>
-              <a:rPr b="0" sz="1300">
+              <a:rPr sz="1300" b="0">
                 <a:solidFill>
                   <a:srgbClr val="0F172A"/>
                 </a:solidFill>
@@ -12633,8 +12388,8 @@
         </p:nvSpPr>
         <p:spPr>
           <a:xfrm>
-            <a:off x="5303520" y="1463040"/>
-            <a:ext cx="6156655" cy="4846320"/>
+            <a:off x="6720838" y="512064"/>
+            <a:ext cx="5181295" cy="6264656"/>
           </a:xfrm>
           <a:prstGeom prst="roundRect">
             <a:avLst/>
@@ -12667,31 +12422,72 @@
           <a:lstStyle/>
           <a:p>
             <a:pPr algn="ctr"/>
+            <a:endParaRPr/>
           </a:p>
         </p:txBody>
       </p:sp>
       <p:pic>
         <p:nvPicPr>
-          <p:cNvPr id="9" name="Picture 8" descr="02_full_pipeline_all.png"/>
+          <p:cNvPr id="4098" name="Picture 2"/>
           <p:cNvPicPr>
-            <a:picLocks noChangeAspect="1"/>
+            <a:picLocks noChangeAspect="1" noChangeArrowheads="1"/>
           </p:cNvPicPr>
           <p:nvPr/>
         </p:nvPicPr>
         <p:blipFill>
-          <a:blip r:embed="rId2"/>
+          <a:blip r:embed="rId2">
+            <a:extLst>
+              <a:ext uri="{28A0092B-C50C-407E-A947-70E740481C1C}">
+                <a14:useLocalDpi xmlns:a14="http://schemas.microsoft.com/office/drawing/2010/main" val="0"/>
+              </a:ext>
+            </a:extLst>
+          </a:blip>
+          <a:srcRect/>
           <a:stretch>
             <a:fillRect/>
           </a:stretch>
         </p:blipFill>
-        <p:spPr>
-          <a:xfrm>
-            <a:off x="5440680" y="1554480"/>
-            <a:ext cx="5882335" cy="8024907"/>
+        <p:spPr bwMode="auto">
+          <a:xfrm>
+            <a:off x="7081519" y="697992"/>
+            <a:ext cx="4459935" cy="5905484"/>
           </a:xfrm>
           <a:prstGeom prst="rect">
             <a:avLst/>
           </a:prstGeom>
+          <a:noFill/>
+          <a:ln>
+            <a:noFill/>
+          </a:ln>
+          <a:effectLst/>
+          <a:extLst>
+            <a:ext uri="{909E8E84-426E-40DD-AFC4-6F175D3DCCD1}">
+              <a14:hiddenFill xmlns:a14="http://schemas.microsoft.com/office/drawing/2010/main">
+                <a:solidFill>
+                  <a:schemeClr val="accent1"/>
+                </a:solidFill>
+              </a14:hiddenFill>
+            </a:ext>
+            <a:ext uri="{91240B29-F687-4F45-9708-019B960494DF}">
+              <a14:hiddenLine xmlns:a14="http://schemas.microsoft.com/office/drawing/2010/main" w="9525">
+                <a:solidFill>
+                  <a:schemeClr val="tx1"/>
+                </a:solidFill>
+                <a:miter lim="800000"/>
+                <a:headEnd/>
+                <a:tailEnd/>
+              </a14:hiddenLine>
+            </a:ext>
+            <a:ext uri="{AF507438-7753-43E0-B8FC-AC1667EBCBE1}">
+              <a14:hiddenEffects xmlns:a14="http://schemas.microsoft.com/office/drawing/2010/main">
+                <a:effectLst>
+                  <a:outerShdw dist="35921" dir="2700000" algn="ctr" rotWithShape="0">
+                    <a:schemeClr val="bg2"/>
+                  </a:outerShdw>
+                </a:effectLst>
+              </a14:hiddenEffects>
+            </a:ext>
+          </a:extLst>
         </p:spPr>
       </p:pic>
     </p:spTree>
@@ -13020,4 +12816,289 @@
   </a:objectDefaults>
   <a:extraClrSchemeLst/>
 </a:theme>
+</file>
+
+<file path=ppt/theme/theme2.xml><?xml version="1.0" encoding="utf-8"?>
+<a:theme xmlns:a="http://schemas.openxmlformats.org/drawingml/2006/main" name="Office Theme">
+  <a:themeElements>
+    <a:clrScheme name="Office">
+      <a:dk1>
+        <a:sysClr val="windowText" lastClr="000000"/>
+      </a:dk1>
+      <a:lt1>
+        <a:sysClr val="window" lastClr="FFFFFF"/>
+      </a:lt1>
+      <a:dk2>
+        <a:srgbClr val="1F497D"/>
+      </a:dk2>
+      <a:lt2>
+        <a:srgbClr val="EEECE1"/>
+      </a:lt2>
+      <a:accent1>
+        <a:srgbClr val="4F81BD"/>
+      </a:accent1>
+      <a:accent2>
+        <a:srgbClr val="C0504D"/>
+      </a:accent2>
+      <a:accent3>
+        <a:srgbClr val="9BBB59"/>
+      </a:accent3>
+      <a:accent4>
+        <a:srgbClr val="8064A2"/>
+      </a:accent4>
+      <a:accent5>
+        <a:srgbClr val="4BACC6"/>
+      </a:accent5>
+      <a:accent6>
+        <a:srgbClr val="F79646"/>
+      </a:accent6>
+      <a:hlink>
+        <a:srgbClr val="0000FF"/>
+      </a:hlink>
+      <a:folHlink>
+        <a:srgbClr val="800080"/>
+      </a:folHlink>
+    </a:clrScheme>
+    <a:fontScheme name="Office">
+      <a:majorFont>
+        <a:latin typeface="Calibri"/>
+        <a:ea typeface=""/>
+        <a:cs typeface=""/>
+        <a:font script="Jpan" typeface="ＭＳ Ｐゴシック"/>
+        <a:font script="Hang" typeface="맑은 고딕"/>
+        <a:font script="Hans" typeface="宋体"/>
+        <a:font script="Hant" typeface="新細明體"/>
+        <a:font script="Arab" typeface="Times New Roman"/>
+        <a:font script="Hebr" typeface="Times New Roman"/>
+        <a:font script="Thai" typeface="Angsana New"/>
+        <a:font script="Ethi" typeface="Nyala"/>
+        <a:font script="Beng" typeface="Vrinda"/>
+        <a:font script="Gujr" typeface="Shruti"/>
+        <a:font script="Khmr" typeface="MoolBoran"/>
+        <a:font script="Knda" typeface="Tunga"/>
+        <a:font script="Guru" typeface="Raavi"/>
+        <a:font script="Cans" typeface="Euphemia"/>
+        <a:font script="Cher" typeface="Plantagenet Cherokee"/>
+        <a:font script="Yiii" typeface="Microsoft Yi Baiti"/>
+        <a:font script="Tibt" typeface="Microsoft Himalaya"/>
+        <a:font script="Thaa" typeface="MV Boli"/>
+        <a:font script="Deva" typeface="Mangal"/>
+        <a:font script="Telu" typeface="Gautami"/>
+        <a:font script="Taml" typeface="Latha"/>
+        <a:font script="Syrc" typeface="Estrangelo Edessa"/>
+        <a:font script="Orya" typeface="Kalinga"/>
+        <a:font script="Mlym" typeface="Kartika"/>
+        <a:font script="Laoo" typeface="DokChampa"/>
+        <a:font script="Sinh" typeface="Iskoola Pota"/>
+        <a:font script="Mong" typeface="Mongolian Baiti"/>
+        <a:font script="Viet" typeface="Times New Roman"/>
+        <a:font script="Uigh" typeface="Microsoft Uighur"/>
+        <a:font script="Geor" typeface="Sylfaen"/>
+      </a:majorFont>
+      <a:minorFont>
+        <a:latin typeface="Calibri"/>
+        <a:ea typeface=""/>
+        <a:cs typeface=""/>
+        <a:font script="Jpan" typeface="ＭＳ Ｐゴシック"/>
+        <a:font script="Hang" typeface="맑은 고딕"/>
+        <a:font script="Hans" typeface="宋体"/>
+        <a:font script="Hant" typeface="新細明體"/>
+        <a:font script="Arab" typeface="Arial"/>
+        <a:font script="Hebr" typeface="Arial"/>
+        <a:font script="Thai" typeface="Cordia New"/>
+        <a:font script="Ethi" typeface="Nyala"/>
+        <a:font script="Beng" typeface="Vrinda"/>
+        <a:font script="Gujr" typeface="Shruti"/>
+        <a:font script="Khmr" typeface="DaunPenh"/>
+        <a:font script="Knda" typeface="Tunga"/>
+        <a:font script="Guru" typeface="Raavi"/>
+        <a:font script="Cans" typeface="Euphemia"/>
+        <a:font script="Cher" typeface="Plantagenet Cherokee"/>
+        <a:font script="Yiii" typeface="Microsoft Yi Baiti"/>
+        <a:font script="Tibt" typeface="Microsoft Himalaya"/>
+        <a:font script="Thaa" typeface="MV Boli"/>
+        <a:font script="Deva" typeface="Mangal"/>
+        <a:font script="Telu" typeface="Gautami"/>
+        <a:font script="Taml" typeface="Latha"/>
+        <a:font script="Syrc" typeface="Estrangelo Edessa"/>
+        <a:font script="Orya" typeface="Kalinga"/>
+        <a:font script="Mlym" typeface="Kartika"/>
+        <a:font script="Laoo" typeface="DokChampa"/>
+        <a:font script="Sinh" typeface="Iskoola Pota"/>
+        <a:font script="Mong" typeface="Mongolian Baiti"/>
+        <a:font script="Viet" typeface="Arial"/>
+        <a:font script="Uigh" typeface="Microsoft Uighur"/>
+        <a:font script="Geor" typeface="Sylfaen"/>
+      </a:minorFont>
+    </a:fontScheme>
+    <a:fmtScheme name="Office">
+      <a:fillStyleLst>
+        <a:solidFill>
+          <a:schemeClr val="phClr"/>
+        </a:solidFill>
+        <a:gradFill rotWithShape="1">
+          <a:gsLst>
+            <a:gs pos="0">
+              <a:schemeClr val="phClr">
+                <a:tint val="50000"/>
+                <a:satMod val="300000"/>
+              </a:schemeClr>
+            </a:gs>
+            <a:gs pos="35000">
+              <a:schemeClr val="phClr">
+                <a:tint val="37000"/>
+                <a:satMod val="300000"/>
+              </a:schemeClr>
+            </a:gs>
+            <a:gs pos="100000">
+              <a:schemeClr val="phClr">
+                <a:tint val="15000"/>
+                <a:satMod val="350000"/>
+              </a:schemeClr>
+            </a:gs>
+          </a:gsLst>
+          <a:lin ang="16200000" scaled="1"/>
+        </a:gradFill>
+        <a:gradFill rotWithShape="1">
+          <a:gsLst>
+            <a:gs pos="0">
+              <a:schemeClr val="phClr">
+                <a:shade val="51000"/>
+                <a:satMod val="130000"/>
+              </a:schemeClr>
+            </a:gs>
+            <a:gs pos="80000">
+              <a:schemeClr val="phClr">
+                <a:shade val="93000"/>
+                <a:satMod val="130000"/>
+              </a:schemeClr>
+            </a:gs>
+            <a:gs pos="100000">
+              <a:schemeClr val="phClr">
+                <a:shade val="94000"/>
+                <a:satMod val="135000"/>
+              </a:schemeClr>
+            </a:gs>
+          </a:gsLst>
+          <a:lin ang="16200000" scaled="0"/>
+        </a:gradFill>
+      </a:fillStyleLst>
+      <a:lnStyleLst>
+        <a:ln w="9525" cap="flat" cmpd="sng" algn="ctr">
+          <a:solidFill>
+            <a:schemeClr val="phClr">
+              <a:shade val="95000"/>
+              <a:satMod val="105000"/>
+            </a:schemeClr>
+          </a:solidFill>
+          <a:prstDash val="solid"/>
+        </a:ln>
+        <a:ln w="25400" cap="flat" cmpd="sng" algn="ctr">
+          <a:solidFill>
+            <a:schemeClr val="phClr"/>
+          </a:solidFill>
+          <a:prstDash val="solid"/>
+        </a:ln>
+        <a:ln w="38100" cap="flat" cmpd="sng" algn="ctr">
+          <a:solidFill>
+            <a:schemeClr val="phClr"/>
+          </a:solidFill>
+          <a:prstDash val="solid"/>
+        </a:ln>
+      </a:lnStyleLst>
+      <a:effectStyleLst>
+        <a:effectStyle>
+          <a:effectLst>
+            <a:outerShdw blurRad="40000" dist="20000" dir="5400000" rotWithShape="0">
+              <a:srgbClr val="000000">
+                <a:alpha val="38000"/>
+              </a:srgbClr>
+            </a:outerShdw>
+          </a:effectLst>
+        </a:effectStyle>
+        <a:effectStyle>
+          <a:effectLst>
+            <a:outerShdw blurRad="40000" dist="23000" dir="5400000" rotWithShape="0">
+              <a:srgbClr val="000000">
+                <a:alpha val="35000"/>
+              </a:srgbClr>
+            </a:outerShdw>
+          </a:effectLst>
+        </a:effectStyle>
+        <a:effectStyle>
+          <a:effectLst>
+            <a:outerShdw blurRad="40000" dist="23000" dir="5400000" rotWithShape="0">
+              <a:srgbClr val="000000">
+                <a:alpha val="35000"/>
+              </a:srgbClr>
+            </a:outerShdw>
+          </a:effectLst>
+          <a:scene3d>
+            <a:camera prst="orthographicFront">
+              <a:rot lat="0" lon="0" rev="0"/>
+            </a:camera>
+            <a:lightRig rig="threePt" dir="t">
+              <a:rot lat="0" lon="0" rev="1200000"/>
+            </a:lightRig>
+          </a:scene3d>
+          <a:sp3d>
+            <a:bevelT w="63500" h="25400"/>
+          </a:sp3d>
+        </a:effectStyle>
+      </a:effectStyleLst>
+      <a:bgFillStyleLst>
+        <a:solidFill>
+          <a:schemeClr val="phClr"/>
+        </a:solidFill>
+        <a:gradFill rotWithShape="1">
+          <a:gsLst>
+            <a:gs pos="0">
+              <a:schemeClr val="phClr">
+                <a:tint val="40000"/>
+                <a:satMod val="350000"/>
+              </a:schemeClr>
+            </a:gs>
+            <a:gs pos="40000">
+              <a:schemeClr val="phClr">
+                <a:tint val="45000"/>
+                <a:shade val="99000"/>
+                <a:satMod val="350000"/>
+              </a:schemeClr>
+            </a:gs>
+            <a:gs pos="100000">
+              <a:schemeClr val="phClr">
+                <a:shade val="20000"/>
+                <a:satMod val="255000"/>
+              </a:schemeClr>
+            </a:gs>
+          </a:gsLst>
+          <a:path path="circle">
+            <a:fillToRect l="50000" t="-80000" r="50000" b="180000"/>
+          </a:path>
+        </a:gradFill>
+        <a:gradFill rotWithShape="1">
+          <a:gsLst>
+            <a:gs pos="0">
+              <a:schemeClr val="phClr">
+                <a:tint val="80000"/>
+                <a:satMod val="300000"/>
+              </a:schemeClr>
+            </a:gs>
+            <a:gs pos="100000">
+              <a:schemeClr val="phClr">
+                <a:shade val="30000"/>
+                <a:satMod val="200000"/>
+              </a:schemeClr>
+            </a:gs>
+          </a:gsLst>
+          <a:path path="circle">
+            <a:fillToRect l="50000" t="50000" r="50000" b="50000"/>
+          </a:path>
+        </a:gradFill>
+      </a:bgFillStyleLst>
+    </a:fmtScheme>
+  </a:themeElements>
+  <a:objectDefaults/>
+  <a:extraClrSchemeLst/>
+</a:theme>
 </file>